--- a/vault/courses/cursor-composer-2/01-composer-models/slides.pptx
+++ b/vault/courses/cursor-composer-2/01-composer-models/slides.pptx
@@ -6,20 +6,20 @@
   </p:sldMasterIdLst>
   <p:sldIdLst>
     <p:sldId id="256" r:id="rId7"/>
-    <p:sldId id="257" r:id="rId8"/>
-    <p:sldId id="258" r:id="rId9"/>
-    <p:sldId id="259" r:id="rId10"/>
-    <p:sldId id="260" r:id="rId11"/>
-    <p:sldId id="261" r:id="rId12"/>
-    <p:sldId id="262" r:id="rId13"/>
-    <p:sldId id="263" r:id="rId14"/>
-    <p:sldId id="264" r:id="rId15"/>
-    <p:sldId id="265" r:id="rId16"/>
-    <p:sldId id="266" r:id="rId17"/>
-    <p:sldId id="267" r:id="rId18"/>
-    <p:sldId id="268" r:id="rId19"/>
+    <p:sldId id="257" r:id="rId9"/>
+    <p:sldId id="258" r:id="rId10"/>
+    <p:sldId id="259" r:id="rId11"/>
+    <p:sldId id="260" r:id="rId12"/>
+    <p:sldId id="261" r:id="rId13"/>
+    <p:sldId id="262" r:id="rId14"/>
+    <p:sldId id="263" r:id="rId15"/>
+    <p:sldId id="264" r:id="rId16"/>
+    <p:sldId id="265" r:id="rId17"/>
+    <p:sldId id="266" r:id="rId18"/>
+    <p:sldId id="267" r:id="rId19"/>
+    <p:sldId id="268" r:id="rId20"/>
   </p:sldIdLst>
-  <p:sldSz cx="12191695" cy="6858000" type="screen4x3"/>
+  <p:sldSz cx="12188952" cy="6858000" type="screen4x3"/>
   <p:notesSz cx="6858000" cy="9144000"/>
   <p:defaultTextStyle>
     <a:defPPr>
@@ -117,6 +117,1266 @@
     </a:lvl9pPr>
   </p:defaultTextStyle>
 </p:presentation>
+</file>
+
+<file path=ppt/notesMasters/notesMaster1.xml><?xml version="1.0" encoding="utf-8"?>
+<p:notesMaster xmlns:a="http://schemas.openxmlformats.org/drawingml/2006/main" xmlns:p="http://schemas.openxmlformats.org/presentationml/2006/main" xmlns:r="http://schemas.openxmlformats.org/officeDocument/2006/relationships">
+  <p:cSld>
+    <p:bg>
+      <p:bgRef idx="1001">
+        <a:schemeClr val="bg1"/>
+      </p:bgRef>
+    </p:bg>
+    <p:spTree>
+      <p:nvGrpSpPr>
+        <p:cNvPr id="1" name=""/>
+        <p:cNvGrpSpPr/>
+        <p:nvPr/>
+      </p:nvGrpSpPr>
+      <p:grpSpPr>
+        <a:xfrm>
+          <a:off x="0" y="0"/>
+          <a:ext cx="0" cy="0"/>
+          <a:chOff x="0" y="0"/>
+          <a:chExt cx="0" cy="0"/>
+        </a:xfrm>
+      </p:grpSpPr>
+      <p:sp>
+        <p:nvSpPr>
+          <p:cNvPr id="2" name="Header Placeholder 1"/>
+          <p:cNvSpPr>
+            <a:spLocks noGrp="1"/>
+          </p:cNvSpPr>
+          <p:nvPr>
+            <p:ph type="hdr" sz="quarter"/>
+          </p:nvPr>
+        </p:nvSpPr>
+        <p:spPr>
+          <a:xfrm>
+            <a:off x="0" y="0"/>
+            <a:ext cx="2971800" cy="457200"/>
+          </a:xfrm>
+          <a:prstGeom prst="rect">
+            <a:avLst/>
+          </a:prstGeom>
+        </p:spPr>
+        <p:txBody>
+          <a:bodyPr vert="horz" lIns="91440" tIns="45720" rIns="91440" bIns="45720" rtlCol="0"/>
+          <a:lstStyle>
+            <a:lvl1pPr algn="l">
+              <a:defRPr sz="1200"/>
+            </a:lvl1pPr>
+          </a:lstStyle>
+          <a:p>
+            <a:endParaRPr lang="en-US"/>
+          </a:p>
+        </p:txBody>
+      </p:sp>
+      <p:sp>
+        <p:nvSpPr>
+          <p:cNvPr id="3" name="Date Placeholder 2"/>
+          <p:cNvSpPr>
+            <a:spLocks noGrp="1"/>
+          </p:cNvSpPr>
+          <p:nvPr>
+            <p:ph type="dt" idx="1"/>
+          </p:nvPr>
+        </p:nvSpPr>
+        <p:spPr>
+          <a:xfrm>
+            <a:off x="3884613" y="0"/>
+            <a:ext cx="2971800" cy="457200"/>
+          </a:xfrm>
+          <a:prstGeom prst="rect">
+            <a:avLst/>
+          </a:prstGeom>
+        </p:spPr>
+        <p:txBody>
+          <a:bodyPr vert="horz" lIns="91440" tIns="45720" rIns="91440" bIns="45720" rtlCol="0"/>
+          <a:lstStyle>
+            <a:lvl1pPr algn="r">
+              <a:defRPr sz="1200"/>
+            </a:lvl1pPr>
+          </a:lstStyle>
+          <a:p>
+            <a:fld id="{0F89C1C7-3DCD-1040-A9CF-14679D8B5DDD}" type="datetimeFigureOut">
+              <a:rPr lang="en-US" smtClean="0"/>
+              <a:t>10/17/16</a:t>
+            </a:fld>
+            <a:endParaRPr lang="en-US"/>
+          </a:p>
+        </p:txBody>
+      </p:sp>
+      <p:sp>
+        <p:nvSpPr>
+          <p:cNvPr id="4" name="Slide Image Placeholder 3"/>
+          <p:cNvSpPr>
+            <a:spLocks noGrp="1" noRot="1" noChangeAspect="1"/>
+          </p:cNvSpPr>
+          <p:nvPr>
+            <p:ph type="sldImg" idx="2"/>
+          </p:nvPr>
+        </p:nvSpPr>
+        <p:spPr>
+          <a:xfrm>
+            <a:off x="1143000" y="685800"/>
+            <a:ext cx="4572000" cy="3429000"/>
+          </a:xfrm>
+          <a:prstGeom prst="rect">
+            <a:avLst/>
+          </a:prstGeom>
+          <a:noFill/>
+          <a:ln w="12700">
+            <a:solidFill>
+              <a:prstClr val="black"/>
+            </a:solidFill>
+          </a:ln>
+        </p:spPr>
+        <p:txBody>
+          <a:bodyPr vert="horz" lIns="91440" tIns="45720" rIns="91440" bIns="45720" rtlCol="0" anchor="ctr"/>
+          <a:lstStyle/>
+          <a:p>
+            <a:endParaRPr lang="en-US"/>
+          </a:p>
+        </p:txBody>
+      </p:sp>
+      <p:sp>
+        <p:nvSpPr>
+          <p:cNvPr id="5" name="Notes Placeholder 4"/>
+          <p:cNvSpPr>
+            <a:spLocks noGrp="1"/>
+          </p:cNvSpPr>
+          <p:nvPr>
+            <p:ph type="body" sz="quarter" idx="3"/>
+          </p:nvPr>
+        </p:nvSpPr>
+        <p:spPr>
+          <a:xfrm>
+            <a:off x="685800" y="4343400"/>
+            <a:ext cx="5486400" cy="4114800"/>
+          </a:xfrm>
+          <a:prstGeom prst="rect">
+            <a:avLst/>
+          </a:prstGeom>
+        </p:spPr>
+        <p:txBody>
+          <a:bodyPr vert="horz" lIns="91440" tIns="45720" rIns="91440" bIns="45720" rtlCol="0"/>
+          <a:lstStyle/>
+          <a:p>
+            <a:pPr lvl="0"/>
+            <a:r>
+              <a:rPr lang="en-US" smtClean="0"/>
+              <a:t>Click to edit Master text styles</a:t>
+            </a:r>
+          </a:p>
+          <a:p>
+            <a:pPr lvl="1"/>
+            <a:r>
+              <a:rPr lang="en-US" smtClean="0"/>
+              <a:t>Second level</a:t>
+            </a:r>
+          </a:p>
+          <a:p>
+            <a:pPr lvl="2"/>
+            <a:r>
+              <a:rPr lang="en-US" smtClean="0"/>
+              <a:t>Third level</a:t>
+            </a:r>
+          </a:p>
+          <a:p>
+            <a:pPr lvl="3"/>
+            <a:r>
+              <a:rPr lang="en-US" smtClean="0"/>
+              <a:t>Fourth level</a:t>
+            </a:r>
+          </a:p>
+          <a:p>
+            <a:pPr lvl="4"/>
+            <a:r>
+              <a:rPr lang="en-US" smtClean="0"/>
+              <a:t>Fifth level</a:t>
+            </a:r>
+            <a:endParaRPr lang="en-US"/>
+          </a:p>
+        </p:txBody>
+      </p:sp>
+      <p:sp>
+        <p:nvSpPr>
+          <p:cNvPr id="6" name="Footer Placeholder 5"/>
+          <p:cNvSpPr>
+            <a:spLocks noGrp="1"/>
+          </p:cNvSpPr>
+          <p:nvPr>
+            <p:ph type="ftr" sz="quarter" idx="4"/>
+          </p:nvPr>
+        </p:nvSpPr>
+        <p:spPr>
+          <a:xfrm>
+            <a:off x="0" y="8685213"/>
+            <a:ext cx="2971800" cy="457200"/>
+          </a:xfrm>
+          <a:prstGeom prst="rect">
+            <a:avLst/>
+          </a:prstGeom>
+        </p:spPr>
+        <p:txBody>
+          <a:bodyPr vert="horz" lIns="91440" tIns="45720" rIns="91440" bIns="45720" rtlCol="0" anchor="b"/>
+          <a:lstStyle>
+            <a:lvl1pPr algn="l">
+              <a:defRPr sz="1200"/>
+            </a:lvl1pPr>
+          </a:lstStyle>
+          <a:p>
+            <a:endParaRPr lang="en-US"/>
+          </a:p>
+        </p:txBody>
+      </p:sp>
+      <p:sp>
+        <p:nvSpPr>
+          <p:cNvPr id="7" name="Slide Number Placeholder 6"/>
+          <p:cNvSpPr>
+            <a:spLocks noGrp="1"/>
+          </p:cNvSpPr>
+          <p:nvPr>
+            <p:ph type="sldNum" sz="quarter" idx="5"/>
+          </p:nvPr>
+        </p:nvSpPr>
+        <p:spPr>
+          <a:xfrm>
+            <a:off x="3884613" y="8685213"/>
+            <a:ext cx="2971800" cy="457200"/>
+          </a:xfrm>
+          <a:prstGeom prst="rect">
+            <a:avLst/>
+          </a:prstGeom>
+        </p:spPr>
+        <p:txBody>
+          <a:bodyPr vert="horz" lIns="91440" tIns="45720" rIns="91440" bIns="45720" rtlCol="0" anchor="b"/>
+          <a:lstStyle>
+            <a:lvl1pPr algn="r">
+              <a:defRPr sz="1200"/>
+            </a:lvl1pPr>
+          </a:lstStyle>
+          <a:p>
+            <a:fld id="{BB5E49A5-4136-284D-997B-48E1D791AD67}" type="slidenum">
+              <a:rPr lang="en-US" smtClean="0"/>
+              <a:t>‹#›</a:t>
+            </a:fld>
+            <a:endParaRPr lang="en-US"/>
+          </a:p>
+        </p:txBody>
+      </p:sp>
+    </p:spTree>
+    <p:extLst>
+      <p:ext uri="{BB962C8B-B14F-4D97-AF65-F5344CB8AC3E}">
+        <p14:creationId xmlns:p14="http://schemas.microsoft.com/office/powerpoint/2010/main" val="2623252185"/>
+      </p:ext>
+    </p:extLst>
+  </p:cSld>
+  <p:clrMap bg1="lt1" tx1="dk1" bg2="lt2" tx2="dk2" accent1="accent1" accent2="accent2" accent3="accent3" accent4="accent4" accent5="accent5" accent6="accent6" hlink="hlink" folHlink="folHlink"/>
+  <p:notesStyle>
+    <a:lvl1pPr marL="0" algn="l" defTabSz="457200" rtl="0" eaLnBrk="1" latinLnBrk="0" hangingPunct="1">
+      <a:defRPr sz="1200" kern="1200">
+        <a:solidFill>
+          <a:schemeClr val="tx1"/>
+        </a:solidFill>
+        <a:latin typeface="+mn-lt"/>
+        <a:ea typeface="+mn-ea"/>
+        <a:cs typeface="+mn-cs"/>
+      </a:defRPr>
+    </a:lvl1pPr>
+    <a:lvl2pPr marL="457200" algn="l" defTabSz="457200" rtl="0" eaLnBrk="1" latinLnBrk="0" hangingPunct="1">
+      <a:defRPr sz="1200" kern="1200">
+        <a:solidFill>
+          <a:schemeClr val="tx1"/>
+        </a:solidFill>
+        <a:latin typeface="+mn-lt"/>
+        <a:ea typeface="+mn-ea"/>
+        <a:cs typeface="+mn-cs"/>
+      </a:defRPr>
+    </a:lvl2pPr>
+    <a:lvl3pPr marL="914400" algn="l" defTabSz="457200" rtl="0" eaLnBrk="1" latinLnBrk="0" hangingPunct="1">
+      <a:defRPr sz="1200" kern="1200">
+        <a:solidFill>
+          <a:schemeClr val="tx1"/>
+        </a:solidFill>
+        <a:latin typeface="+mn-lt"/>
+        <a:ea typeface="+mn-ea"/>
+        <a:cs typeface="+mn-cs"/>
+      </a:defRPr>
+    </a:lvl3pPr>
+    <a:lvl4pPr marL="1371600" algn="l" defTabSz="457200" rtl="0" eaLnBrk="1" latinLnBrk="0" hangingPunct="1">
+      <a:defRPr sz="1200" kern="1200">
+        <a:solidFill>
+          <a:schemeClr val="tx1"/>
+        </a:solidFill>
+        <a:latin typeface="+mn-lt"/>
+        <a:ea typeface="+mn-ea"/>
+        <a:cs typeface="+mn-cs"/>
+      </a:defRPr>
+    </a:lvl4pPr>
+    <a:lvl5pPr marL="1828800" algn="l" defTabSz="457200" rtl="0" eaLnBrk="1" latinLnBrk="0" hangingPunct="1">
+      <a:defRPr sz="1200" kern="1200">
+        <a:solidFill>
+          <a:schemeClr val="tx1"/>
+        </a:solidFill>
+        <a:latin typeface="+mn-lt"/>
+        <a:ea typeface="+mn-ea"/>
+        <a:cs typeface="+mn-cs"/>
+      </a:defRPr>
+    </a:lvl5pPr>
+    <a:lvl6pPr marL="2286000" algn="l" defTabSz="457200" rtl="0" eaLnBrk="1" latinLnBrk="0" hangingPunct="1">
+      <a:defRPr sz="1200" kern="1200">
+        <a:solidFill>
+          <a:schemeClr val="tx1"/>
+        </a:solidFill>
+        <a:latin typeface="+mn-lt"/>
+        <a:ea typeface="+mn-ea"/>
+        <a:cs typeface="+mn-cs"/>
+      </a:defRPr>
+    </a:lvl6pPr>
+    <a:lvl7pPr marL="2743200" algn="l" defTabSz="457200" rtl="0" eaLnBrk="1" latinLnBrk="0" hangingPunct="1">
+      <a:defRPr sz="1200" kern="1200">
+        <a:solidFill>
+          <a:schemeClr val="tx1"/>
+        </a:solidFill>
+        <a:latin typeface="+mn-lt"/>
+        <a:ea typeface="+mn-ea"/>
+        <a:cs typeface="+mn-cs"/>
+      </a:defRPr>
+    </a:lvl7pPr>
+    <a:lvl8pPr marL="3200400" algn="l" defTabSz="457200" rtl="0" eaLnBrk="1" latinLnBrk="0" hangingPunct="1">
+      <a:defRPr sz="1200" kern="1200">
+        <a:solidFill>
+          <a:schemeClr val="tx1"/>
+        </a:solidFill>
+        <a:latin typeface="+mn-lt"/>
+        <a:ea typeface="+mn-ea"/>
+        <a:cs typeface="+mn-cs"/>
+      </a:defRPr>
+    </a:lvl8pPr>
+    <a:lvl9pPr marL="3657600" algn="l" defTabSz="457200" rtl="0" eaLnBrk="1" latinLnBrk="0" hangingPunct="1">
+      <a:defRPr sz="1200" kern="1200">
+        <a:solidFill>
+          <a:schemeClr val="tx1"/>
+        </a:solidFill>
+        <a:latin typeface="+mn-lt"/>
+        <a:ea typeface="+mn-ea"/>
+        <a:cs typeface="+mn-cs"/>
+      </a:defRPr>
+    </a:lvl9pPr>
+  </p:notesStyle>
+</p:notesMaster>
+</file>
+
+<file path=ppt/notesSlides/notesSlide1.xml><?xml version="1.0" encoding="utf-8"?>
+<p:notes xmlns:a="http://schemas.openxmlformats.org/drawingml/2006/main" xmlns:p="http://schemas.openxmlformats.org/presentationml/2006/main" xmlns:r="http://schemas.openxmlformats.org/officeDocument/2006/relationships">
+  <p:cSld>
+    <p:spTree>
+      <p:nvGrpSpPr>
+        <p:cNvPr id="1" name=""/>
+        <p:cNvGrpSpPr/>
+        <p:nvPr/>
+      </p:nvGrpSpPr>
+      <p:grpSpPr>
+        <a:xfrm>
+          <a:off x="0" y="0"/>
+          <a:ext cx="0" cy="0"/>
+          <a:chOff x="0" y="0"/>
+          <a:chExt cx="0" cy="0"/>
+        </a:xfrm>
+      </p:grpSpPr>
+      <p:sp>
+        <p:nvSpPr>
+          <p:cNvPr id="2" name="Slide Image Placeholder 1"/>
+          <p:cNvSpPr>
+            <a:spLocks noGrp="1"/>
+          </p:cNvSpPr>
+          <p:nvPr>
+            <p:ph type="sldImg" idx="2"/>
+          </p:nvPr>
+        </p:nvSpPr>
+        <p:spPr/>
+      </p:sp>
+      <p:sp>
+        <p:nvSpPr>
+          <p:cNvPr id="3" name="Notes Placeholder 2"/>
+          <p:cNvSpPr>
+            <a:spLocks noGrp="1"/>
+          </p:cNvSpPr>
+          <p:nvPr>
+            <p:ph type="body" idx="3" sz="quarter"/>
+          </p:nvPr>
+        </p:nvSpPr>
+        <p:spPr/>
+        <p:txBody>
+          <a:bodyPr/>
+          <a:lstStyle/>
+          <a:p>
+            <a:r>
+              <a:t>Chapter 1 grounds learners in what Cursor Composer 2 actually is — model lineage, pricing, honest benchmark reading — and gives them two foundational project files: .cursorrules and AGENTS.md. Every subsequent chapter assumes these are set up.</a:t>
+            </a:r>
+          </a:p>
+        </p:txBody>
+      </p:sp>
+      <p:sp>
+        <p:nvSpPr>
+          <p:cNvPr id="4" name="Slide Number Placeholder 3"/>
+          <p:cNvSpPr>
+            <a:spLocks noGrp="1"/>
+          </p:cNvSpPr>
+          <p:nvPr>
+            <p:ph type="sldNum" idx="5" sz="quarter"/>
+          </p:nvPr>
+        </p:nvSpPr>
+        <p:spPr/>
+      </p:sp>
+    </p:spTree>
+  </p:cSld>
+  <p:clrMapOvr>
+    <a:masterClrMapping/>
+  </p:clrMapOvr>
+</p:notes>
+</file>
+
+<file path=ppt/notesSlides/notesSlide10.xml><?xml version="1.0" encoding="utf-8"?>
+<p:notes xmlns:a="http://schemas.openxmlformats.org/drawingml/2006/main" xmlns:p="http://schemas.openxmlformats.org/presentationml/2006/main" xmlns:r="http://schemas.openxmlformats.org/officeDocument/2006/relationships">
+  <p:cSld>
+    <p:spTree>
+      <p:nvGrpSpPr>
+        <p:cNvPr id="1" name=""/>
+        <p:cNvGrpSpPr/>
+        <p:nvPr/>
+      </p:nvGrpSpPr>
+      <p:grpSpPr>
+        <a:xfrm>
+          <a:off x="0" y="0"/>
+          <a:ext cx="0" cy="0"/>
+          <a:chOff x="0" y="0"/>
+          <a:chExt cx="0" cy="0"/>
+        </a:xfrm>
+      </p:grpSpPr>
+      <p:sp>
+        <p:nvSpPr>
+          <p:cNvPr id="2" name="Slide Image Placeholder 1"/>
+          <p:cNvSpPr>
+            <a:spLocks noGrp="1"/>
+          </p:cNvSpPr>
+          <p:nvPr>
+            <p:ph type="sldImg" idx="2"/>
+          </p:nvPr>
+        </p:nvSpPr>
+        <p:spPr/>
+      </p:sp>
+      <p:sp>
+        <p:nvSpPr>
+          <p:cNvPr id="3" name="Notes Placeholder 2"/>
+          <p:cNvSpPr>
+            <a:spLocks noGrp="1"/>
+          </p:cNvSpPr>
+          <p:nvPr>
+            <p:ph type="body" idx="3" sz="quarter"/>
+          </p:nvPr>
+        </p:nvSpPr>
+        <p:spPr/>
+        <p:txBody>
+          <a:bodyPr/>
+          <a:lstStyle/>
+          <a:p>
+            <a:r>
+              <a:t>AGENTS.md is the file that makes Cursor Background Agents safe to run on real codebases. Without it, the agent has no escalation path and will make architectural decisions silently. The escalation rules section is the highest-leverage part.</a:t>
+            </a:r>
+          </a:p>
+        </p:txBody>
+      </p:sp>
+      <p:sp>
+        <p:nvSpPr>
+          <p:cNvPr id="4" name="Slide Number Placeholder 3"/>
+          <p:cNvSpPr>
+            <a:spLocks noGrp="1"/>
+          </p:cNvSpPr>
+          <p:nvPr>
+            <p:ph type="sldNum" idx="5" sz="quarter"/>
+          </p:nvPr>
+        </p:nvSpPr>
+        <p:spPr/>
+      </p:sp>
+    </p:spTree>
+  </p:cSld>
+  <p:clrMapOvr>
+    <a:masterClrMapping/>
+  </p:clrMapOvr>
+</p:notes>
+</file>
+
+<file path=ppt/notesSlides/notesSlide11.xml><?xml version="1.0" encoding="utf-8"?>
+<p:notes xmlns:a="http://schemas.openxmlformats.org/drawingml/2006/main" xmlns:p="http://schemas.openxmlformats.org/presentationml/2006/main" xmlns:r="http://schemas.openxmlformats.org/officeDocument/2006/relationships">
+  <p:cSld>
+    <p:spTree>
+      <p:nvGrpSpPr>
+        <p:cNvPr id="1" name=""/>
+        <p:cNvGrpSpPr/>
+        <p:nvPr/>
+      </p:nvGrpSpPr>
+      <p:grpSpPr>
+        <a:xfrm>
+          <a:off x="0" y="0"/>
+          <a:ext cx="0" cy="0"/>
+          <a:chOff x="0" y="0"/>
+          <a:chExt cx="0" cy="0"/>
+        </a:xfrm>
+      </p:grpSpPr>
+      <p:sp>
+        <p:nvSpPr>
+          <p:cNvPr id="2" name="Slide Image Placeholder 1"/>
+          <p:cNvSpPr>
+            <a:spLocks noGrp="1"/>
+          </p:cNvSpPr>
+          <p:nvPr>
+            <p:ph type="sldImg" idx="2"/>
+          </p:nvPr>
+        </p:nvSpPr>
+        <p:spPr/>
+      </p:sp>
+      <p:sp>
+        <p:nvSpPr>
+          <p:cNvPr id="3" name="Notes Placeholder 2"/>
+          <p:cNvSpPr>
+            <a:spLocks noGrp="1"/>
+          </p:cNvSpPr>
+          <p:nvPr>
+            <p:ph type="body" idx="3" sz="quarter"/>
+          </p:nvPr>
+        </p:nvSpPr>
+        <p:spPr/>
+        <p:txBody>
+          <a:bodyPr/>
+          <a:lstStyle/>
+          <a:p>
+            <a:r>
+              <a:t>These five anti-patterns are distilled from community usage threads and direct production experience. The mega-session anti-pattern is the most universally underestimated — most developers do not realize context quality degrades significantly after 30+ turns.</a:t>
+            </a:r>
+          </a:p>
+        </p:txBody>
+      </p:sp>
+      <p:sp>
+        <p:nvSpPr>
+          <p:cNvPr id="4" name="Slide Number Placeholder 3"/>
+          <p:cNvSpPr>
+            <a:spLocks noGrp="1"/>
+          </p:cNvSpPr>
+          <p:nvPr>
+            <p:ph type="sldNum" idx="5" sz="quarter"/>
+          </p:nvPr>
+        </p:nvSpPr>
+        <p:spPr/>
+      </p:sp>
+    </p:spTree>
+  </p:cSld>
+  <p:clrMapOvr>
+    <a:masterClrMapping/>
+  </p:clrMapOvr>
+</p:notes>
+</file>
+
+<file path=ppt/notesSlides/notesSlide12.xml><?xml version="1.0" encoding="utf-8"?>
+<p:notes xmlns:a="http://schemas.openxmlformats.org/drawingml/2006/main" xmlns:p="http://schemas.openxmlformats.org/presentationml/2006/main" xmlns:r="http://schemas.openxmlformats.org/officeDocument/2006/relationships">
+  <p:cSld>
+    <p:spTree>
+      <p:nvGrpSpPr>
+        <p:cNvPr id="1" name=""/>
+        <p:cNvGrpSpPr/>
+        <p:nvPr/>
+      </p:nvGrpSpPr>
+      <p:grpSpPr>
+        <a:xfrm>
+          <a:off x="0" y="0"/>
+          <a:ext cx="0" cy="0"/>
+          <a:chOff x="0" y="0"/>
+          <a:chExt cx="0" cy="0"/>
+        </a:xfrm>
+      </p:grpSpPr>
+      <p:sp>
+        <p:nvSpPr>
+          <p:cNvPr id="2" name="Slide Image Placeholder 1"/>
+          <p:cNvSpPr>
+            <a:spLocks noGrp="1"/>
+          </p:cNvSpPr>
+          <p:nvPr>
+            <p:ph type="sldImg" idx="2"/>
+          </p:nvPr>
+        </p:nvSpPr>
+        <p:spPr/>
+      </p:sp>
+      <p:sp>
+        <p:nvSpPr>
+          <p:cNvPr id="3" name="Notes Placeholder 2"/>
+          <p:cNvSpPr>
+            <a:spLocks noGrp="1"/>
+          </p:cNvSpPr>
+          <p:nvPr>
+            <p:ph type="body" idx="3" sz="quarter"/>
+          </p:nvPr>
+        </p:nvSpPr>
+        <p:spPr/>
+        <p:txBody>
+          <a:bodyPr/>
+          <a:lstStyle/>
+          <a:p>
+            <a:r>
+              <a:t>These five takeaways are the chapter's core — learners should be able to recite them before proceeding to Chapter 2. The most commonly forgotten: .cursorrules needs constraint-based (verifiable) rules, not style guidance.</a:t>
+            </a:r>
+          </a:p>
+        </p:txBody>
+      </p:sp>
+      <p:sp>
+        <p:nvSpPr>
+          <p:cNvPr id="4" name="Slide Number Placeholder 3"/>
+          <p:cNvSpPr>
+            <a:spLocks noGrp="1"/>
+          </p:cNvSpPr>
+          <p:nvPr>
+            <p:ph type="sldNum" idx="5" sz="quarter"/>
+          </p:nvPr>
+        </p:nvSpPr>
+        <p:spPr/>
+      </p:sp>
+    </p:spTree>
+  </p:cSld>
+  <p:clrMapOvr>
+    <a:masterClrMapping/>
+  </p:clrMapOvr>
+</p:notes>
+</file>
+
+<file path=ppt/notesSlides/notesSlide13.xml><?xml version="1.0" encoding="utf-8"?>
+<p:notes xmlns:a="http://schemas.openxmlformats.org/drawingml/2006/main" xmlns:p="http://schemas.openxmlformats.org/presentationml/2006/main" xmlns:r="http://schemas.openxmlformats.org/officeDocument/2006/relationships">
+  <p:cSld>
+    <p:spTree>
+      <p:nvGrpSpPr>
+        <p:cNvPr id="1" name=""/>
+        <p:cNvGrpSpPr/>
+        <p:nvPr/>
+      </p:nvGrpSpPr>
+      <p:grpSpPr>
+        <a:xfrm>
+          <a:off x="0" y="0"/>
+          <a:ext cx="0" cy="0"/>
+          <a:chOff x="0" y="0"/>
+          <a:chExt cx="0" cy="0"/>
+        </a:xfrm>
+      </p:grpSpPr>
+      <p:sp>
+        <p:nvSpPr>
+          <p:cNvPr id="2" name="Slide Image Placeholder 1"/>
+          <p:cNvSpPr>
+            <a:spLocks noGrp="1"/>
+          </p:cNvSpPr>
+          <p:nvPr>
+            <p:ph type="sldImg" idx="2"/>
+          </p:nvPr>
+        </p:nvSpPr>
+        <p:spPr/>
+      </p:sp>
+      <p:sp>
+        <p:nvSpPr>
+          <p:cNvPr id="3" name="Notes Placeholder 2"/>
+          <p:cNvSpPr>
+            <a:spLocks noGrp="1"/>
+          </p:cNvSpPr>
+          <p:nvPr>
+            <p:ph type="body" idx="3" sz="quarter"/>
+          </p:nvPr>
+        </p:nvSpPr>
+        <p:spPr/>
+        <p:txBody>
+          <a:bodyPr/>
+          <a:lstStyle/>
+          <a:p>
+            <a:r>
+              <a:t>Chapter 2 builds directly on the project foundation from Chapter 1. The techniques for context window management only work well when .cursorrules and AGENTS.md are already in place. Make sure learners have completed the hands-on exercise before proceeding.</a:t>
+            </a:r>
+          </a:p>
+        </p:txBody>
+      </p:sp>
+      <p:sp>
+        <p:nvSpPr>
+          <p:cNvPr id="4" name="Slide Number Placeholder 3"/>
+          <p:cNvSpPr>
+            <a:spLocks noGrp="1"/>
+          </p:cNvSpPr>
+          <p:nvPr>
+            <p:ph type="sldNum" idx="5" sz="quarter"/>
+          </p:nvPr>
+        </p:nvSpPr>
+        <p:spPr/>
+      </p:sp>
+    </p:spTree>
+  </p:cSld>
+  <p:clrMapOvr>
+    <a:masterClrMapping/>
+  </p:clrMapOvr>
+</p:notes>
+</file>
+
+<file path=ppt/notesSlides/notesSlide2.xml><?xml version="1.0" encoding="utf-8"?>
+<p:notes xmlns:a="http://schemas.openxmlformats.org/drawingml/2006/main" xmlns:p="http://schemas.openxmlformats.org/presentationml/2006/main" xmlns:r="http://schemas.openxmlformats.org/officeDocument/2006/relationships">
+  <p:cSld>
+    <p:spTree>
+      <p:nvGrpSpPr>
+        <p:cNvPr id="1" name=""/>
+        <p:cNvGrpSpPr/>
+        <p:nvPr/>
+      </p:nvGrpSpPr>
+      <p:grpSpPr>
+        <a:xfrm>
+          <a:off x="0" y="0"/>
+          <a:ext cx="0" cy="0"/>
+          <a:chOff x="0" y="0"/>
+          <a:chExt cx="0" cy="0"/>
+        </a:xfrm>
+      </p:grpSpPr>
+      <p:sp>
+        <p:nvSpPr>
+          <p:cNvPr id="2" name="Slide Image Placeholder 1"/>
+          <p:cNvSpPr>
+            <a:spLocks noGrp="1"/>
+          </p:cNvSpPr>
+          <p:nvPr>
+            <p:ph type="sldImg" idx="2"/>
+          </p:nvPr>
+        </p:nvSpPr>
+        <p:spPr/>
+      </p:sp>
+      <p:sp>
+        <p:nvSpPr>
+          <p:cNvPr id="3" name="Notes Placeholder 2"/>
+          <p:cNvSpPr>
+            <a:spLocks noGrp="1"/>
+          </p:cNvSpPr>
+          <p:nvPr>
+            <p:ph type="body" idx="3" sz="quarter"/>
+          </p:nvPr>
+        </p:nvSpPr>
+        <p:spPr/>
+        <p:txBody>
+          <a:bodyPr/>
+          <a:lstStyle/>
+          <a:p>
+            <a:r>
+              <a:t>After this chapter, learners can explain the Composer 2 model lineage, apply the routing rubric to their own workloads, and configure the two project files that govern all AI sessions in a Cursor project.</a:t>
+            </a:r>
+          </a:p>
+        </p:txBody>
+      </p:sp>
+      <p:sp>
+        <p:nvSpPr>
+          <p:cNvPr id="4" name="Slide Number Placeholder 3"/>
+          <p:cNvSpPr>
+            <a:spLocks noGrp="1"/>
+          </p:cNvSpPr>
+          <p:nvPr>
+            <p:ph type="sldNum" idx="5" sz="quarter"/>
+          </p:nvPr>
+        </p:nvSpPr>
+        <p:spPr/>
+      </p:sp>
+    </p:spTree>
+  </p:cSld>
+  <p:clrMapOvr>
+    <a:masterClrMapping/>
+  </p:clrMapOvr>
+</p:notes>
+</file>
+
+<file path=ppt/notesSlides/notesSlide3.xml><?xml version="1.0" encoding="utf-8"?>
+<p:notes xmlns:a="http://schemas.openxmlformats.org/drawingml/2006/main" xmlns:p="http://schemas.openxmlformats.org/presentationml/2006/main" xmlns:r="http://schemas.openxmlformats.org/officeDocument/2006/relationships">
+  <p:cSld>
+    <p:spTree>
+      <p:nvGrpSpPr>
+        <p:cNvPr id="1" name=""/>
+        <p:cNvGrpSpPr/>
+        <p:nvPr/>
+      </p:nvGrpSpPr>
+      <p:grpSpPr>
+        <a:xfrm>
+          <a:off x="0" y="0"/>
+          <a:ext cx="0" cy="0"/>
+          <a:chOff x="0" y="0"/>
+          <a:chExt cx="0" cy="0"/>
+        </a:xfrm>
+      </p:grpSpPr>
+      <p:sp>
+        <p:nvSpPr>
+          <p:cNvPr id="2" name="Slide Image Placeholder 1"/>
+          <p:cNvSpPr>
+            <a:spLocks noGrp="1"/>
+          </p:cNvSpPr>
+          <p:nvPr>
+            <p:ph type="sldImg" idx="2"/>
+          </p:nvPr>
+        </p:nvSpPr>
+        <p:spPr/>
+      </p:sp>
+      <p:sp>
+        <p:nvSpPr>
+          <p:cNvPr id="3" name="Notes Placeholder 2"/>
+          <p:cNvSpPr>
+            <a:spLocks noGrp="1"/>
+          </p:cNvSpPr>
+          <p:nvPr>
+            <p:ph type="body" idx="3" sz="quarter"/>
+          </p:nvPr>
+        </p:nvSpPr>
+        <p:spPr/>
+        <p:txBody>
+          <a:bodyPr/>
+          <a:lstStyle/>
+          <a:p>
+            <a:r>
+              <a:t>Key teaching point: lineage disclosure matters not for drama but because it determines failure modes. Teams using Composer 2 for unfamiliar architecture work may hit the same gaps as Kimi K2.5. Price point changes iteration economics significantly.</a:t>
+            </a:r>
+          </a:p>
+        </p:txBody>
+      </p:sp>
+      <p:sp>
+        <p:nvSpPr>
+          <p:cNvPr id="4" name="Slide Number Placeholder 3"/>
+          <p:cNvSpPr>
+            <a:spLocks noGrp="1"/>
+          </p:cNvSpPr>
+          <p:nvPr>
+            <p:ph type="sldNum" idx="5" sz="quarter"/>
+          </p:nvPr>
+        </p:nvSpPr>
+        <p:spPr/>
+      </p:sp>
+    </p:spTree>
+  </p:cSld>
+  <p:clrMapOvr>
+    <a:masterClrMapping/>
+  </p:clrMapOvr>
+</p:notes>
+</file>
+
+<file path=ppt/notesSlides/notesSlide4.xml><?xml version="1.0" encoding="utf-8"?>
+<p:notes xmlns:a="http://schemas.openxmlformats.org/drawingml/2006/main" xmlns:p="http://schemas.openxmlformats.org/presentationml/2006/main" xmlns:r="http://schemas.openxmlformats.org/officeDocument/2006/relationships">
+  <p:cSld>
+    <p:spTree>
+      <p:nvGrpSpPr>
+        <p:cNvPr id="1" name=""/>
+        <p:cNvGrpSpPr/>
+        <p:nvPr/>
+      </p:nvGrpSpPr>
+      <p:grpSpPr>
+        <a:xfrm>
+          <a:off x="0" y="0"/>
+          <a:ext cx="0" cy="0"/>
+          <a:chOff x="0" y="0"/>
+          <a:chExt cx="0" cy="0"/>
+        </a:xfrm>
+      </p:grpSpPr>
+      <p:sp>
+        <p:nvSpPr>
+          <p:cNvPr id="2" name="Slide Image Placeholder 1"/>
+          <p:cNvSpPr>
+            <a:spLocks noGrp="1"/>
+          </p:cNvSpPr>
+          <p:nvPr>
+            <p:ph type="sldImg" idx="2"/>
+          </p:nvPr>
+        </p:nvSpPr>
+        <p:spPr/>
+      </p:sp>
+      <p:sp>
+        <p:nvSpPr>
+          <p:cNvPr id="3" name="Notes Placeholder 2"/>
+          <p:cNvSpPr>
+            <a:spLocks noGrp="1"/>
+          </p:cNvSpPr>
+          <p:nvPr>
+            <p:ph type="body" idx="3" sz="quarter"/>
+          </p:nvPr>
+        </p:nvSpPr>
+        <p:spPr/>
+        <p:txBody>
+          <a:bodyPr/>
+          <a:lstStyle/>
+          <a:p>
+            <a:r>
+              <a:t>The two-layer framework prevents both dismissal ('benchmarks mean nothing') and credulity ('it's ranked higher so we'll always use it'). The local eval habit is the practical takeaway — it is the only way to know if the model suits your stack.</a:t>
+            </a:r>
+          </a:p>
+        </p:txBody>
+      </p:sp>
+      <p:sp>
+        <p:nvSpPr>
+          <p:cNvPr id="4" name="Slide Number Placeholder 3"/>
+          <p:cNvSpPr>
+            <a:spLocks noGrp="1"/>
+          </p:cNvSpPr>
+          <p:nvPr>
+            <p:ph type="sldNum" idx="5" sz="quarter"/>
+          </p:nvPr>
+        </p:nvSpPr>
+        <p:spPr/>
+      </p:sp>
+    </p:spTree>
+  </p:cSld>
+  <p:clrMapOvr>
+    <a:masterClrMapping/>
+  </p:clrMapOvr>
+</p:notes>
+</file>
+
+<file path=ppt/notesSlides/notesSlide5.xml><?xml version="1.0" encoding="utf-8"?>
+<p:notes xmlns:a="http://schemas.openxmlformats.org/drawingml/2006/main" xmlns:p="http://schemas.openxmlformats.org/presentationml/2006/main" xmlns:r="http://schemas.openxmlformats.org/officeDocument/2006/relationships">
+  <p:cSld>
+    <p:spTree>
+      <p:nvGrpSpPr>
+        <p:cNvPr id="1" name=""/>
+        <p:cNvGrpSpPr/>
+        <p:nvPr/>
+      </p:nvGrpSpPr>
+      <p:grpSpPr>
+        <a:xfrm>
+          <a:off x="0" y="0"/>
+          <a:ext cx="0" cy="0"/>
+          <a:chOff x="0" y="0"/>
+          <a:chExt cx="0" cy="0"/>
+        </a:xfrm>
+      </p:grpSpPr>
+      <p:sp>
+        <p:nvSpPr>
+          <p:cNvPr id="2" name="Slide Image Placeholder 1"/>
+          <p:cNvSpPr>
+            <a:spLocks noGrp="1"/>
+          </p:cNvSpPr>
+          <p:nvPr>
+            <p:ph type="sldImg" idx="2"/>
+          </p:nvPr>
+        </p:nvSpPr>
+        <p:spPr/>
+      </p:sp>
+      <p:sp>
+        <p:nvSpPr>
+          <p:cNvPr id="3" name="Notes Placeholder 2"/>
+          <p:cNvSpPr>
+            <a:spLocks noGrp="1"/>
+          </p:cNvSpPr>
+          <p:nvPr>
+            <p:ph type="body" idx="3" sz="quarter"/>
+          </p:nvPr>
+        </p:nvSpPr>
+        <p:spPr/>
+        <p:txBody>
+          <a:bodyPr/>
+          <a:lstStyle/>
+          <a:p>
+            <a:r>
+              <a:t>The routing rubric is the chapter's most practically useful artifact. Ask learners: which of their weekly tasks fall into these categories? Most iterative feature work does.</a:t>
+            </a:r>
+          </a:p>
+        </p:txBody>
+      </p:sp>
+      <p:sp>
+        <p:nvSpPr>
+          <p:cNvPr id="4" name="Slide Number Placeholder 3"/>
+          <p:cNvSpPr>
+            <a:spLocks noGrp="1"/>
+          </p:cNvSpPr>
+          <p:nvPr>
+            <p:ph type="sldNum" idx="5" sz="quarter"/>
+          </p:nvPr>
+        </p:nvSpPr>
+        <p:spPr/>
+      </p:sp>
+    </p:spTree>
+  </p:cSld>
+  <p:clrMapOvr>
+    <a:masterClrMapping/>
+  </p:clrMapOvr>
+</p:notes>
+</file>
+
+<file path=ppt/notesSlides/notesSlide6.xml><?xml version="1.0" encoding="utf-8"?>
+<p:notes xmlns:a="http://schemas.openxmlformats.org/drawingml/2006/main" xmlns:p="http://schemas.openxmlformats.org/presentationml/2006/main" xmlns:r="http://schemas.openxmlformats.org/officeDocument/2006/relationships">
+  <p:cSld>
+    <p:spTree>
+      <p:nvGrpSpPr>
+        <p:cNvPr id="1" name=""/>
+        <p:cNvGrpSpPr/>
+        <p:nvPr/>
+      </p:nvGrpSpPr>
+      <p:grpSpPr>
+        <a:xfrm>
+          <a:off x="0" y="0"/>
+          <a:ext cx="0" cy="0"/>
+          <a:chOff x="0" y="0"/>
+          <a:chExt cx="0" cy="0"/>
+        </a:xfrm>
+      </p:grpSpPr>
+      <p:sp>
+        <p:nvSpPr>
+          <p:cNvPr id="2" name="Slide Image Placeholder 1"/>
+          <p:cNvSpPr>
+            <a:spLocks noGrp="1"/>
+          </p:cNvSpPr>
+          <p:nvPr>
+            <p:ph type="sldImg" idx="2"/>
+          </p:nvPr>
+        </p:nvSpPr>
+        <p:spPr/>
+      </p:sp>
+      <p:sp>
+        <p:nvSpPr>
+          <p:cNvPr id="3" name="Notes Placeholder 2"/>
+          <p:cNvSpPr>
+            <a:spLocks noGrp="1"/>
+          </p:cNvSpPr>
+          <p:nvPr>
+            <p:ph type="body" idx="3" sz="quarter"/>
+          </p:nvPr>
+        </p:nvSpPr>
+        <p:spPr/>
+        <p:txBody>
+          <a:bodyPr/>
+          <a:lstStyle/>
+          <a:p>
+            <a:r>
+              <a:t>Tip: have learners add the escalation signal as a named rule in their .cursorrules: 'If the task requires reasoning across 5+ unfamiliar subsystems, flag for human review before proceeding.' This makes the routing rubric machine-readable.</a:t>
+            </a:r>
+          </a:p>
+        </p:txBody>
+      </p:sp>
+      <p:sp>
+        <p:nvSpPr>
+          <p:cNvPr id="4" name="Slide Number Placeholder 3"/>
+          <p:cNvSpPr>
+            <a:spLocks noGrp="1"/>
+          </p:cNvSpPr>
+          <p:nvPr>
+            <p:ph type="sldNum" idx="5" sz="quarter"/>
+          </p:nvPr>
+        </p:nvSpPr>
+        <p:spPr/>
+      </p:sp>
+    </p:spTree>
+  </p:cSld>
+  <p:clrMapOvr>
+    <a:masterClrMapping/>
+  </p:clrMapOvr>
+</p:notes>
+</file>
+
+<file path=ppt/notesSlides/notesSlide7.xml><?xml version="1.0" encoding="utf-8"?>
+<p:notes xmlns:a="http://schemas.openxmlformats.org/drawingml/2006/main" xmlns:p="http://schemas.openxmlformats.org/presentationml/2006/main" xmlns:r="http://schemas.openxmlformats.org/officeDocument/2006/relationships">
+  <p:cSld>
+    <p:spTree>
+      <p:nvGrpSpPr>
+        <p:cNvPr id="1" name=""/>
+        <p:cNvGrpSpPr/>
+        <p:nvPr/>
+      </p:nvGrpSpPr>
+      <p:grpSpPr>
+        <a:xfrm>
+          <a:off x="0" y="0"/>
+          <a:ext cx="0" cy="0"/>
+          <a:chOff x="0" y="0"/>
+          <a:chExt cx="0" cy="0"/>
+        </a:xfrm>
+      </p:grpSpPr>
+      <p:sp>
+        <p:nvSpPr>
+          <p:cNvPr id="2" name="Slide Image Placeholder 1"/>
+          <p:cNvSpPr>
+            <a:spLocks noGrp="1"/>
+          </p:cNvSpPr>
+          <p:nvPr>
+            <p:ph type="sldImg" idx="2"/>
+          </p:nvPr>
+        </p:nvSpPr>
+        <p:spPr/>
+      </p:sp>
+      <p:sp>
+        <p:nvSpPr>
+          <p:cNvPr id="3" name="Notes Placeholder 2"/>
+          <p:cNvSpPr>
+            <a:spLocks noGrp="1"/>
+          </p:cNvSpPr>
+          <p:nvPr>
+            <p:ph type="body" idx="3" sz="quarter"/>
+          </p:nvPr>
+        </p:nvSpPr>
+        <p:spPr/>
+        <p:txBody>
+          <a:bodyPr/>
+          <a:lstStyle/>
+          <a:p>
+            <a:r>
+              <a:t>The core message: Auto routing is a convenience default, not a production governance strategy. Teams that cannot name the model that generated a given change are not in a position to reason about its failure modes.</a:t>
+            </a:r>
+          </a:p>
+        </p:txBody>
+      </p:sp>
+      <p:sp>
+        <p:nvSpPr>
+          <p:cNvPr id="4" name="Slide Number Placeholder 3"/>
+          <p:cNvSpPr>
+            <a:spLocks noGrp="1"/>
+          </p:cNvSpPr>
+          <p:nvPr>
+            <p:ph type="sldNum" idx="5" sz="quarter"/>
+          </p:nvPr>
+        </p:nvSpPr>
+        <p:spPr/>
+      </p:sp>
+    </p:spTree>
+  </p:cSld>
+  <p:clrMapOvr>
+    <a:masterClrMapping/>
+  </p:clrMapOvr>
+</p:notes>
+</file>
+
+<file path=ppt/notesSlides/notesSlide8.xml><?xml version="1.0" encoding="utf-8"?>
+<p:notes xmlns:a="http://schemas.openxmlformats.org/drawingml/2006/main" xmlns:p="http://schemas.openxmlformats.org/presentationml/2006/main" xmlns:r="http://schemas.openxmlformats.org/officeDocument/2006/relationships">
+  <p:cSld>
+    <p:spTree>
+      <p:nvGrpSpPr>
+        <p:cNvPr id="1" name=""/>
+        <p:cNvGrpSpPr/>
+        <p:nvPr/>
+      </p:nvGrpSpPr>
+      <p:grpSpPr>
+        <a:xfrm>
+          <a:off x="0" y="0"/>
+          <a:ext cx="0" cy="0"/>
+          <a:chOff x="0" y="0"/>
+          <a:chExt cx="0" cy="0"/>
+        </a:xfrm>
+      </p:grpSpPr>
+      <p:sp>
+        <p:nvSpPr>
+          <p:cNvPr id="2" name="Slide Image Placeholder 1"/>
+          <p:cNvSpPr>
+            <a:spLocks noGrp="1"/>
+          </p:cNvSpPr>
+          <p:nvPr>
+            <p:ph type="sldImg" idx="2"/>
+          </p:nvPr>
+        </p:nvSpPr>
+        <p:spPr/>
+      </p:sp>
+      <p:sp>
+        <p:nvSpPr>
+          <p:cNvPr id="3" name="Notes Placeholder 2"/>
+          <p:cNvSpPr>
+            <a:spLocks noGrp="1"/>
+          </p:cNvSpPr>
+          <p:nvPr>
+            <p:ph type="body" idx="3" sz="quarter"/>
+          </p:nvPr>
+        </p:nvSpPr>
+        <p:spPr/>
+        <p:txBody>
+          <a:bodyPr/>
+          <a:lstStyle/>
+          <a:p>
+            <a:r>
+              <a:t>These are the habits that separate teams that get consistent output from Composer 2 from those that fight it constantly. The workspace-root rule is the most commonly missed — many engineers open project subdirectories by habit from VS Code workflows.</a:t>
+            </a:r>
+          </a:p>
+        </p:txBody>
+      </p:sp>
+      <p:sp>
+        <p:nvSpPr>
+          <p:cNvPr id="4" name="Slide Number Placeholder 3"/>
+          <p:cNvSpPr>
+            <a:spLocks noGrp="1"/>
+          </p:cNvSpPr>
+          <p:nvPr>
+            <p:ph type="sldNum" idx="5" sz="quarter"/>
+          </p:nvPr>
+        </p:nvSpPr>
+        <p:spPr/>
+      </p:sp>
+    </p:spTree>
+  </p:cSld>
+  <p:clrMapOvr>
+    <a:masterClrMapping/>
+  </p:clrMapOvr>
+</p:notes>
+</file>
+
+<file path=ppt/notesSlides/notesSlide9.xml><?xml version="1.0" encoding="utf-8"?>
+<p:notes xmlns:a="http://schemas.openxmlformats.org/drawingml/2006/main" xmlns:p="http://schemas.openxmlformats.org/presentationml/2006/main" xmlns:r="http://schemas.openxmlformats.org/officeDocument/2006/relationships">
+  <p:cSld>
+    <p:spTree>
+      <p:nvGrpSpPr>
+        <p:cNvPr id="1" name=""/>
+        <p:cNvGrpSpPr/>
+        <p:nvPr/>
+      </p:nvGrpSpPr>
+      <p:grpSpPr>
+        <a:xfrm>
+          <a:off x="0" y="0"/>
+          <a:ext cx="0" cy="0"/>
+          <a:chOff x="0" y="0"/>
+          <a:chExt cx="0" cy="0"/>
+        </a:xfrm>
+      </p:grpSpPr>
+      <p:sp>
+        <p:nvSpPr>
+          <p:cNvPr id="2" name="Slide Image Placeholder 1"/>
+          <p:cNvSpPr>
+            <a:spLocks noGrp="1"/>
+          </p:cNvSpPr>
+          <p:nvPr>
+            <p:ph type="sldImg" idx="2"/>
+          </p:nvPr>
+        </p:nvSpPr>
+        <p:spPr/>
+      </p:sp>
+      <p:sp>
+        <p:nvSpPr>
+          <p:cNvPr id="3" name="Notes Placeholder 2"/>
+          <p:cNvSpPr>
+            <a:spLocks noGrp="1"/>
+          </p:cNvSpPr>
+          <p:nvPr>
+            <p:ph type="body" idx="3" sz="quarter"/>
+          </p:nvPr>
+        </p:nvSpPr>
+        <p:spPr/>
+        <p:txBody>
+          <a:bodyPr/>
+          <a:lstStyle/>
+          <a:p>
+            <a:r>
+              <a:t>The key principle: constraint-based rules outperform style-based rules. The model cannot operationalize vague style guidance, but it can check 'is this function longer than 40 lines?' Ask learners to list 3 verifiable rules for their own project before moving on.</a:t>
+            </a:r>
+          </a:p>
+        </p:txBody>
+      </p:sp>
+      <p:sp>
+        <p:nvSpPr>
+          <p:cNvPr id="4" name="Slide Number Placeholder 3"/>
+          <p:cNvSpPr>
+            <a:spLocks noGrp="1"/>
+          </p:cNvSpPr>
+          <p:nvPr>
+            <p:ph type="sldNum" idx="5" sz="quarter"/>
+          </p:nvPr>
+        </p:nvSpPr>
+        <p:spPr/>
+      </p:sp>
+    </p:spTree>
+  </p:cSld>
+  <p:clrMapOvr>
+    <a:masterClrMapping/>
+  </p:clrMapOvr>
+</p:notes>
 </file>
 
 <file path=ppt/slideLayouts/slideLayout1.xml><?xml version="1.0" encoding="utf-8"?>
@@ -3093,14 +4353,6 @@
 <file path=ppt/slides/slide1.xml><?xml version="1.0" encoding="utf-8"?>
 <p:sld xmlns:a="http://schemas.openxmlformats.org/drawingml/2006/main" xmlns:p="http://schemas.openxmlformats.org/presentationml/2006/main" xmlns:r="http://schemas.openxmlformats.org/officeDocument/2006/relationships">
   <p:cSld>
-    <p:bg>
-      <p:bgPr>
-        <a:solidFill>
-          <a:srgbClr val="18181B"/>
-        </a:solidFill>
-        <a:effectLst/>
-      </p:bgPr>
-    </p:bg>
     <p:spTree>
       <p:nvGrpSpPr>
         <p:cNvPr id="1" name=""/>
@@ -3110,14 +4362,186 @@
       <p:grpSpPr/>
       <p:sp>
         <p:nvSpPr>
-          <p:cNvPr id="2" name="TextBox 1"/>
+          <p:cNvPr id="2" name="Rectangle 1"/>
+          <p:cNvSpPr/>
+          <p:nvPr/>
+        </p:nvSpPr>
+        <p:spPr>
+          <a:xfrm>
+            <a:off x="0" y="0"/>
+            <a:ext cx="12188952" cy="6858000"/>
+          </a:xfrm>
+          <a:prstGeom prst="rect">
+            <a:avLst/>
+          </a:prstGeom>
+          <a:solidFill>
+            <a:srgbClr val="18181B"/>
+          </a:solidFill>
+          <a:ln>
+            <a:noFill/>
+          </a:ln>
+        </p:spPr>
+        <p:style>
+          <a:lnRef idx="1">
+            <a:schemeClr val="accent1"/>
+          </a:lnRef>
+          <a:fillRef idx="3">
+            <a:schemeClr val="accent1"/>
+          </a:fillRef>
+          <a:effectRef idx="2">
+            <a:schemeClr val="accent1"/>
+          </a:effectRef>
+          <a:fontRef idx="minor">
+            <a:schemeClr val="lt1"/>
+          </a:fontRef>
+        </p:style>
+        <p:txBody>
+          <a:bodyPr rtlCol="0" anchor="ctr"/>
+          <a:lstStyle/>
+          <a:p>
+            <a:pPr algn="ctr"/>
+          </a:p>
+        </p:txBody>
+      </p:sp>
+      <p:sp>
+        <p:nvSpPr>
+          <p:cNvPr id="3" name="Rectangle 2"/>
+          <p:cNvSpPr/>
+          <p:nvPr/>
+        </p:nvSpPr>
+        <p:spPr>
+          <a:xfrm>
+            <a:off x="0" y="0"/>
+            <a:ext cx="4062984" cy="64008"/>
+          </a:xfrm>
+          <a:prstGeom prst="rect">
+            <a:avLst/>
+          </a:prstGeom>
+          <a:solidFill>
+            <a:srgbClr val="6366F1"/>
+          </a:solidFill>
+          <a:ln>
+            <a:noFill/>
+          </a:ln>
+        </p:spPr>
+        <p:style>
+          <a:lnRef idx="1">
+            <a:schemeClr val="accent1"/>
+          </a:lnRef>
+          <a:fillRef idx="3">
+            <a:schemeClr val="accent1"/>
+          </a:fillRef>
+          <a:effectRef idx="2">
+            <a:schemeClr val="accent1"/>
+          </a:effectRef>
+          <a:fontRef idx="minor">
+            <a:schemeClr val="lt1"/>
+          </a:fontRef>
+        </p:style>
+        <p:txBody>
+          <a:bodyPr rtlCol="0" anchor="ctr"/>
+          <a:lstStyle/>
+          <a:p>
+            <a:pPr algn="ctr"/>
+          </a:p>
+        </p:txBody>
+      </p:sp>
+      <p:sp>
+        <p:nvSpPr>
+          <p:cNvPr id="4" name="Rectangle 3"/>
+          <p:cNvSpPr/>
+          <p:nvPr/>
+        </p:nvSpPr>
+        <p:spPr>
+          <a:xfrm>
+            <a:off x="4062984" y="0"/>
+            <a:ext cx="4062984" cy="64008"/>
+          </a:xfrm>
+          <a:prstGeom prst="rect">
+            <a:avLst/>
+          </a:prstGeom>
+          <a:solidFill>
+            <a:srgbClr val="8B5CF6"/>
+          </a:solidFill>
+          <a:ln>
+            <a:noFill/>
+          </a:ln>
+        </p:spPr>
+        <p:style>
+          <a:lnRef idx="1">
+            <a:schemeClr val="accent1"/>
+          </a:lnRef>
+          <a:fillRef idx="3">
+            <a:schemeClr val="accent1"/>
+          </a:fillRef>
+          <a:effectRef idx="2">
+            <a:schemeClr val="accent1"/>
+          </a:effectRef>
+          <a:fontRef idx="minor">
+            <a:schemeClr val="lt1"/>
+          </a:fontRef>
+        </p:style>
+        <p:txBody>
+          <a:bodyPr rtlCol="0" anchor="ctr"/>
+          <a:lstStyle/>
+          <a:p>
+            <a:pPr algn="ctr"/>
+          </a:p>
+        </p:txBody>
+      </p:sp>
+      <p:sp>
+        <p:nvSpPr>
+          <p:cNvPr id="5" name="Rectangle 4"/>
+          <p:cNvSpPr/>
+          <p:nvPr/>
+        </p:nvSpPr>
+        <p:spPr>
+          <a:xfrm>
+            <a:off x="8125968" y="0"/>
+            <a:ext cx="4062984" cy="64008"/>
+          </a:xfrm>
+          <a:prstGeom prst="rect">
+            <a:avLst/>
+          </a:prstGeom>
+          <a:solidFill>
+            <a:srgbClr val="10B981"/>
+          </a:solidFill>
+          <a:ln>
+            <a:noFill/>
+          </a:ln>
+        </p:spPr>
+        <p:style>
+          <a:lnRef idx="1">
+            <a:schemeClr val="accent1"/>
+          </a:lnRef>
+          <a:fillRef idx="3">
+            <a:schemeClr val="accent1"/>
+          </a:fillRef>
+          <a:effectRef idx="2">
+            <a:schemeClr val="accent1"/>
+          </a:effectRef>
+          <a:fontRef idx="minor">
+            <a:schemeClr val="lt1"/>
+          </a:fontRef>
+        </p:style>
+        <p:txBody>
+          <a:bodyPr rtlCol="0" anchor="ctr"/>
+          <a:lstStyle/>
+          <a:p>
+            <a:pPr algn="ctr"/>
+          </a:p>
+        </p:txBody>
+      </p:sp>
+      <p:sp>
+        <p:nvSpPr>
+          <p:cNvPr id="6" name="TextBox 5"/>
           <p:cNvSpPr txBox="1"/>
           <p:nvPr/>
         </p:nvSpPr>
         <p:spPr>
           <a:xfrm>
-            <a:off x="731520" y="1463040"/>
-            <a:ext cx="10789920" cy="1463040"/>
+            <a:off x="914400" y="1280160"/>
+            <a:ext cx="10332720" cy="457200"/>
           </a:xfrm>
           <a:prstGeom prst="rect">
             <a:avLst/>
@@ -3125,46 +4549,33 @@
           <a:noFill/>
         </p:spPr>
         <p:txBody>
-          <a:bodyPr wrap="none">
+          <a:bodyPr wrap="square">
             <a:spAutoFit/>
           </a:bodyPr>
           <a:lstStyle/>
           <a:p>
-            <a:pPr>
-              <a:defRPr sz="4000" b="1">
-                <a:solidFill>
-                  <a:srgbClr val="FFFFFF"/>
-                </a:solidFill>
-              </a:defRPr>
-            </a:pPr>
-            <a:r>
-              <a:t>Project: &lt;Your Project Name&gt;</a:t>
-            </a:r>
-          </a:p>
-          <a:p>
-            <a:pPr>
-              <a:defRPr sz="1800">
-                <a:solidFill>
-                  <a:srgbClr val="A1A1AA"/>
-                </a:solidFill>
-              </a:defRPr>
-            </a:pPr>
-            <a:r>
-              <a:t>Cursor Composer 2 — Chapter 1</a:t>
-            </a:r>
-          </a:p>
-        </p:txBody>
-      </p:sp>
-      <p:sp>
-        <p:nvSpPr>
-          <p:cNvPr id="3" name="TextBox 2"/>
+            <a:pPr algn="ctr"/>
+            <a:r>
+              <a:rPr sz="1500" b="1">
+                <a:solidFill>
+                  <a:srgbClr val="8B5CF6"/>
+                </a:solidFill>
+              </a:rPr>
+              <a:t>CHAPTER 1</a:t>
+            </a:r>
+          </a:p>
+        </p:txBody>
+      </p:sp>
+      <p:sp>
+        <p:nvSpPr>
+          <p:cNvPr id="7" name="TextBox 6"/>
           <p:cNvSpPr txBox="1"/>
           <p:nvPr/>
         </p:nvSpPr>
         <p:spPr>
           <a:xfrm>
-            <a:off x="457200" y="6309360"/>
-            <a:ext cx="11247120" cy="274320"/>
+            <a:off x="914400" y="1828800"/>
+            <a:ext cx="10332720" cy="1463040"/>
           </a:xfrm>
           <a:prstGeom prst="rect">
             <a:avLst/>
@@ -3172,20 +4583,164 @@
           <a:noFill/>
         </p:spPr>
         <p:txBody>
-          <a:bodyPr wrap="none">
+          <a:bodyPr wrap="square">
             <a:spAutoFit/>
           </a:bodyPr>
           <a:lstStyle/>
           <a:p>
-            <a:pPr>
-              <a:defRPr sz="1100">
+            <a:pPr algn="ctr"/>
+            <a:r>
+              <a:rPr sz="3800" b="1">
+                <a:solidFill>
+                  <a:srgbClr val="FFFFFF"/>
+                </a:solidFill>
+              </a:rPr>
+              <a:t>Composer 2 Models &amp; IDE-First Workflow (2026)</a:t>
+            </a:r>
+          </a:p>
+        </p:txBody>
+      </p:sp>
+      <p:sp>
+        <p:nvSpPr>
+          <p:cNvPr id="8" name="TextBox 7"/>
+          <p:cNvSpPr txBox="1"/>
+          <p:nvPr/>
+        </p:nvSpPr>
+        <p:spPr>
+          <a:xfrm>
+            <a:off x="914400" y="3474720"/>
+            <a:ext cx="10332720" cy="548640"/>
+          </a:xfrm>
+          <a:prstGeom prst="rect">
+            <a:avLst/>
+          </a:prstGeom>
+          <a:noFill/>
+        </p:spPr>
+        <p:txBody>
+          <a:bodyPr wrap="square">
+            <a:spAutoFit/>
+          </a:bodyPr>
+          <a:lstStyle/>
+          <a:p>
+            <a:pPr algn="ctr"/>
+            <a:r>
+              <a:rPr sz="1600" b="0">
                 <a:solidFill>
                   <a:srgbClr val="A1A1AA"/>
                 </a:solidFill>
-              </a:defRPr>
-            </a:pPr>
-            <a:r>
-              <a:t>academy.kspl.tech | Koenig AI Academy</a:t>
+              </a:rPr>
+              <a:t>Cursor Composer 2  ·  Routing Rubric  ·  .cursorrules  ·  AGENTS.md</a:t>
+            </a:r>
+          </a:p>
+        </p:txBody>
+      </p:sp>
+      <p:sp>
+        <p:nvSpPr>
+          <p:cNvPr id="9" name="TextBox 8"/>
+          <p:cNvSpPr txBox="1"/>
+          <p:nvPr/>
+        </p:nvSpPr>
+        <p:spPr>
+          <a:xfrm>
+            <a:off x="914400" y="4663440"/>
+            <a:ext cx="10332720" cy="365760"/>
+          </a:xfrm>
+          <a:prstGeom prst="rect">
+            <a:avLst/>
+          </a:prstGeom>
+          <a:noFill/>
+        </p:spPr>
+        <p:txBody>
+          <a:bodyPr wrap="square">
+            <a:spAutoFit/>
+          </a:bodyPr>
+          <a:lstStyle/>
+          <a:p>
+            <a:pPr algn="ctr"/>
+            <a:r>
+              <a:rPr sz="1200" b="0">
+                <a:solidFill>
+                  <a:srgbClr val="A1A1AA"/>
+                </a:solidFill>
+              </a:rPr>
+              <a:t>Koenig AI Academy  |  academy.kspl.tech</a:t>
+            </a:r>
+          </a:p>
+        </p:txBody>
+      </p:sp>
+      <p:sp>
+        <p:nvSpPr>
+          <p:cNvPr id="10" name="Rectangle 9"/>
+          <p:cNvSpPr/>
+          <p:nvPr/>
+        </p:nvSpPr>
+        <p:spPr>
+          <a:xfrm>
+            <a:off x="5120640" y="5669280"/>
+            <a:ext cx="1920240" cy="457200"/>
+          </a:xfrm>
+          <a:prstGeom prst="rect">
+            <a:avLst/>
+          </a:prstGeom>
+          <a:solidFill>
+            <a:srgbClr val="6366F1"/>
+          </a:solidFill>
+          <a:ln>
+            <a:noFill/>
+          </a:ln>
+        </p:spPr>
+        <p:style>
+          <a:lnRef idx="1">
+            <a:schemeClr val="accent1"/>
+          </a:lnRef>
+          <a:fillRef idx="3">
+            <a:schemeClr val="accent1"/>
+          </a:fillRef>
+          <a:effectRef idx="2">
+            <a:schemeClr val="accent1"/>
+          </a:effectRef>
+          <a:fontRef idx="minor">
+            <a:schemeClr val="lt1"/>
+          </a:fontRef>
+        </p:style>
+        <p:txBody>
+          <a:bodyPr rtlCol="0" anchor="ctr"/>
+          <a:lstStyle/>
+          <a:p>
+            <a:pPr algn="ctr"/>
+          </a:p>
+        </p:txBody>
+      </p:sp>
+      <p:sp>
+        <p:nvSpPr>
+          <p:cNvPr id="11" name="TextBox 10"/>
+          <p:cNvSpPr txBox="1"/>
+          <p:nvPr/>
+        </p:nvSpPr>
+        <p:spPr>
+          <a:xfrm>
+            <a:off x="5166360" y="5687568"/>
+            <a:ext cx="1828800" cy="384048"/>
+          </a:xfrm>
+          <a:prstGeom prst="rect">
+            <a:avLst/>
+          </a:prstGeom>
+          <a:noFill/>
+        </p:spPr>
+        <p:txBody>
+          <a:bodyPr wrap="square">
+            <a:spAutoFit/>
+          </a:bodyPr>
+          <a:lstStyle/>
+          <a:p>
+            <a:pPr algn="ctr"/>
+            <a:r>
+              <a:rPr sz="1300" b="1">
+                <a:solidFill>
+                  <a:srgbClr val="FFFFFF"/>
+                </a:solidFill>
+              </a:rPr>
+              <a:t>⏱  45 min</a:t>
             </a:r>
           </a:p>
         </p:txBody>
@@ -3201,14 +4756,6 @@
 <file path=ppt/slides/slide10.xml><?xml version="1.0" encoding="utf-8"?>
 <p:sld xmlns:a="http://schemas.openxmlformats.org/drawingml/2006/main" xmlns:p="http://schemas.openxmlformats.org/presentationml/2006/main" xmlns:r="http://schemas.openxmlformats.org/officeDocument/2006/relationships">
   <p:cSld>
-    <p:bg>
-      <p:bgPr>
-        <a:solidFill>
-          <a:srgbClr val="18181B"/>
-        </a:solidFill>
-        <a:effectLst/>
-      </p:bgPr>
-    </p:bg>
     <p:spTree>
       <p:nvGrpSpPr>
         <p:cNvPr id="1" name=""/>
@@ -3218,14 +4765,143 @@
       <p:grpSpPr/>
       <p:sp>
         <p:nvSpPr>
-          <p:cNvPr id="2" name="TextBox 1"/>
+          <p:cNvPr id="2" name="Rectangle 1"/>
+          <p:cNvSpPr/>
+          <p:nvPr/>
+        </p:nvSpPr>
+        <p:spPr>
+          <a:xfrm>
+            <a:off x="0" y="0"/>
+            <a:ext cx="12188952" cy="6858000"/>
+          </a:xfrm>
+          <a:prstGeom prst="rect">
+            <a:avLst/>
+          </a:prstGeom>
+          <a:solidFill>
+            <a:srgbClr val="F4F4F5"/>
+          </a:solidFill>
+          <a:ln>
+            <a:noFill/>
+          </a:ln>
+        </p:spPr>
+        <p:style>
+          <a:lnRef idx="1">
+            <a:schemeClr val="accent1"/>
+          </a:lnRef>
+          <a:fillRef idx="3">
+            <a:schemeClr val="accent1"/>
+          </a:fillRef>
+          <a:effectRef idx="2">
+            <a:schemeClr val="accent1"/>
+          </a:effectRef>
+          <a:fontRef idx="minor">
+            <a:schemeClr val="lt1"/>
+          </a:fontRef>
+        </p:style>
+        <p:txBody>
+          <a:bodyPr rtlCol="0" anchor="ctr"/>
+          <a:lstStyle/>
+          <a:p>
+            <a:pPr algn="ctr"/>
+          </a:p>
+        </p:txBody>
+      </p:sp>
+      <p:sp>
+        <p:nvSpPr>
+          <p:cNvPr id="3" name="Rectangle 2"/>
+          <p:cNvSpPr/>
+          <p:nvPr/>
+        </p:nvSpPr>
+        <p:spPr>
+          <a:xfrm>
+            <a:off x="0" y="0"/>
+            <a:ext cx="12188952" cy="54864"/>
+          </a:xfrm>
+          <a:prstGeom prst="rect">
+            <a:avLst/>
+          </a:prstGeom>
+          <a:solidFill>
+            <a:srgbClr val="6366F1"/>
+          </a:solidFill>
+          <a:ln>
+            <a:noFill/>
+          </a:ln>
+        </p:spPr>
+        <p:style>
+          <a:lnRef idx="1">
+            <a:schemeClr val="accent1"/>
+          </a:lnRef>
+          <a:fillRef idx="3">
+            <a:schemeClr val="accent1"/>
+          </a:fillRef>
+          <a:effectRef idx="2">
+            <a:schemeClr val="accent1"/>
+          </a:effectRef>
+          <a:fontRef idx="minor">
+            <a:schemeClr val="lt1"/>
+          </a:fontRef>
+        </p:style>
+        <p:txBody>
+          <a:bodyPr rtlCol="0" anchor="ctr"/>
+          <a:lstStyle/>
+          <a:p>
+            <a:pPr algn="ctr"/>
+          </a:p>
+        </p:txBody>
+      </p:sp>
+      <p:sp>
+        <p:nvSpPr>
+          <p:cNvPr id="4" name="Rectangle 3"/>
+          <p:cNvSpPr/>
+          <p:nvPr/>
+        </p:nvSpPr>
+        <p:spPr>
+          <a:xfrm>
+            <a:off x="0" y="54864"/>
+            <a:ext cx="228600" cy="6803136"/>
+          </a:xfrm>
+          <a:prstGeom prst="rect">
+            <a:avLst/>
+          </a:prstGeom>
+          <a:solidFill>
+            <a:srgbClr val="6366F1"/>
+          </a:solidFill>
+          <a:ln>
+            <a:noFill/>
+          </a:ln>
+        </p:spPr>
+        <p:style>
+          <a:lnRef idx="1">
+            <a:schemeClr val="accent1"/>
+          </a:lnRef>
+          <a:fillRef idx="3">
+            <a:schemeClr val="accent1"/>
+          </a:fillRef>
+          <a:effectRef idx="2">
+            <a:schemeClr val="accent1"/>
+          </a:effectRef>
+          <a:fontRef idx="minor">
+            <a:schemeClr val="lt1"/>
+          </a:fontRef>
+        </p:style>
+        <p:txBody>
+          <a:bodyPr rtlCol="0" anchor="ctr"/>
+          <a:lstStyle/>
+          <a:p>
+            <a:pPr algn="ctr"/>
+          </a:p>
+        </p:txBody>
+      </p:sp>
+      <p:sp>
+        <p:nvSpPr>
+          <p:cNvPr id="5" name="TextBox 4"/>
           <p:cNvSpPr txBox="1"/>
           <p:nvPr/>
         </p:nvSpPr>
         <p:spPr>
           <a:xfrm>
-            <a:off x="731520" y="548640"/>
-            <a:ext cx="10789920" cy="731520"/>
+            <a:off x="502920" y="164592"/>
+            <a:ext cx="11430000" cy="594360"/>
           </a:xfrm>
           <a:prstGeom prst="rect">
             <a:avLst/>
@@ -3233,34 +4909,76 @@
           <a:noFill/>
         </p:spPr>
         <p:txBody>
-          <a:bodyPr wrap="none">
+          <a:bodyPr wrap="square">
             <a:spAutoFit/>
           </a:bodyPr>
           <a:lstStyle/>
           <a:p>
-            <a:pPr>
-              <a:defRPr sz="3000" b="1">
-                <a:solidFill>
-                  <a:srgbClr val="FFFFFF"/>
-                </a:solidFill>
-              </a:defRPr>
-            </a:pPr>
-            <a:r>
-              <a:t>1.5 Setting Up the IDE Environment</a:t>
-            </a:r>
-          </a:p>
-        </p:txBody>
-      </p:sp>
-      <p:sp>
-        <p:nvSpPr>
-          <p:cNvPr id="3" name="TextBox 2"/>
+            <a:pPr algn="l"/>
+            <a:r>
+              <a:rPr sz="2600" b="1">
+                <a:solidFill>
+                  <a:srgbClr val="18181B"/>
+                </a:solidFill>
+              </a:rPr>
+              <a:t>1.7  Setting Up AGENTS.md</a:t>
+            </a:r>
+          </a:p>
+        </p:txBody>
+      </p:sp>
+      <p:sp>
+        <p:nvSpPr>
+          <p:cNvPr id="6" name="Rectangle 5"/>
+          <p:cNvSpPr/>
+          <p:nvPr/>
+        </p:nvSpPr>
+        <p:spPr>
+          <a:xfrm>
+            <a:off x="502920" y="804672"/>
+            <a:ext cx="11430000" cy="12700"/>
+          </a:xfrm>
+          <a:prstGeom prst="rect">
+            <a:avLst/>
+          </a:prstGeom>
+          <a:solidFill>
+            <a:srgbClr val="A1A1AA"/>
+          </a:solidFill>
+          <a:ln>
+            <a:noFill/>
+          </a:ln>
+        </p:spPr>
+        <p:style>
+          <a:lnRef idx="1">
+            <a:schemeClr val="accent1"/>
+          </a:lnRef>
+          <a:fillRef idx="3">
+            <a:schemeClr val="accent1"/>
+          </a:fillRef>
+          <a:effectRef idx="2">
+            <a:schemeClr val="accent1"/>
+          </a:effectRef>
+          <a:fontRef idx="minor">
+            <a:schemeClr val="lt1"/>
+          </a:fontRef>
+        </p:style>
+        <p:txBody>
+          <a:bodyPr rtlCol="0" anchor="ctr"/>
+          <a:lstStyle/>
+          <a:p>
+            <a:pPr algn="ctr"/>
+          </a:p>
+        </p:txBody>
+      </p:sp>
+      <p:sp>
+        <p:nvSpPr>
+          <p:cNvPr id="7" name="TextBox 6"/>
           <p:cNvSpPr txBox="1"/>
           <p:nvPr/>
         </p:nvSpPr>
         <p:spPr>
           <a:xfrm>
-            <a:off x="914400" y="1463040"/>
-            <a:ext cx="10241280" cy="4572000"/>
+            <a:off x="502920" y="960120"/>
+            <a:ext cx="11247120" cy="1005840"/>
           </a:xfrm>
           <a:prstGeom prst="rect">
             <a:avLst/>
@@ -3268,82 +4986,33 @@
           <a:noFill/>
         </p:spPr>
         <p:txBody>
-          <a:bodyPr wrap="none">
+          <a:bodyPr wrap="square">
             <a:spAutoFit/>
           </a:bodyPr>
           <a:lstStyle/>
           <a:p>
-            <a:pPr>
-              <a:defRPr sz="2000">
-                <a:solidFill>
-                  <a:srgbClr val="FFFFFF"/>
-                </a:solidFill>
-              </a:defRPr>
-            </a:pPr>
-            <a:r>
-              <a:t>• Before configuring AI behavior, the physical IDE setup matters. Cursor inherits from VS Code; if you have existing VS Code settings, they...</a:t>
-            </a:r>
-          </a:p>
-          <a:p>
-            <a:pPr>
-              <a:defRPr sz="2000">
-                <a:solidFill>
-                  <a:srgbClr val="FFFFFF"/>
-                </a:solidFill>
-              </a:defRPr>
-            </a:pPr>
-            <a:r>
-              <a:t>• Workspace layout</a:t>
-            </a:r>
-          </a:p>
-          <a:p>
-            <a:pPr>
-              <a:defRPr sz="2000">
-                <a:solidFill>
-                  <a:srgbClr val="FFFFFF"/>
-                </a:solidFill>
-              </a:defRPr>
-            </a:pPr>
-            <a:r>
-              <a:t>• Open the root of the repository, not a subdirectory. Composer uses the workspace root to discover `.cursorrules` and to scope context-win...</a:t>
-            </a:r>
-          </a:p>
-          <a:p>
-            <a:pPr>
-              <a:defRPr sz="2000">
-                <a:solidFill>
-                  <a:srgbClr val="FFFFFF"/>
-                </a:solidFill>
-              </a:defRPr>
-            </a:pPr>
-            <a:r>
-              <a:t>• Enable the file tree panel — Composer needs to be able to read the file structure to make sensible multi-file edits.</a:t>
-            </a:r>
-          </a:p>
-          <a:p>
-            <a:pPr>
-              <a:defRPr sz="2000">
-                <a:solidFill>
-                  <a:srgbClr val="FFFFFF"/>
-                </a:solidFill>
-              </a:defRPr>
-            </a:pPr>
-            <a:r>
-              <a:t>• Turn on inline diff mode: `Settings → Editor → Diff: Inline Mode`. This makes AI-generated changes visibly separated from your code, redu...</a:t>
-            </a:r>
-          </a:p>
-        </p:txBody>
-      </p:sp>
-      <p:sp>
-        <p:nvSpPr>
-          <p:cNvPr id="4" name="TextBox 3"/>
+            <a:pPr algn="l"/>
+            <a:r>
+              <a:rPr sz="1500">
+                <a:solidFill>
+                  <a:srgbClr val="18181B"/>
+                </a:solidFill>
+              </a:rPr>
+              <a:t>▸  AGENTS.md serves a different purpose than .cursorrules: .cursorrules governs how the AI writes code; AGENTS.md provides project context — what the system is, how it is structured, what agents are active, and escalation rules</a:t>
+            </a:r>
+          </a:p>
+        </p:txBody>
+      </p:sp>
+      <p:sp>
+        <p:nvSpPr>
+          <p:cNvPr id="8" name="TextBox 7"/>
           <p:cNvSpPr txBox="1"/>
           <p:nvPr/>
         </p:nvSpPr>
         <p:spPr>
           <a:xfrm>
-            <a:off x="457200" y="6309360"/>
-            <a:ext cx="11247120" cy="274320"/>
+            <a:off x="502920" y="1828800"/>
+            <a:ext cx="11247120" cy="1005840"/>
           </a:xfrm>
           <a:prstGeom prst="rect">
             <a:avLst/>
@@ -3351,20 +5020,155 @@
           <a:noFill/>
         </p:spPr>
         <p:txBody>
-          <a:bodyPr wrap="none">
+          <a:bodyPr wrap="square">
             <a:spAutoFit/>
           </a:bodyPr>
           <a:lstStyle/>
           <a:p>
-            <a:pPr>
-              <a:defRPr sz="1100">
+            <a:pPr algn="l"/>
+            <a:r>
+              <a:rPr sz="1500">
+                <a:solidFill>
+                  <a:srgbClr val="18181B"/>
+                </a:solidFill>
+              </a:rPr>
+              <a:t>▸  Critical for multi-agent Cursor workflows: a Background Agent running a long task needs to understand the project without a live human in the loop; AGENTS.md is the document that grounds every agent session in real constraints</a:t>
+            </a:r>
+          </a:p>
+        </p:txBody>
+      </p:sp>
+      <p:sp>
+        <p:nvSpPr>
+          <p:cNvPr id="9" name="TextBox 8"/>
+          <p:cNvSpPr txBox="1"/>
+          <p:nvPr/>
+        </p:nvSpPr>
+        <p:spPr>
+          <a:xfrm>
+            <a:off x="502920" y="2697480"/>
+            <a:ext cx="11247120" cy="1005840"/>
+          </a:xfrm>
+          <a:prstGeom prst="rect">
+            <a:avLst/>
+          </a:prstGeom>
+          <a:noFill/>
+        </p:spPr>
+        <p:txBody>
+          <a:bodyPr wrap="square">
+            <a:spAutoFit/>
+          </a:bodyPr>
+          <a:lstStyle/>
+          <a:p>
+            <a:pPr algn="l"/>
+            <a:r>
+              <a:rPr sz="1500">
+                <a:solidFill>
+                  <a:srgbClr val="18181B"/>
+                </a:solidFill>
+              </a:rPr>
+              <a:t>▸  Required sections: project purpose (one paragraph), directory architecture, active agents with scope limits ('no autonomous push rights — all changes require human review'), and ≥ 2 explicit escalation rules</a:t>
+            </a:r>
+          </a:p>
+        </p:txBody>
+      </p:sp>
+      <p:sp>
+        <p:nvSpPr>
+          <p:cNvPr id="10" name="TextBox 9"/>
+          <p:cNvSpPr txBox="1"/>
+          <p:nvPr/>
+        </p:nvSpPr>
+        <p:spPr>
+          <a:xfrm>
+            <a:off x="502920" y="3566160"/>
+            <a:ext cx="11247120" cy="1005840"/>
+          </a:xfrm>
+          <a:prstGeom prst="rect">
+            <a:avLst/>
+          </a:prstGeom>
+          <a:noFill/>
+        </p:spPr>
+        <p:txBody>
+          <a:bodyPr wrap="square">
+            <a:spAutoFit/>
+          </a:bodyPr>
+          <a:lstStyle/>
+          <a:p>
+            <a:pPr algn="l"/>
+            <a:r>
+              <a:rPr sz="1500">
+                <a:solidFill>
+                  <a:srgbClr val="18181B"/>
+                </a:solidFill>
+              </a:rPr>
+              <a:t>▸  Escalation rules must name real risk boundaries: 'Any change to /server/auth → flag for security review before commit', 'Any DB migration → run drizzle-kit check and confirm no destructive ops'</a:t>
+            </a:r>
+          </a:p>
+        </p:txBody>
+      </p:sp>
+      <p:sp>
+        <p:nvSpPr>
+          <p:cNvPr id="11" name="TextBox 10"/>
+          <p:cNvSpPr txBox="1"/>
+          <p:nvPr/>
+        </p:nvSpPr>
+        <p:spPr>
+          <a:xfrm>
+            <a:off x="502920" y="4434840"/>
+            <a:ext cx="11247120" cy="1005840"/>
+          </a:xfrm>
+          <a:prstGeom prst="rect">
+            <a:avLst/>
+          </a:prstGeom>
+          <a:noFill/>
+        </p:spPr>
+        <p:txBody>
+          <a:bodyPr wrap="square">
+            <a:spAutoFit/>
+          </a:bodyPr>
+          <a:lstStyle/>
+          <a:p>
+            <a:pPr algn="l"/>
+            <a:r>
+              <a:rPr sz="1500">
+                <a:solidFill>
+                  <a:srgbClr val="18181B"/>
+                </a:solidFill>
+              </a:rPr>
+              <a:t>▸  Both files are needed together: .cursorrules alone leaves agents without project context; AGENTS.md alone leaves them without behavioral constraints</a:t>
+            </a:r>
+          </a:p>
+        </p:txBody>
+      </p:sp>
+      <p:sp>
+        <p:nvSpPr>
+          <p:cNvPr id="12" name="TextBox 11"/>
+          <p:cNvSpPr txBox="1"/>
+          <p:nvPr/>
+        </p:nvSpPr>
+        <p:spPr>
+          <a:xfrm>
+            <a:off x="457200" y="6510528"/>
+            <a:ext cx="10972800" cy="274320"/>
+          </a:xfrm>
+          <a:prstGeom prst="rect">
+            <a:avLst/>
+          </a:prstGeom>
+          <a:noFill/>
+        </p:spPr>
+        <p:txBody>
+          <a:bodyPr wrap="square">
+            <a:spAutoFit/>
+          </a:bodyPr>
+          <a:lstStyle/>
+          <a:p>
+            <a:pPr algn="l"/>
+            <a:r>
+              <a:rPr sz="900" b="0">
                 <a:solidFill>
                   <a:srgbClr val="A1A1AA"/>
                 </a:solidFill>
-              </a:defRPr>
-            </a:pPr>
-            <a:r>
-              <a:t>academy.kspl.tech | Koenig AI Academy</a:t>
+              </a:rPr>
+              <a:t>academy.kspl.tech  |  Koenig AI Academy</a:t>
             </a:r>
           </a:p>
         </p:txBody>
@@ -3380,14 +5184,6 @@
 <file path=ppt/slides/slide11.xml><?xml version="1.0" encoding="utf-8"?>
 <p:sld xmlns:a="http://schemas.openxmlformats.org/drawingml/2006/main" xmlns:p="http://schemas.openxmlformats.org/presentationml/2006/main" xmlns:r="http://schemas.openxmlformats.org/officeDocument/2006/relationships">
   <p:cSld>
-    <p:bg>
-      <p:bgPr>
-        <a:solidFill>
-          <a:srgbClr val="18181B"/>
-        </a:solidFill>
-        <a:effectLst/>
-      </p:bgPr>
-    </p:bg>
     <p:spTree>
       <p:nvGrpSpPr>
         <p:cNvPr id="1" name=""/>
@@ -3397,14 +5193,143 @@
       <p:grpSpPr/>
       <p:sp>
         <p:nvSpPr>
-          <p:cNvPr id="2" name="TextBox 1"/>
+          <p:cNvPr id="2" name="Rectangle 1"/>
+          <p:cNvSpPr/>
+          <p:nvPr/>
+        </p:nvSpPr>
+        <p:spPr>
+          <a:xfrm>
+            <a:off x="0" y="0"/>
+            <a:ext cx="12188952" cy="6858000"/>
+          </a:xfrm>
+          <a:prstGeom prst="rect">
+            <a:avLst/>
+          </a:prstGeom>
+          <a:solidFill>
+            <a:srgbClr val="F4F4F5"/>
+          </a:solidFill>
+          <a:ln>
+            <a:noFill/>
+          </a:ln>
+        </p:spPr>
+        <p:style>
+          <a:lnRef idx="1">
+            <a:schemeClr val="accent1"/>
+          </a:lnRef>
+          <a:fillRef idx="3">
+            <a:schemeClr val="accent1"/>
+          </a:fillRef>
+          <a:effectRef idx="2">
+            <a:schemeClr val="accent1"/>
+          </a:effectRef>
+          <a:fontRef idx="minor">
+            <a:schemeClr val="lt1"/>
+          </a:fontRef>
+        </p:style>
+        <p:txBody>
+          <a:bodyPr rtlCol="0" anchor="ctr"/>
+          <a:lstStyle/>
+          <a:p>
+            <a:pPr algn="ctr"/>
+          </a:p>
+        </p:txBody>
+      </p:sp>
+      <p:sp>
+        <p:nvSpPr>
+          <p:cNvPr id="3" name="Rectangle 2"/>
+          <p:cNvSpPr/>
+          <p:nvPr/>
+        </p:nvSpPr>
+        <p:spPr>
+          <a:xfrm>
+            <a:off x="0" y="0"/>
+            <a:ext cx="12188952" cy="54864"/>
+          </a:xfrm>
+          <a:prstGeom prst="rect">
+            <a:avLst/>
+          </a:prstGeom>
+          <a:solidFill>
+            <a:srgbClr val="6366F1"/>
+          </a:solidFill>
+          <a:ln>
+            <a:noFill/>
+          </a:ln>
+        </p:spPr>
+        <p:style>
+          <a:lnRef idx="1">
+            <a:schemeClr val="accent1"/>
+          </a:lnRef>
+          <a:fillRef idx="3">
+            <a:schemeClr val="accent1"/>
+          </a:fillRef>
+          <a:effectRef idx="2">
+            <a:schemeClr val="accent1"/>
+          </a:effectRef>
+          <a:fontRef idx="minor">
+            <a:schemeClr val="lt1"/>
+          </a:fontRef>
+        </p:style>
+        <p:txBody>
+          <a:bodyPr rtlCol="0" anchor="ctr"/>
+          <a:lstStyle/>
+          <a:p>
+            <a:pPr algn="ctr"/>
+          </a:p>
+        </p:txBody>
+      </p:sp>
+      <p:sp>
+        <p:nvSpPr>
+          <p:cNvPr id="4" name="Rectangle 3"/>
+          <p:cNvSpPr/>
+          <p:nvPr/>
+        </p:nvSpPr>
+        <p:spPr>
+          <a:xfrm>
+            <a:off x="0" y="54864"/>
+            <a:ext cx="228600" cy="6803136"/>
+          </a:xfrm>
+          <a:prstGeom prst="rect">
+            <a:avLst/>
+          </a:prstGeom>
+          <a:solidFill>
+            <a:srgbClr val="6366F1"/>
+          </a:solidFill>
+          <a:ln>
+            <a:noFill/>
+          </a:ln>
+        </p:spPr>
+        <p:style>
+          <a:lnRef idx="1">
+            <a:schemeClr val="accent1"/>
+          </a:lnRef>
+          <a:fillRef idx="3">
+            <a:schemeClr val="accent1"/>
+          </a:fillRef>
+          <a:effectRef idx="2">
+            <a:schemeClr val="accent1"/>
+          </a:effectRef>
+          <a:fontRef idx="minor">
+            <a:schemeClr val="lt1"/>
+          </a:fontRef>
+        </p:style>
+        <p:txBody>
+          <a:bodyPr rtlCol="0" anchor="ctr"/>
+          <a:lstStyle/>
+          <a:p>
+            <a:pPr algn="ctr"/>
+          </a:p>
+        </p:txBody>
+      </p:sp>
+      <p:sp>
+        <p:nvSpPr>
+          <p:cNvPr id="5" name="TextBox 4"/>
           <p:cNvSpPr txBox="1"/>
           <p:nvPr/>
         </p:nvSpPr>
         <p:spPr>
           <a:xfrm>
-            <a:off x="731520" y="548640"/>
-            <a:ext cx="10789920" cy="731520"/>
+            <a:off x="502920" y="164592"/>
+            <a:ext cx="11430000" cy="594360"/>
           </a:xfrm>
           <a:prstGeom prst="rect">
             <a:avLst/>
@@ -3412,34 +5337,76 @@
           <a:noFill/>
         </p:spPr>
         <p:txBody>
-          <a:bodyPr wrap="none">
+          <a:bodyPr wrap="square">
             <a:spAutoFit/>
           </a:bodyPr>
           <a:lstStyle/>
           <a:p>
-            <a:pPr>
-              <a:defRPr sz="3000" b="1">
-                <a:solidFill>
-                  <a:srgbClr val="FFFFFF"/>
-                </a:solidFill>
-              </a:defRPr>
-            </a:pPr>
-            <a:r>
-              <a:t>1.5 Setting Up the IDE Environment (continued)</a:t>
-            </a:r>
-          </a:p>
-        </p:txBody>
-      </p:sp>
-      <p:sp>
-        <p:nvSpPr>
-          <p:cNvPr id="3" name="TextBox 2"/>
+            <a:pPr algn="l"/>
+            <a:r>
+              <a:rPr sz="2600" b="1">
+                <a:solidFill>
+                  <a:srgbClr val="18181B"/>
+                </a:solidFill>
+              </a:rPr>
+              <a:t>1.8  Common Pitfalls &amp; Anti-Patterns</a:t>
+            </a:r>
+          </a:p>
+        </p:txBody>
+      </p:sp>
+      <p:sp>
+        <p:nvSpPr>
+          <p:cNvPr id="6" name="Rectangle 5"/>
+          <p:cNvSpPr/>
+          <p:nvPr/>
+        </p:nvSpPr>
+        <p:spPr>
+          <a:xfrm>
+            <a:off x="502920" y="804672"/>
+            <a:ext cx="11430000" cy="12700"/>
+          </a:xfrm>
+          <a:prstGeom prst="rect">
+            <a:avLst/>
+          </a:prstGeom>
+          <a:solidFill>
+            <a:srgbClr val="A1A1AA"/>
+          </a:solidFill>
+          <a:ln>
+            <a:noFill/>
+          </a:ln>
+        </p:spPr>
+        <p:style>
+          <a:lnRef idx="1">
+            <a:schemeClr val="accent1"/>
+          </a:lnRef>
+          <a:fillRef idx="3">
+            <a:schemeClr val="accent1"/>
+          </a:fillRef>
+          <a:effectRef idx="2">
+            <a:schemeClr val="accent1"/>
+          </a:effectRef>
+          <a:fontRef idx="minor">
+            <a:schemeClr val="lt1"/>
+          </a:fontRef>
+        </p:style>
+        <p:txBody>
+          <a:bodyPr rtlCol="0" anchor="ctr"/>
+          <a:lstStyle/>
+          <a:p>
+            <a:pPr algn="ctr"/>
+          </a:p>
+        </p:txBody>
+      </p:sp>
+      <p:sp>
+        <p:nvSpPr>
+          <p:cNvPr id="7" name="TextBox 6"/>
           <p:cNvSpPr txBox="1"/>
           <p:nvPr/>
         </p:nvSpPr>
         <p:spPr>
           <a:xfrm>
-            <a:off x="914400" y="1463040"/>
-            <a:ext cx="10241280" cy="4572000"/>
+            <a:off x="502920" y="960120"/>
+            <a:ext cx="11247120" cy="1005840"/>
           </a:xfrm>
           <a:prstGeom prst="rect">
             <a:avLst/>
@@ -3447,46 +5414,33 @@
           <a:noFill/>
         </p:spPr>
         <p:txBody>
-          <a:bodyPr wrap="none">
+          <a:bodyPr wrap="square">
             <a:spAutoFit/>
           </a:bodyPr>
           <a:lstStyle/>
           <a:p>
-            <a:pPr>
-              <a:defRPr sz="2000">
-                <a:solidFill>
-                  <a:srgbClr val="FFFFFF"/>
-                </a:solidFill>
-              </a:defRPr>
-            </a:pPr>
-            <a:r>
-              <a:t>• Context window hygiene</a:t>
-            </a:r>
-          </a:p>
-          <a:p>
-            <a:pPr>
-              <a:defRPr sz="2000">
-                <a:solidFill>
-                  <a:srgbClr val="FFFFFF"/>
-                </a:solidFill>
-              </a:defRPr>
-            </a:pPr>
-            <a:r>
-              <a:t>• Cursor's context window is not unlimited. Pasting large files, opening many tabs, and running long sessions all erode context quality. Th...</a:t>
-            </a:r>
-          </a:p>
-        </p:txBody>
-      </p:sp>
-      <p:sp>
-        <p:nvSpPr>
-          <p:cNvPr id="4" name="TextBox 3"/>
+            <a:pPr algn="l"/>
+            <a:r>
+              <a:rPr sz="1500">
+                <a:solidFill>
+                  <a:srgbClr val="18181B"/>
+                </a:solidFill>
+              </a:rPr>
+              <a:t>▸  Vague .cursorrules: 'Write clean code' is not enforceable; the model cannot operationalize 'clean' — replace every vague guideline with a specific, measurable constraint the model can verify</a:t>
+            </a:r>
+          </a:p>
+        </p:txBody>
+      </p:sp>
+      <p:sp>
+        <p:nvSpPr>
+          <p:cNvPr id="8" name="TextBox 7"/>
           <p:cNvSpPr txBox="1"/>
           <p:nvPr/>
         </p:nvSpPr>
         <p:spPr>
           <a:xfrm>
-            <a:off x="457200" y="6309360"/>
-            <a:ext cx="11247120" cy="274320"/>
+            <a:off x="502920" y="1828800"/>
+            <a:ext cx="11247120" cy="1005840"/>
           </a:xfrm>
           <a:prstGeom prst="rect">
             <a:avLst/>
@@ -3494,20 +5448,155 @@
           <a:noFill/>
         </p:spPr>
         <p:txBody>
-          <a:bodyPr wrap="none">
+          <a:bodyPr wrap="square">
             <a:spAutoFit/>
           </a:bodyPr>
           <a:lstStyle/>
           <a:p>
-            <a:pPr>
-              <a:defRPr sz="1100">
+            <a:pPr algn="l"/>
+            <a:r>
+              <a:rPr sz="1500">
+                <a:solidFill>
+                  <a:srgbClr val="18181B"/>
+                </a:solidFill>
+              </a:rPr>
+              <a:t>▸  One mega-session per day: running 60+ turns in a single session degrades output quality as context fills with earlier conversation turns — start a new session per discrete task</a:t>
+            </a:r>
+          </a:p>
+        </p:txBody>
+      </p:sp>
+      <p:sp>
+        <p:nvSpPr>
+          <p:cNvPr id="9" name="TextBox 8"/>
+          <p:cNvSpPr txBox="1"/>
+          <p:nvPr/>
+        </p:nvSpPr>
+        <p:spPr>
+          <a:xfrm>
+            <a:off x="502920" y="2697480"/>
+            <a:ext cx="11247120" cy="1005840"/>
+          </a:xfrm>
+          <a:prstGeom prst="rect">
+            <a:avLst/>
+          </a:prstGeom>
+          <a:noFill/>
+        </p:spPr>
+        <p:txBody>
+          <a:bodyPr wrap="square">
+            <a:spAutoFit/>
+          </a:bodyPr>
+          <a:lstStyle/>
+          <a:p>
+            <a:pPr algn="l"/>
+            <a:r>
+              <a:rPr sz="1500">
+                <a:solidFill>
+                  <a:srgbClr val="18181B"/>
+                </a:solidFill>
+              </a:rPr>
+              <a:t>▸  Auto routing in production-critical sessions: for demos, security-sensitive work, or any session requiring reproducible behavior, pin the model explicitly; Auto optimizes for Cursor's metrics, not yours</a:t>
+            </a:r>
+          </a:p>
+        </p:txBody>
+      </p:sp>
+      <p:sp>
+        <p:nvSpPr>
+          <p:cNvPr id="10" name="TextBox 9"/>
+          <p:cNvSpPr txBox="1"/>
+          <p:nvPr/>
+        </p:nvSpPr>
+        <p:spPr>
+          <a:xfrm>
+            <a:off x="502920" y="3566160"/>
+            <a:ext cx="11247120" cy="1005840"/>
+          </a:xfrm>
+          <a:prstGeom prst="rect">
+            <a:avLst/>
+          </a:prstGeom>
+          <a:noFill/>
+        </p:spPr>
+        <p:txBody>
+          <a:bodyPr wrap="square">
+            <a:spAutoFit/>
+          </a:bodyPr>
+          <a:lstStyle/>
+          <a:p>
+            <a:pPr algn="l"/>
+            <a:r>
+              <a:rPr sz="1500">
+                <a:solidFill>
+                  <a:srgbClr val="18181B"/>
+                </a:solidFill>
+              </a:rPr>
+              <a:t>▸  No AGENTS.md in multi-agent workflows: without project context and escalation rules, Background Agents have no boundary for what they must not do autonomously</a:t>
+            </a:r>
+          </a:p>
+        </p:txBody>
+      </p:sp>
+      <p:sp>
+        <p:nvSpPr>
+          <p:cNvPr id="11" name="TextBox 10"/>
+          <p:cNvSpPr txBox="1"/>
+          <p:nvPr/>
+        </p:nvSpPr>
+        <p:spPr>
+          <a:xfrm>
+            <a:off x="502920" y="4434840"/>
+            <a:ext cx="11247120" cy="1005840"/>
+          </a:xfrm>
+          <a:prstGeom prst="rect">
+            <a:avLst/>
+          </a:prstGeom>
+          <a:noFill/>
+        </p:spPr>
+        <p:txBody>
+          <a:bodyPr wrap="square">
+            <a:spAutoFit/>
+          </a:bodyPr>
+          <a:lstStyle/>
+          <a:p>
+            <a:pPr algn="l"/>
+            <a:r>
+              <a:rPr sz="1500">
+                <a:solidFill>
+                  <a:srgbClr val="18181B"/>
+                </a:solidFill>
+              </a:rPr>
+              <a:t>▸  Treating benchmark superiority as task-specific superiority: Composer 2 outperforms some frontier models on CursorBench, but that benchmark does not represent your specific hard debugging tasks — always calibrate on your workload</a:t>
+            </a:r>
+          </a:p>
+        </p:txBody>
+      </p:sp>
+      <p:sp>
+        <p:nvSpPr>
+          <p:cNvPr id="12" name="TextBox 11"/>
+          <p:cNvSpPr txBox="1"/>
+          <p:nvPr/>
+        </p:nvSpPr>
+        <p:spPr>
+          <a:xfrm>
+            <a:off x="457200" y="6510528"/>
+            <a:ext cx="10972800" cy="274320"/>
+          </a:xfrm>
+          <a:prstGeom prst="rect">
+            <a:avLst/>
+          </a:prstGeom>
+          <a:noFill/>
+        </p:spPr>
+        <p:txBody>
+          <a:bodyPr wrap="square">
+            <a:spAutoFit/>
+          </a:bodyPr>
+          <a:lstStyle/>
+          <a:p>
+            <a:pPr algn="l"/>
+            <a:r>
+              <a:rPr sz="900" b="0">
                 <a:solidFill>
                   <a:srgbClr val="A1A1AA"/>
                 </a:solidFill>
-              </a:defRPr>
-            </a:pPr>
-            <a:r>
-              <a:t>academy.kspl.tech | Koenig AI Academy</a:t>
+              </a:rPr>
+              <a:t>academy.kspl.tech  |  Koenig AI Academy</a:t>
             </a:r>
           </a:p>
         </p:txBody>
@@ -3523,14 +5612,6 @@
 <file path=ppt/slides/slide12.xml><?xml version="1.0" encoding="utf-8"?>
 <p:sld xmlns:a="http://schemas.openxmlformats.org/drawingml/2006/main" xmlns:p="http://schemas.openxmlformats.org/presentationml/2006/main" xmlns:r="http://schemas.openxmlformats.org/officeDocument/2006/relationships">
   <p:cSld>
-    <p:bg>
-      <p:bgPr>
-        <a:solidFill>
-          <a:srgbClr val="18181B"/>
-        </a:solidFill>
-        <a:effectLst/>
-      </p:bgPr>
-    </p:bg>
     <p:spTree>
       <p:nvGrpSpPr>
         <p:cNvPr id="1" name=""/>
@@ -3540,14 +5621,100 @@
       <p:grpSpPr/>
       <p:sp>
         <p:nvSpPr>
-          <p:cNvPr id="2" name="TextBox 1"/>
+          <p:cNvPr id="2" name="Rectangle 1"/>
+          <p:cNvSpPr/>
+          <p:nvPr/>
+        </p:nvSpPr>
+        <p:spPr>
+          <a:xfrm>
+            <a:off x="0" y="0"/>
+            <a:ext cx="12188952" cy="6858000"/>
+          </a:xfrm>
+          <a:prstGeom prst="rect">
+            <a:avLst/>
+          </a:prstGeom>
+          <a:solidFill>
+            <a:srgbClr val="F4F4F5"/>
+          </a:solidFill>
+          <a:ln>
+            <a:noFill/>
+          </a:ln>
+        </p:spPr>
+        <p:style>
+          <a:lnRef idx="1">
+            <a:schemeClr val="accent1"/>
+          </a:lnRef>
+          <a:fillRef idx="3">
+            <a:schemeClr val="accent1"/>
+          </a:fillRef>
+          <a:effectRef idx="2">
+            <a:schemeClr val="accent1"/>
+          </a:effectRef>
+          <a:fontRef idx="minor">
+            <a:schemeClr val="lt1"/>
+          </a:fontRef>
+        </p:style>
+        <p:txBody>
+          <a:bodyPr rtlCol="0" anchor="ctr"/>
+          <a:lstStyle/>
+          <a:p>
+            <a:pPr algn="ctr"/>
+          </a:p>
+        </p:txBody>
+      </p:sp>
+      <p:sp>
+        <p:nvSpPr>
+          <p:cNvPr id="3" name="Rectangle 2"/>
+          <p:cNvSpPr/>
+          <p:nvPr/>
+        </p:nvSpPr>
+        <p:spPr>
+          <a:xfrm>
+            <a:off x="0" y="0"/>
+            <a:ext cx="12188952" cy="54864"/>
+          </a:xfrm>
+          <a:prstGeom prst="rect">
+            <a:avLst/>
+          </a:prstGeom>
+          <a:solidFill>
+            <a:srgbClr val="6366F1"/>
+          </a:solidFill>
+          <a:ln>
+            <a:noFill/>
+          </a:ln>
+        </p:spPr>
+        <p:style>
+          <a:lnRef idx="1">
+            <a:schemeClr val="accent1"/>
+          </a:lnRef>
+          <a:fillRef idx="3">
+            <a:schemeClr val="accent1"/>
+          </a:fillRef>
+          <a:effectRef idx="2">
+            <a:schemeClr val="accent1"/>
+          </a:effectRef>
+          <a:fontRef idx="minor">
+            <a:schemeClr val="lt1"/>
+          </a:fontRef>
+        </p:style>
+        <p:txBody>
+          <a:bodyPr rtlCol="0" anchor="ctr"/>
+          <a:lstStyle/>
+          <a:p>
+            <a:pPr algn="ctr"/>
+          </a:p>
+        </p:txBody>
+      </p:sp>
+      <p:sp>
+        <p:nvSpPr>
+          <p:cNvPr id="4" name="TextBox 3"/>
           <p:cNvSpPr txBox="1"/>
           <p:nvPr/>
         </p:nvSpPr>
         <p:spPr>
           <a:xfrm>
-            <a:off x="731520" y="548640"/>
-            <a:ext cx="10789920" cy="731520"/>
+            <a:off x="457200" y="164592"/>
+            <a:ext cx="10972800" cy="594360"/>
           </a:xfrm>
           <a:prstGeom prst="rect">
             <a:avLst/>
@@ -3555,34 +5722,119 @@
           <a:noFill/>
         </p:spPr>
         <p:txBody>
-          <a:bodyPr wrap="none">
+          <a:bodyPr wrap="square">
             <a:spAutoFit/>
           </a:bodyPr>
           <a:lstStyle/>
           <a:p>
-            <a:pPr>
-              <a:defRPr sz="3000" b="1">
-                <a:solidFill>
-                  <a:srgbClr val="FFFFFF"/>
-                </a:solidFill>
-              </a:defRPr>
-            </a:pPr>
-            <a:r>
-              <a:t>1.6 Configuring `.cursorrules`</a:t>
-            </a:r>
-          </a:p>
-        </p:txBody>
-      </p:sp>
-      <p:sp>
-        <p:nvSpPr>
-          <p:cNvPr id="3" name="TextBox 2"/>
+            <a:pPr algn="l"/>
+            <a:r>
+              <a:rPr sz="2600" b="1">
+                <a:solidFill>
+                  <a:srgbClr val="18181B"/>
+                </a:solidFill>
+              </a:rPr>
+              <a:t>Chapter 1 — Key Takeaways</a:t>
+            </a:r>
+          </a:p>
+        </p:txBody>
+      </p:sp>
+      <p:sp>
+        <p:nvSpPr>
+          <p:cNvPr id="5" name="Rectangle 4"/>
+          <p:cNvSpPr/>
+          <p:nvPr/>
+        </p:nvSpPr>
+        <p:spPr>
+          <a:xfrm>
+            <a:off x="457200" y="804672"/>
+            <a:ext cx="11247120" cy="12700"/>
+          </a:xfrm>
+          <a:prstGeom prst="rect">
+            <a:avLst/>
+          </a:prstGeom>
+          <a:solidFill>
+            <a:srgbClr val="A1A1AA"/>
+          </a:solidFill>
+          <a:ln>
+            <a:noFill/>
+          </a:ln>
+        </p:spPr>
+        <p:style>
+          <a:lnRef idx="1">
+            <a:schemeClr val="accent1"/>
+          </a:lnRef>
+          <a:fillRef idx="3">
+            <a:schemeClr val="accent1"/>
+          </a:fillRef>
+          <a:effectRef idx="2">
+            <a:schemeClr val="accent1"/>
+          </a:effectRef>
+          <a:fontRef idx="minor">
+            <a:schemeClr val="lt1"/>
+          </a:fontRef>
+        </p:style>
+        <p:txBody>
+          <a:bodyPr rtlCol="0" anchor="ctr"/>
+          <a:lstStyle/>
+          <a:p>
+            <a:pPr algn="ctr"/>
+          </a:p>
+        </p:txBody>
+      </p:sp>
+      <p:sp>
+        <p:nvSpPr>
+          <p:cNvPr id="6" name="Rectangle 5"/>
+          <p:cNvSpPr/>
+          <p:nvPr/>
+        </p:nvSpPr>
+        <p:spPr>
+          <a:xfrm>
+            <a:off x="457200" y="1024128"/>
+            <a:ext cx="164592" cy="731520"/>
+          </a:xfrm>
+          <a:prstGeom prst="rect">
+            <a:avLst/>
+          </a:prstGeom>
+          <a:solidFill>
+            <a:srgbClr val="6366F1"/>
+          </a:solidFill>
+          <a:ln>
+            <a:noFill/>
+          </a:ln>
+        </p:spPr>
+        <p:style>
+          <a:lnRef idx="1">
+            <a:schemeClr val="accent1"/>
+          </a:lnRef>
+          <a:fillRef idx="3">
+            <a:schemeClr val="accent1"/>
+          </a:fillRef>
+          <a:effectRef idx="2">
+            <a:schemeClr val="accent1"/>
+          </a:effectRef>
+          <a:fontRef idx="minor">
+            <a:schemeClr val="lt1"/>
+          </a:fontRef>
+        </p:style>
+        <p:txBody>
+          <a:bodyPr rtlCol="0" anchor="ctr"/>
+          <a:lstStyle/>
+          <a:p>
+            <a:pPr algn="ctr"/>
+          </a:p>
+        </p:txBody>
+      </p:sp>
+      <p:sp>
+        <p:nvSpPr>
+          <p:cNvPr id="7" name="TextBox 6"/>
           <p:cNvSpPr txBox="1"/>
           <p:nvPr/>
         </p:nvSpPr>
         <p:spPr>
           <a:xfrm>
-            <a:off x="914400" y="1463040"/>
-            <a:ext cx="10241280" cy="4572000"/>
+            <a:off x="749808" y="932688"/>
+            <a:ext cx="10972800" cy="384048"/>
           </a:xfrm>
           <a:prstGeom prst="rect">
             <a:avLst/>
@@ -3590,82 +5842,32 @@
           <a:noFill/>
         </p:spPr>
         <p:txBody>
-          <a:bodyPr wrap="none">
+          <a:bodyPr wrap="square">
             <a:spAutoFit/>
           </a:bodyPr>
           <a:lstStyle/>
           <a:p>
-            <a:pPr>
-              <a:defRPr sz="2000">
-                <a:solidFill>
-                  <a:srgbClr val="FFFFFF"/>
-                </a:solidFill>
-              </a:defRPr>
-            </a:pPr>
-            <a:r>
-              <a:t>• `.cursorrules` is Cursor's project-level AI instruction file. It lives in the repository root and is loaded at the start of every Compose...</a:t>
-            </a:r>
-          </a:p>
-          <a:p>
-            <a:pPr>
-              <a:defRPr sz="2000">
-                <a:solidFill>
-                  <a:srgbClr val="FFFFFF"/>
-                </a:solidFill>
-              </a:defRPr>
-            </a:pPr>
-            <a:r>
-              <a:t>• A weak `.cursorrules` file looks like this:</a:t>
-            </a:r>
-          </a:p>
-          <a:p>
-            <a:pPr>
-              <a:defRPr sz="2000">
-                <a:solidFill>
-                  <a:srgbClr val="FFFFFF"/>
-                </a:solidFill>
-              </a:defRPr>
-            </a:pPr>
-            <a:r>
-              <a:t>• Write clean, readable code.</a:t>
-            </a:r>
-          </a:p>
-          <a:p>
-            <a:pPr>
-              <a:defRPr sz="2000">
-                <a:solidFill>
-                  <a:srgbClr val="FFFFFF"/>
-                </a:solidFill>
-              </a:defRPr>
-            </a:pPr>
-            <a:r>
-              <a:t>• Use TypeScript.</a:t>
-            </a:r>
-          </a:p>
-          <a:p>
-            <a:pPr>
-              <a:defRPr sz="2000">
-                <a:solidFill>
-                  <a:srgbClr val="FFFFFF"/>
-                </a:solidFill>
-              </a:defRPr>
-            </a:pPr>
-            <a:r>
-              <a:t>• Follow best practices.</a:t>
-            </a:r>
-          </a:p>
-        </p:txBody>
-      </p:sp>
-      <p:sp>
-        <p:nvSpPr>
-          <p:cNvPr id="4" name="TextBox 3"/>
+            <a:r>
+              <a:rPr sz="1400" b="1">
+                <a:solidFill>
+                  <a:srgbClr val="18181B"/>
+                </a:solidFill>
+              </a:rPr>
+              <a:t>Composer 2 = Kimi K2.5 + large-scale RL</a:t>
+            </a:r>
+          </a:p>
+        </p:txBody>
+      </p:sp>
+      <p:sp>
+        <p:nvSpPr>
+          <p:cNvPr id="8" name="TextBox 7"/>
           <p:cNvSpPr txBox="1"/>
           <p:nvPr/>
         </p:nvSpPr>
         <p:spPr>
           <a:xfrm>
-            <a:off x="457200" y="6309360"/>
-            <a:ext cx="11247120" cy="274320"/>
+            <a:off x="749808" y="1298448"/>
+            <a:ext cx="10972800" cy="502920"/>
           </a:xfrm>
           <a:prstGeom prst="rect">
             <a:avLst/>
@@ -3673,20 +5875,488 @@
           <a:noFill/>
         </p:spPr>
         <p:txBody>
-          <a:bodyPr wrap="none">
+          <a:bodyPr wrap="square">
             <a:spAutoFit/>
           </a:bodyPr>
           <a:lstStyle/>
           <a:p>
-            <a:pPr>
-              <a:defRPr sz="1100">
+            <a:r>
+              <a:rPr sz="1100">
+                <a:solidFill>
+                  <a:srgbClr val="444444"/>
+                </a:solidFill>
+              </a:rPr>
+              <a:t>Two-phase training for agentic IDE tasks; $0.50/M input changes iteration economics</a:t>
+            </a:r>
+          </a:p>
+        </p:txBody>
+      </p:sp>
+      <p:sp>
+        <p:nvSpPr>
+          <p:cNvPr id="9" name="Rectangle 8"/>
+          <p:cNvSpPr/>
+          <p:nvPr/>
+        </p:nvSpPr>
+        <p:spPr>
+          <a:xfrm>
+            <a:off x="457200" y="2029968"/>
+            <a:ext cx="164592" cy="731520"/>
+          </a:xfrm>
+          <a:prstGeom prst="rect">
+            <a:avLst/>
+          </a:prstGeom>
+          <a:solidFill>
+            <a:srgbClr val="8B5CF6"/>
+          </a:solidFill>
+          <a:ln>
+            <a:noFill/>
+          </a:ln>
+        </p:spPr>
+        <p:style>
+          <a:lnRef idx="1">
+            <a:schemeClr val="accent1"/>
+          </a:lnRef>
+          <a:fillRef idx="3">
+            <a:schemeClr val="accent1"/>
+          </a:fillRef>
+          <a:effectRef idx="2">
+            <a:schemeClr val="accent1"/>
+          </a:effectRef>
+          <a:fontRef idx="minor">
+            <a:schemeClr val="lt1"/>
+          </a:fontRef>
+        </p:style>
+        <p:txBody>
+          <a:bodyPr rtlCol="0" anchor="ctr"/>
+          <a:lstStyle/>
+          <a:p>
+            <a:pPr algn="ctr"/>
+          </a:p>
+        </p:txBody>
+      </p:sp>
+      <p:sp>
+        <p:nvSpPr>
+          <p:cNvPr id="10" name="TextBox 9"/>
+          <p:cNvSpPr txBox="1"/>
+          <p:nvPr/>
+        </p:nvSpPr>
+        <p:spPr>
+          <a:xfrm>
+            <a:off x="749808" y="1938528"/>
+            <a:ext cx="10972800" cy="384048"/>
+          </a:xfrm>
+          <a:prstGeom prst="rect">
+            <a:avLst/>
+          </a:prstGeom>
+          <a:noFill/>
+        </p:spPr>
+        <p:txBody>
+          <a:bodyPr wrap="square">
+            <a:spAutoFit/>
+          </a:bodyPr>
+          <a:lstStyle/>
+          <a:p>
+            <a:r>
+              <a:rPr sz="1400" b="1">
+                <a:solidFill>
+                  <a:srgbClr val="18181B"/>
+                </a:solidFill>
+              </a:rPr>
+              <a:t>Two-layer benchmark reading</a:t>
+            </a:r>
+          </a:p>
+        </p:txBody>
+      </p:sp>
+      <p:sp>
+        <p:nvSpPr>
+          <p:cNvPr id="11" name="TextBox 10"/>
+          <p:cNvSpPr txBox="1"/>
+          <p:nvPr/>
+        </p:nvSpPr>
+        <p:spPr>
+          <a:xfrm>
+            <a:off x="749808" y="2304288"/>
+            <a:ext cx="10972800" cy="502920"/>
+          </a:xfrm>
+          <a:prstGeom prst="rect">
+            <a:avLst/>
+          </a:prstGeom>
+          <a:noFill/>
+        </p:spPr>
+        <p:txBody>
+          <a:bodyPr wrap="square">
+            <a:spAutoFit/>
+          </a:bodyPr>
+          <a:lstStyle/>
+          <a:p>
+            <a:r>
+              <a:rPr sz="1100">
+                <a:solidFill>
+                  <a:srgbClr val="444444"/>
+                </a:solidFill>
+              </a:rPr>
+              <a:t>Directional signal (rankings) + local task evals (your actual workload) — never one alone</a:t>
+            </a:r>
+          </a:p>
+        </p:txBody>
+      </p:sp>
+      <p:sp>
+        <p:nvSpPr>
+          <p:cNvPr id="12" name="Rectangle 11"/>
+          <p:cNvSpPr/>
+          <p:nvPr/>
+        </p:nvSpPr>
+        <p:spPr>
+          <a:xfrm>
+            <a:off x="457200" y="3035808"/>
+            <a:ext cx="164592" cy="731520"/>
+          </a:xfrm>
+          <a:prstGeom prst="rect">
+            <a:avLst/>
+          </a:prstGeom>
+          <a:solidFill>
+            <a:srgbClr val="10B981"/>
+          </a:solidFill>
+          <a:ln>
+            <a:noFill/>
+          </a:ln>
+        </p:spPr>
+        <p:style>
+          <a:lnRef idx="1">
+            <a:schemeClr val="accent1"/>
+          </a:lnRef>
+          <a:fillRef idx="3">
+            <a:schemeClr val="accent1"/>
+          </a:fillRef>
+          <a:effectRef idx="2">
+            <a:schemeClr val="accent1"/>
+          </a:effectRef>
+          <a:fontRef idx="minor">
+            <a:schemeClr val="lt1"/>
+          </a:fontRef>
+        </p:style>
+        <p:txBody>
+          <a:bodyPr rtlCol="0" anchor="ctr"/>
+          <a:lstStyle/>
+          <a:p>
+            <a:pPr algn="ctr"/>
+          </a:p>
+        </p:txBody>
+      </p:sp>
+      <p:sp>
+        <p:nvSpPr>
+          <p:cNvPr id="13" name="TextBox 12"/>
+          <p:cNvSpPr txBox="1"/>
+          <p:nvPr/>
+        </p:nvSpPr>
+        <p:spPr>
+          <a:xfrm>
+            <a:off x="749808" y="2944368"/>
+            <a:ext cx="10972800" cy="384048"/>
+          </a:xfrm>
+          <a:prstGeom prst="rect">
+            <a:avLst/>
+          </a:prstGeom>
+          <a:noFill/>
+        </p:spPr>
+        <p:txBody>
+          <a:bodyPr wrap="square">
+            <a:spAutoFit/>
+          </a:bodyPr>
+          <a:lstStyle/>
+          <a:p>
+            <a:r>
+              <a:rPr sz="1400" b="1">
+                <a:solidFill>
+                  <a:srgbClr val="18181B"/>
+                </a:solidFill>
+              </a:rPr>
+              <a:t>Route by task class, not by preference</a:t>
+            </a:r>
+          </a:p>
+        </p:txBody>
+      </p:sp>
+      <p:sp>
+        <p:nvSpPr>
+          <p:cNvPr id="14" name="TextBox 13"/>
+          <p:cNvSpPr txBox="1"/>
+          <p:nvPr/>
+        </p:nvSpPr>
+        <p:spPr>
+          <a:xfrm>
+            <a:off x="749808" y="3310128"/>
+            <a:ext cx="10972800" cy="502920"/>
+          </a:xfrm>
+          <a:prstGeom prst="rect">
+            <a:avLst/>
+          </a:prstGeom>
+          <a:noFill/>
+        </p:spPr>
+        <p:txBody>
+          <a:bodyPr wrap="square">
+            <a:spAutoFit/>
+          </a:bodyPr>
+          <a:lstStyle/>
+          <a:p>
+            <a:r>
+              <a:rPr sz="1100">
+                <a:solidFill>
+                  <a:srgbClr val="444444"/>
+                </a:solidFill>
+              </a:rPr>
+              <a:t>Composer 2 for iteration loops; frontier models for unfamiliar architecture and security-sensitive reasoning</a:t>
+            </a:r>
+          </a:p>
+        </p:txBody>
+      </p:sp>
+      <p:sp>
+        <p:nvSpPr>
+          <p:cNvPr id="15" name="Rectangle 14"/>
+          <p:cNvSpPr/>
+          <p:nvPr/>
+        </p:nvSpPr>
+        <p:spPr>
+          <a:xfrm>
+            <a:off x="457200" y="4041648"/>
+            <a:ext cx="164592" cy="731520"/>
+          </a:xfrm>
+          <a:prstGeom prst="rect">
+            <a:avLst/>
+          </a:prstGeom>
+          <a:solidFill>
+            <a:srgbClr val="F59E0B"/>
+          </a:solidFill>
+          <a:ln>
+            <a:noFill/>
+          </a:ln>
+        </p:spPr>
+        <p:style>
+          <a:lnRef idx="1">
+            <a:schemeClr val="accent1"/>
+          </a:lnRef>
+          <a:fillRef idx="3">
+            <a:schemeClr val="accent1"/>
+          </a:fillRef>
+          <a:effectRef idx="2">
+            <a:schemeClr val="accent1"/>
+          </a:effectRef>
+          <a:fontRef idx="minor">
+            <a:schemeClr val="lt1"/>
+          </a:fontRef>
+        </p:style>
+        <p:txBody>
+          <a:bodyPr rtlCol="0" anchor="ctr"/>
+          <a:lstStyle/>
+          <a:p>
+            <a:pPr algn="ctr"/>
+          </a:p>
+        </p:txBody>
+      </p:sp>
+      <p:sp>
+        <p:nvSpPr>
+          <p:cNvPr id="16" name="TextBox 15"/>
+          <p:cNvSpPr txBox="1"/>
+          <p:nvPr/>
+        </p:nvSpPr>
+        <p:spPr>
+          <a:xfrm>
+            <a:off x="749808" y="3950208"/>
+            <a:ext cx="10972800" cy="384048"/>
+          </a:xfrm>
+          <a:prstGeom prst="rect">
+            <a:avLst/>
+          </a:prstGeom>
+          <a:noFill/>
+        </p:spPr>
+        <p:txBody>
+          <a:bodyPr wrap="square">
+            <a:spAutoFit/>
+          </a:bodyPr>
+          <a:lstStyle/>
+          <a:p>
+            <a:r>
+              <a:rPr sz="1400" b="1">
+                <a:solidFill>
+                  <a:srgbClr val="18181B"/>
+                </a:solidFill>
+              </a:rPr>
+              <a:t>.cursorrules = constraint-based, not style-based</a:t>
+            </a:r>
+          </a:p>
+        </p:txBody>
+      </p:sp>
+      <p:sp>
+        <p:nvSpPr>
+          <p:cNvPr id="17" name="TextBox 16"/>
+          <p:cNvSpPr txBox="1"/>
+          <p:nvPr/>
+        </p:nvSpPr>
+        <p:spPr>
+          <a:xfrm>
+            <a:off x="749808" y="4315968"/>
+            <a:ext cx="10972800" cy="502920"/>
+          </a:xfrm>
+          <a:prstGeom prst="rect">
+            <a:avLst/>
+          </a:prstGeom>
+          <a:noFill/>
+        </p:spPr>
+        <p:txBody>
+          <a:bodyPr wrap="square">
+            <a:spAutoFit/>
+          </a:bodyPr>
+          <a:lstStyle/>
+          <a:p>
+            <a:r>
+              <a:rPr sz="1100">
+                <a:solidFill>
+                  <a:srgbClr val="444444"/>
+                </a:solidFill>
+              </a:rPr>
+              <a:t>Verifiable rules outperform vague guidelines; forbidden patterns section is as important as standards</a:t>
+            </a:r>
+          </a:p>
+        </p:txBody>
+      </p:sp>
+      <p:sp>
+        <p:nvSpPr>
+          <p:cNvPr id="18" name="Rectangle 17"/>
+          <p:cNvSpPr/>
+          <p:nvPr/>
+        </p:nvSpPr>
+        <p:spPr>
+          <a:xfrm>
+            <a:off x="457200" y="5047488"/>
+            <a:ext cx="164592" cy="731520"/>
+          </a:xfrm>
+          <a:prstGeom prst="rect">
+            <a:avLst/>
+          </a:prstGeom>
+          <a:solidFill>
+            <a:srgbClr val="EF4444"/>
+          </a:solidFill>
+          <a:ln>
+            <a:noFill/>
+          </a:ln>
+        </p:spPr>
+        <p:style>
+          <a:lnRef idx="1">
+            <a:schemeClr val="accent1"/>
+          </a:lnRef>
+          <a:fillRef idx="3">
+            <a:schemeClr val="accent1"/>
+          </a:fillRef>
+          <a:effectRef idx="2">
+            <a:schemeClr val="accent1"/>
+          </a:effectRef>
+          <a:fontRef idx="minor">
+            <a:schemeClr val="lt1"/>
+          </a:fontRef>
+        </p:style>
+        <p:txBody>
+          <a:bodyPr rtlCol="0" anchor="ctr"/>
+          <a:lstStyle/>
+          <a:p>
+            <a:pPr algn="ctr"/>
+          </a:p>
+        </p:txBody>
+      </p:sp>
+      <p:sp>
+        <p:nvSpPr>
+          <p:cNvPr id="19" name="TextBox 18"/>
+          <p:cNvSpPr txBox="1"/>
+          <p:nvPr/>
+        </p:nvSpPr>
+        <p:spPr>
+          <a:xfrm>
+            <a:off x="749808" y="4956048"/>
+            <a:ext cx="10972800" cy="384048"/>
+          </a:xfrm>
+          <a:prstGeom prst="rect">
+            <a:avLst/>
+          </a:prstGeom>
+          <a:noFill/>
+        </p:spPr>
+        <p:txBody>
+          <a:bodyPr wrap="square">
+            <a:spAutoFit/>
+          </a:bodyPr>
+          <a:lstStyle/>
+          <a:p>
+            <a:r>
+              <a:rPr sz="1400" b="1">
+                <a:solidFill>
+                  <a:srgbClr val="18181B"/>
+                </a:solidFill>
+              </a:rPr>
+              <a:t>AGENTS.md grounds every agent session</a:t>
+            </a:r>
+          </a:p>
+        </p:txBody>
+      </p:sp>
+      <p:sp>
+        <p:nvSpPr>
+          <p:cNvPr id="20" name="TextBox 19"/>
+          <p:cNvSpPr txBox="1"/>
+          <p:nvPr/>
+        </p:nvSpPr>
+        <p:spPr>
+          <a:xfrm>
+            <a:off x="749808" y="5321808"/>
+            <a:ext cx="10972800" cy="502920"/>
+          </a:xfrm>
+          <a:prstGeom prst="rect">
+            <a:avLst/>
+          </a:prstGeom>
+          <a:noFill/>
+        </p:spPr>
+        <p:txBody>
+          <a:bodyPr wrap="square">
+            <a:spAutoFit/>
+          </a:bodyPr>
+          <a:lstStyle/>
+          <a:p>
+            <a:r>
+              <a:rPr sz="1100">
+                <a:solidFill>
+                  <a:srgbClr val="444444"/>
+                </a:solidFill>
+              </a:rPr>
+              <a:t>Project context + escalation rules are the difference between safe and unsafe Background Agent runs</a:t>
+            </a:r>
+          </a:p>
+        </p:txBody>
+      </p:sp>
+      <p:sp>
+        <p:nvSpPr>
+          <p:cNvPr id="21" name="TextBox 20"/>
+          <p:cNvSpPr txBox="1"/>
+          <p:nvPr/>
+        </p:nvSpPr>
+        <p:spPr>
+          <a:xfrm>
+            <a:off x="457200" y="6510528"/>
+            <a:ext cx="10972800" cy="274320"/>
+          </a:xfrm>
+          <a:prstGeom prst="rect">
+            <a:avLst/>
+          </a:prstGeom>
+          <a:noFill/>
+        </p:spPr>
+        <p:txBody>
+          <a:bodyPr wrap="square">
+            <a:spAutoFit/>
+          </a:bodyPr>
+          <a:lstStyle/>
+          <a:p>
+            <a:pPr algn="l"/>
+            <a:r>
+              <a:rPr sz="900" b="0">
                 <a:solidFill>
                   <a:srgbClr val="A1A1AA"/>
                 </a:solidFill>
-              </a:defRPr>
-            </a:pPr>
-            <a:r>
-              <a:t>academy.kspl.tech | Koenig AI Academy</a:t>
+              </a:rPr>
+              <a:t>academy.kspl.tech  |  Koenig AI Academy</a:t>
             </a:r>
           </a:p>
         </p:txBody>
@@ -3702,14 +6372,6 @@
 <file path=ppt/slides/slide13.xml><?xml version="1.0" encoding="utf-8"?>
 <p:sld xmlns:a="http://schemas.openxmlformats.org/drawingml/2006/main" xmlns:p="http://schemas.openxmlformats.org/presentationml/2006/main" xmlns:r="http://schemas.openxmlformats.org/officeDocument/2006/relationships">
   <p:cSld>
-    <p:bg>
-      <p:bgPr>
-        <a:solidFill>
-          <a:srgbClr val="18181B"/>
-        </a:solidFill>
-        <a:effectLst/>
-      </p:bgPr>
-    </p:bg>
     <p:spTree>
       <p:nvGrpSpPr>
         <p:cNvPr id="1" name=""/>
@@ -3719,14 +6381,186 @@
       <p:grpSpPr/>
       <p:sp>
         <p:nvSpPr>
-          <p:cNvPr id="2" name="TextBox 1"/>
+          <p:cNvPr id="2" name="Rectangle 1"/>
+          <p:cNvSpPr/>
+          <p:nvPr/>
+        </p:nvSpPr>
+        <p:spPr>
+          <a:xfrm>
+            <a:off x="0" y="0"/>
+            <a:ext cx="12188952" cy="6858000"/>
+          </a:xfrm>
+          <a:prstGeom prst="rect">
+            <a:avLst/>
+          </a:prstGeom>
+          <a:solidFill>
+            <a:srgbClr val="18181B"/>
+          </a:solidFill>
+          <a:ln>
+            <a:noFill/>
+          </a:ln>
+        </p:spPr>
+        <p:style>
+          <a:lnRef idx="1">
+            <a:schemeClr val="accent1"/>
+          </a:lnRef>
+          <a:fillRef idx="3">
+            <a:schemeClr val="accent1"/>
+          </a:fillRef>
+          <a:effectRef idx="2">
+            <a:schemeClr val="accent1"/>
+          </a:effectRef>
+          <a:fontRef idx="minor">
+            <a:schemeClr val="lt1"/>
+          </a:fontRef>
+        </p:style>
+        <p:txBody>
+          <a:bodyPr rtlCol="0" anchor="ctr"/>
+          <a:lstStyle/>
+          <a:p>
+            <a:pPr algn="ctr"/>
+          </a:p>
+        </p:txBody>
+      </p:sp>
+      <p:sp>
+        <p:nvSpPr>
+          <p:cNvPr id="3" name="Rectangle 2"/>
+          <p:cNvSpPr/>
+          <p:nvPr/>
+        </p:nvSpPr>
+        <p:spPr>
+          <a:xfrm>
+            <a:off x="0" y="6793992"/>
+            <a:ext cx="4062984" cy="64008"/>
+          </a:xfrm>
+          <a:prstGeom prst="rect">
+            <a:avLst/>
+          </a:prstGeom>
+          <a:solidFill>
+            <a:srgbClr val="6366F1"/>
+          </a:solidFill>
+          <a:ln>
+            <a:noFill/>
+          </a:ln>
+        </p:spPr>
+        <p:style>
+          <a:lnRef idx="1">
+            <a:schemeClr val="accent1"/>
+          </a:lnRef>
+          <a:fillRef idx="3">
+            <a:schemeClr val="accent1"/>
+          </a:fillRef>
+          <a:effectRef idx="2">
+            <a:schemeClr val="accent1"/>
+          </a:effectRef>
+          <a:fontRef idx="minor">
+            <a:schemeClr val="lt1"/>
+          </a:fontRef>
+        </p:style>
+        <p:txBody>
+          <a:bodyPr rtlCol="0" anchor="ctr"/>
+          <a:lstStyle/>
+          <a:p>
+            <a:pPr algn="ctr"/>
+          </a:p>
+        </p:txBody>
+      </p:sp>
+      <p:sp>
+        <p:nvSpPr>
+          <p:cNvPr id="4" name="Rectangle 3"/>
+          <p:cNvSpPr/>
+          <p:nvPr/>
+        </p:nvSpPr>
+        <p:spPr>
+          <a:xfrm>
+            <a:off x="4062984" y="6793992"/>
+            <a:ext cx="4062984" cy="64008"/>
+          </a:xfrm>
+          <a:prstGeom prst="rect">
+            <a:avLst/>
+          </a:prstGeom>
+          <a:solidFill>
+            <a:srgbClr val="8B5CF6"/>
+          </a:solidFill>
+          <a:ln>
+            <a:noFill/>
+          </a:ln>
+        </p:spPr>
+        <p:style>
+          <a:lnRef idx="1">
+            <a:schemeClr val="accent1"/>
+          </a:lnRef>
+          <a:fillRef idx="3">
+            <a:schemeClr val="accent1"/>
+          </a:fillRef>
+          <a:effectRef idx="2">
+            <a:schemeClr val="accent1"/>
+          </a:effectRef>
+          <a:fontRef idx="minor">
+            <a:schemeClr val="lt1"/>
+          </a:fontRef>
+        </p:style>
+        <p:txBody>
+          <a:bodyPr rtlCol="0" anchor="ctr"/>
+          <a:lstStyle/>
+          <a:p>
+            <a:pPr algn="ctr"/>
+          </a:p>
+        </p:txBody>
+      </p:sp>
+      <p:sp>
+        <p:nvSpPr>
+          <p:cNvPr id="5" name="Rectangle 4"/>
+          <p:cNvSpPr/>
+          <p:nvPr/>
+        </p:nvSpPr>
+        <p:spPr>
+          <a:xfrm>
+            <a:off x="8125968" y="6793992"/>
+            <a:ext cx="4062984" cy="64008"/>
+          </a:xfrm>
+          <a:prstGeom prst="rect">
+            <a:avLst/>
+          </a:prstGeom>
+          <a:solidFill>
+            <a:srgbClr val="10B981"/>
+          </a:solidFill>
+          <a:ln>
+            <a:noFill/>
+          </a:ln>
+        </p:spPr>
+        <p:style>
+          <a:lnRef idx="1">
+            <a:schemeClr val="accent1"/>
+          </a:lnRef>
+          <a:fillRef idx="3">
+            <a:schemeClr val="accent1"/>
+          </a:fillRef>
+          <a:effectRef idx="2">
+            <a:schemeClr val="accent1"/>
+          </a:effectRef>
+          <a:fontRef idx="minor">
+            <a:schemeClr val="lt1"/>
+          </a:fontRef>
+        </p:style>
+        <p:txBody>
+          <a:bodyPr rtlCol="0" anchor="ctr"/>
+          <a:lstStyle/>
+          <a:p>
+            <a:pPr algn="ctr"/>
+          </a:p>
+        </p:txBody>
+      </p:sp>
+      <p:sp>
+        <p:nvSpPr>
+          <p:cNvPr id="6" name="TextBox 5"/>
           <p:cNvSpPr txBox="1"/>
           <p:nvPr/>
         </p:nvSpPr>
         <p:spPr>
           <a:xfrm>
-            <a:off x="731520" y="1463040"/>
-            <a:ext cx="10789920" cy="1463040"/>
+            <a:off x="914400" y="1463040"/>
+            <a:ext cx="10332720" cy="457200"/>
           </a:xfrm>
           <a:prstGeom prst="rect">
             <a:avLst/>
@@ -3734,46 +6568,33 @@
           <a:noFill/>
         </p:spPr>
         <p:txBody>
-          <a:bodyPr wrap="none">
+          <a:bodyPr wrap="square">
             <a:spAutoFit/>
           </a:bodyPr>
           <a:lstStyle/>
           <a:p>
-            <a:pPr>
-              <a:defRPr sz="4000" b="1">
-                <a:solidFill>
-                  <a:srgbClr val="FFFFFF"/>
-                </a:solidFill>
-              </a:defRPr>
-            </a:pPr>
-            <a:r>
-              <a:t>Try it next</a:t>
-            </a:r>
-          </a:p>
-          <a:p>
-            <a:pPr>
-              <a:defRPr sz="1800">
-                <a:solidFill>
-                  <a:srgbClr val="A1A1AA"/>
-                </a:solidFill>
-              </a:defRPr>
-            </a:pPr>
-            <a:r>
-              <a:t>Apply the routing rubric on one real backlog ticket today.</a:t>
-            </a:r>
-          </a:p>
-        </p:txBody>
-      </p:sp>
-      <p:sp>
-        <p:nvSpPr>
-          <p:cNvPr id="3" name="TextBox 2"/>
+            <a:pPr algn="ctr"/>
+            <a:r>
+              <a:rPr sz="1800" b="1">
+                <a:solidFill>
+                  <a:srgbClr val="8B5CF6"/>
+                </a:solidFill>
+              </a:rPr>
+              <a:t>Up Next</a:t>
+            </a:r>
+          </a:p>
+        </p:txBody>
+      </p:sp>
+      <p:sp>
+        <p:nvSpPr>
+          <p:cNvPr id="7" name="TextBox 6"/>
           <p:cNvSpPr txBox="1"/>
           <p:nvPr/>
         </p:nvSpPr>
         <p:spPr>
           <a:xfrm>
-            <a:off x="457200" y="6309360"/>
-            <a:ext cx="11247120" cy="274320"/>
+            <a:off x="914400" y="2011680"/>
+            <a:ext cx="10332720" cy="1280160"/>
           </a:xfrm>
           <a:prstGeom prst="rect">
             <a:avLst/>
@@ -3781,20 +6602,87 @@
           <a:noFill/>
         </p:spPr>
         <p:txBody>
-          <a:bodyPr wrap="none">
+          <a:bodyPr wrap="square">
             <a:spAutoFit/>
           </a:bodyPr>
           <a:lstStyle/>
           <a:p>
-            <a:pPr>
-              <a:defRPr sz="1100">
+            <a:pPr algn="ctr"/>
+            <a:r>
+              <a:rPr sz="3400" b="1">
+                <a:solidFill>
+                  <a:srgbClr val="FFFFFF"/>
+                </a:solidFill>
+              </a:rPr>
+              <a:t>Chapter 2: Mastering the Cursor Composer Interface</a:t>
+            </a:r>
+          </a:p>
+        </p:txBody>
+      </p:sp>
+      <p:sp>
+        <p:nvSpPr>
+          <p:cNvPr id="8" name="TextBox 7"/>
+          <p:cNvSpPr txBox="1"/>
+          <p:nvPr/>
+        </p:nvSpPr>
+        <p:spPr>
+          <a:xfrm>
+            <a:off x="1371600" y="3474720"/>
+            <a:ext cx="9418320" cy="822960"/>
+          </a:xfrm>
+          <a:prstGeom prst="rect">
+            <a:avLst/>
+          </a:prstGeom>
+          <a:noFill/>
+        </p:spPr>
+        <p:txBody>
+          <a:bodyPr wrap="square">
+            <a:spAutoFit/>
+          </a:bodyPr>
+          <a:lstStyle/>
+          <a:p>
+            <a:pPr algn="ctr"/>
+            <a:r>
+              <a:rPr sz="1500" b="0">
                 <a:solidFill>
                   <a:srgbClr val="A1A1AA"/>
                 </a:solidFill>
-              </a:defRPr>
-            </a:pPr>
-            <a:r>
-              <a:t>academy.kspl.tech | Koenig AI Academy</a:t>
+              </a:rPr>
+              <a:t>Context window management as projects grow  ·  @file and @symbol reference precision  ·  Structuring multi-turn sessions that don't degrade</a:t>
+            </a:r>
+          </a:p>
+        </p:txBody>
+      </p:sp>
+      <p:sp>
+        <p:nvSpPr>
+          <p:cNvPr id="9" name="TextBox 8"/>
+          <p:cNvSpPr txBox="1"/>
+          <p:nvPr/>
+        </p:nvSpPr>
+        <p:spPr>
+          <a:xfrm>
+            <a:off x="1828800" y="4572000"/>
+            <a:ext cx="8503920" cy="640080"/>
+          </a:xfrm>
+          <a:prstGeom prst="rect">
+            <a:avLst/>
+          </a:prstGeom>
+          <a:noFill/>
+        </p:spPr>
+        <p:txBody>
+          <a:bodyPr wrap="square">
+            <a:spAutoFit/>
+          </a:bodyPr>
+          <a:lstStyle/>
+          <a:p>
+            <a:pPr algn="ctr"/>
+            <a:r>
+              <a:rPr sz="1200" b="0">
+                <a:solidFill>
+                  <a:srgbClr val="A1A1AA"/>
+                </a:solidFill>
+              </a:rPr>
+              <a:t>Prerequisite: complete the hands-on exercise from Chapter 1 — .cursorrules and AGENTS.md must be committed before Chapter 2 workflows will work reliably</a:t>
             </a:r>
           </a:p>
         </p:txBody>
@@ -3810,14 +6698,6 @@
 <file path=ppt/slides/slide2.xml><?xml version="1.0" encoding="utf-8"?>
 <p:sld xmlns:a="http://schemas.openxmlformats.org/drawingml/2006/main" xmlns:p="http://schemas.openxmlformats.org/presentationml/2006/main" xmlns:r="http://schemas.openxmlformats.org/officeDocument/2006/relationships">
   <p:cSld>
-    <p:bg>
-      <p:bgPr>
-        <a:solidFill>
-          <a:srgbClr val="18181B"/>
-        </a:solidFill>
-        <a:effectLst/>
-      </p:bgPr>
-    </p:bg>
     <p:spTree>
       <p:nvGrpSpPr>
         <p:cNvPr id="1" name=""/>
@@ -3827,14 +6707,177 @@
       <p:grpSpPr/>
       <p:sp>
         <p:nvSpPr>
-          <p:cNvPr id="2" name="TextBox 1"/>
+          <p:cNvPr id="2" name="Rectangle 1"/>
+          <p:cNvSpPr/>
+          <p:nvPr/>
+        </p:nvSpPr>
+        <p:spPr>
+          <a:xfrm>
+            <a:off x="0" y="0"/>
+            <a:ext cx="12188952" cy="6858000"/>
+          </a:xfrm>
+          <a:prstGeom prst="rect">
+            <a:avLst/>
+          </a:prstGeom>
+          <a:solidFill>
+            <a:srgbClr val="F4F4F5"/>
+          </a:solidFill>
+          <a:ln>
+            <a:noFill/>
+          </a:ln>
+        </p:spPr>
+        <p:style>
+          <a:lnRef idx="1">
+            <a:schemeClr val="accent1"/>
+          </a:lnRef>
+          <a:fillRef idx="3">
+            <a:schemeClr val="accent1"/>
+          </a:fillRef>
+          <a:effectRef idx="2">
+            <a:schemeClr val="accent1"/>
+          </a:effectRef>
+          <a:fontRef idx="minor">
+            <a:schemeClr val="lt1"/>
+          </a:fontRef>
+        </p:style>
+        <p:txBody>
+          <a:bodyPr rtlCol="0" anchor="ctr"/>
+          <a:lstStyle/>
+          <a:p>
+            <a:pPr algn="ctr"/>
+          </a:p>
+        </p:txBody>
+      </p:sp>
+      <p:sp>
+        <p:nvSpPr>
+          <p:cNvPr id="3" name="Rectangle 2"/>
+          <p:cNvSpPr/>
+          <p:nvPr/>
+        </p:nvSpPr>
+        <p:spPr>
+          <a:xfrm>
+            <a:off x="0" y="0"/>
+            <a:ext cx="12188952" cy="54864"/>
+          </a:xfrm>
+          <a:prstGeom prst="rect">
+            <a:avLst/>
+          </a:prstGeom>
+          <a:solidFill>
+            <a:srgbClr val="6366F1"/>
+          </a:solidFill>
+          <a:ln>
+            <a:noFill/>
+          </a:ln>
+        </p:spPr>
+        <p:style>
+          <a:lnRef idx="1">
+            <a:schemeClr val="accent1"/>
+          </a:lnRef>
+          <a:fillRef idx="3">
+            <a:schemeClr val="accent1"/>
+          </a:fillRef>
+          <a:effectRef idx="2">
+            <a:schemeClr val="accent1"/>
+          </a:effectRef>
+          <a:fontRef idx="minor">
+            <a:schemeClr val="lt1"/>
+          </a:fontRef>
+        </p:style>
+        <p:txBody>
+          <a:bodyPr rtlCol="0" anchor="ctr"/>
+          <a:lstStyle/>
+          <a:p>
+            <a:pPr algn="ctr"/>
+          </a:p>
+        </p:txBody>
+      </p:sp>
+      <p:sp>
+        <p:nvSpPr>
+          <p:cNvPr id="4" name="TextBox 3"/>
           <p:cNvSpPr txBox="1"/>
           <p:nvPr/>
         </p:nvSpPr>
         <p:spPr>
           <a:xfrm>
-            <a:off x="731520" y="548640"/>
-            <a:ext cx="10789920" cy="731520"/>
+            <a:off x="457200" y="164592"/>
+            <a:ext cx="10972800" cy="594360"/>
+          </a:xfrm>
+          <a:prstGeom prst="rect">
+            <a:avLst/>
+          </a:prstGeom>
+          <a:noFill/>
+        </p:spPr>
+        <p:txBody>
+          <a:bodyPr wrap="square">
+            <a:spAutoFit/>
+          </a:bodyPr>
+          <a:lstStyle/>
+          <a:p>
+            <a:pPr algn="l"/>
+            <a:r>
+              <a:rPr sz="2600" b="1">
+                <a:solidFill>
+                  <a:srgbClr val="18181B"/>
+                </a:solidFill>
+              </a:rPr>
+              <a:t>Learning Objectives</a:t>
+            </a:r>
+          </a:p>
+        </p:txBody>
+      </p:sp>
+      <p:sp>
+        <p:nvSpPr>
+          <p:cNvPr id="5" name="Rectangle 4"/>
+          <p:cNvSpPr/>
+          <p:nvPr/>
+        </p:nvSpPr>
+        <p:spPr>
+          <a:xfrm>
+            <a:off x="457200" y="804672"/>
+            <a:ext cx="11247120" cy="12700"/>
+          </a:xfrm>
+          <a:prstGeom prst="rect">
+            <a:avLst/>
+          </a:prstGeom>
+          <a:solidFill>
+            <a:srgbClr val="A1A1AA"/>
+          </a:solidFill>
+          <a:ln>
+            <a:noFill/>
+          </a:ln>
+        </p:spPr>
+        <p:style>
+          <a:lnRef idx="1">
+            <a:schemeClr val="accent1"/>
+          </a:lnRef>
+          <a:fillRef idx="3">
+            <a:schemeClr val="accent1"/>
+          </a:fillRef>
+          <a:effectRef idx="2">
+            <a:schemeClr val="accent1"/>
+          </a:effectRef>
+          <a:fontRef idx="minor">
+            <a:schemeClr val="lt1"/>
+          </a:fontRef>
+        </p:style>
+        <p:txBody>
+          <a:bodyPr rtlCol="0" anchor="ctr"/>
+          <a:lstStyle/>
+          <a:p>
+            <a:pPr algn="ctr"/>
+          </a:p>
+        </p:txBody>
+      </p:sp>
+      <p:sp>
+        <p:nvSpPr>
+          <p:cNvPr id="6" name="TextBox 5"/>
+          <p:cNvSpPr txBox="1"/>
+          <p:nvPr/>
+        </p:nvSpPr>
+        <p:spPr>
+          <a:xfrm>
+            <a:off x="457200" y="960120"/>
+            <a:ext cx="411480" cy="685800"/>
           </a:xfrm>
           <a:prstGeom prst="rect">
             <a:avLst/>
@@ -3847,29 +6890,61 @@
           </a:bodyPr>
           <a:lstStyle/>
           <a:p>
-            <a:pPr>
-              <a:defRPr sz="3000" b="1">
-                <a:solidFill>
-                  <a:srgbClr val="FFFFFF"/>
-                </a:solidFill>
-              </a:defRPr>
-            </a:pPr>
-            <a:r>
-              <a:t>1.1 What Cursor Composer 2 Is (and Isn't)</a:t>
-            </a:r>
-          </a:p>
-        </p:txBody>
-      </p:sp>
-      <p:sp>
-        <p:nvSpPr>
-          <p:cNvPr id="3" name="TextBox 2"/>
+            <a:pPr algn="ctr"/>
+            <a:r>
+              <a:rPr sz="1800" b="1">
+                <a:solidFill>
+                  <a:srgbClr val="6366F1"/>
+                </a:solidFill>
+              </a:rPr>
+              <a:t>1</a:t>
+            </a:r>
+          </a:p>
+        </p:txBody>
+      </p:sp>
+      <p:sp>
+        <p:nvSpPr>
+          <p:cNvPr id="7" name="TextBox 6"/>
           <p:cNvSpPr txBox="1"/>
           <p:nvPr/>
         </p:nvSpPr>
         <p:spPr>
           <a:xfrm>
-            <a:off x="914400" y="1463040"/>
-            <a:ext cx="10241280" cy="4572000"/>
+            <a:off x="1005840" y="1005840"/>
+            <a:ext cx="10698480" cy="685800"/>
+          </a:xfrm>
+          <a:prstGeom prst="rect">
+            <a:avLst/>
+          </a:prstGeom>
+          <a:noFill/>
+        </p:spPr>
+        <p:txBody>
+          <a:bodyPr wrap="square">
+            <a:spAutoFit/>
+          </a:bodyPr>
+          <a:lstStyle/>
+          <a:p>
+            <a:r>
+              <a:rPr sz="1500">
+                <a:solidFill>
+                  <a:srgbClr val="18181B"/>
+                </a:solidFill>
+              </a:rPr>
+              <a:t>Understand what Cursor Composer 2 is, including its model lineage and pricing</a:t>
+            </a:r>
+          </a:p>
+        </p:txBody>
+      </p:sp>
+      <p:sp>
+        <p:nvSpPr>
+          <p:cNvPr id="8" name="TextBox 7"/>
+          <p:cNvSpPr txBox="1"/>
+          <p:nvPr/>
+        </p:nvSpPr>
+        <p:spPr>
+          <a:xfrm>
+            <a:off x="457200" y="1920240"/>
+            <a:ext cx="411480" cy="685800"/>
           </a:xfrm>
           <a:prstGeom prst="rect">
             <a:avLst/>
@@ -3882,77 +6957,61 @@
           </a:bodyPr>
           <a:lstStyle/>
           <a:p>
-            <a:pPr>
-              <a:defRPr sz="2000">
-                <a:solidFill>
-                  <a:srgbClr val="FFFFFF"/>
-                </a:solidFill>
-              </a:defRPr>
-            </a:pPr>
-            <a:r>
-              <a:t>• When Cursor announced Composer 2 in May 2026, the marketing framing positioned it against Claude Opus 4.6. The community reaction was mor...</a:t>
-            </a:r>
-          </a:p>
-          <a:p>
-            <a:pPr>
-              <a:defRPr sz="2000">
-                <a:solidFill>
-                  <a:srgbClr val="FFFFFF"/>
-                </a:solidFill>
-              </a:defRPr>
-            </a:pPr>
-            <a:r>
-              <a:t>• Model lineage</a:t>
-            </a:r>
-          </a:p>
-          <a:p>
-            <a:pPr>
-              <a:defRPr sz="2000">
-                <a:solidFill>
-                  <a:srgbClr val="FFFFFF"/>
-                </a:solidFill>
-              </a:defRPr>
-            </a:pPr>
-            <a:r>
-              <a:t>• Cursor trained Composer 2 in two phases, as documented in their technical report and arXiv paper (arxiv.org/abs/2603.24477):</a:t>
-            </a:r>
-          </a:p>
-          <a:p>
-            <a:pPr>
-              <a:defRPr sz="2000">
-                <a:solidFill>
-                  <a:srgbClr val="FFFFFF"/>
-                </a:solidFill>
-              </a:defRPr>
-            </a:pPr>
-            <a:r>
-              <a:t>• Community analysis on HackerNews and r/LocalLLaMA identified the Kimi K2.5 base model as the starting point (confirmed indirectly by arch...</a:t>
-            </a:r>
-          </a:p>
-          <a:p>
-            <a:pPr>
-              <a:defRPr sz="2000">
-                <a:solidFill>
-                  <a:srgbClr val="FFFFFF"/>
-                </a:solidFill>
-              </a:defRPr>
-            </a:pPr>
-            <a:r>
-              <a:t>• Pricing</a:t>
-            </a:r>
-          </a:p>
-        </p:txBody>
-      </p:sp>
-      <p:sp>
-        <p:nvSpPr>
-          <p:cNvPr id="4" name="TextBox 3"/>
+            <a:pPr algn="ctr"/>
+            <a:r>
+              <a:rPr sz="1800" b="1">
+                <a:solidFill>
+                  <a:srgbClr val="6366F1"/>
+                </a:solidFill>
+              </a:rPr>
+              <a:t>2</a:t>
+            </a:r>
+          </a:p>
+        </p:txBody>
+      </p:sp>
+      <p:sp>
+        <p:nvSpPr>
+          <p:cNvPr id="9" name="TextBox 8"/>
           <p:cNvSpPr txBox="1"/>
           <p:nvPr/>
         </p:nvSpPr>
         <p:spPr>
           <a:xfrm>
-            <a:off x="457200" y="6309360"/>
-            <a:ext cx="11247120" cy="274320"/>
+            <a:off x="1005840" y="1965960"/>
+            <a:ext cx="10698480" cy="685800"/>
+          </a:xfrm>
+          <a:prstGeom prst="rect">
+            <a:avLst/>
+          </a:prstGeom>
+          <a:noFill/>
+        </p:spPr>
+        <p:txBody>
+          <a:bodyPr wrap="square">
+            <a:spAutoFit/>
+          </a:bodyPr>
+          <a:lstStyle/>
+          <a:p>
+            <a:r>
+              <a:rPr sz="1500">
+                <a:solidFill>
+                  <a:srgbClr val="18181B"/>
+                </a:solidFill>
+              </a:rPr>
+              <a:t>Apply a routing rubric to decide when to use Composer 2 versus a frontier reasoning model</a:t>
+            </a:r>
+          </a:p>
+        </p:txBody>
+      </p:sp>
+      <p:sp>
+        <p:nvSpPr>
+          <p:cNvPr id="10" name="TextBox 9"/>
+          <p:cNvSpPr txBox="1"/>
+          <p:nvPr/>
+        </p:nvSpPr>
+        <p:spPr>
+          <a:xfrm>
+            <a:off x="457200" y="2880360"/>
+            <a:ext cx="411480" cy="685800"/>
           </a:xfrm>
           <a:prstGeom prst="rect">
             <a:avLst/>
@@ -3965,15 +7024,215 @@
           </a:bodyPr>
           <a:lstStyle/>
           <a:p>
-            <a:pPr>
-              <a:defRPr sz="1100">
+            <a:pPr algn="ctr"/>
+            <a:r>
+              <a:rPr sz="1800" b="1">
+                <a:solidFill>
+                  <a:srgbClr val="6366F1"/>
+                </a:solidFill>
+              </a:rPr>
+              <a:t>3</a:t>
+            </a:r>
+          </a:p>
+        </p:txBody>
+      </p:sp>
+      <p:sp>
+        <p:nvSpPr>
+          <p:cNvPr id="11" name="TextBox 10"/>
+          <p:cNvSpPr txBox="1"/>
+          <p:nvPr/>
+        </p:nvSpPr>
+        <p:spPr>
+          <a:xfrm>
+            <a:off x="1005840" y="2926080"/>
+            <a:ext cx="10698480" cy="685800"/>
+          </a:xfrm>
+          <a:prstGeom prst="rect">
+            <a:avLst/>
+          </a:prstGeom>
+          <a:noFill/>
+        </p:spPr>
+        <p:txBody>
+          <a:bodyPr wrap="square">
+            <a:spAutoFit/>
+          </a:bodyPr>
+          <a:lstStyle/>
+          <a:p>
+            <a:r>
+              <a:rPr sz="1500">
+                <a:solidFill>
+                  <a:srgbClr val="18181B"/>
+                </a:solidFill>
+              </a:rPr>
+              <a:t>Configure a project .cursorrules file that steers AI behavior reliably</a:t>
+            </a:r>
+          </a:p>
+        </p:txBody>
+      </p:sp>
+      <p:sp>
+        <p:nvSpPr>
+          <p:cNvPr id="12" name="TextBox 11"/>
+          <p:cNvSpPr txBox="1"/>
+          <p:nvPr/>
+        </p:nvSpPr>
+        <p:spPr>
+          <a:xfrm>
+            <a:off x="457200" y="3840480"/>
+            <a:ext cx="411480" cy="685800"/>
+          </a:xfrm>
+          <a:prstGeom prst="rect">
+            <a:avLst/>
+          </a:prstGeom>
+          <a:noFill/>
+        </p:spPr>
+        <p:txBody>
+          <a:bodyPr wrap="none">
+            <a:spAutoFit/>
+          </a:bodyPr>
+          <a:lstStyle/>
+          <a:p>
+            <a:pPr algn="ctr"/>
+            <a:r>
+              <a:rPr sz="1800" b="1">
+                <a:solidFill>
+                  <a:srgbClr val="6366F1"/>
+                </a:solidFill>
+              </a:rPr>
+              <a:t>4</a:t>
+            </a:r>
+          </a:p>
+        </p:txBody>
+      </p:sp>
+      <p:sp>
+        <p:nvSpPr>
+          <p:cNvPr id="13" name="TextBox 12"/>
+          <p:cNvSpPr txBox="1"/>
+          <p:nvPr/>
+        </p:nvSpPr>
+        <p:spPr>
+          <a:xfrm>
+            <a:off x="1005840" y="3886200"/>
+            <a:ext cx="10698480" cy="685800"/>
+          </a:xfrm>
+          <a:prstGeom prst="rect">
+            <a:avLst/>
+          </a:prstGeom>
+          <a:noFill/>
+        </p:spPr>
+        <p:txBody>
+          <a:bodyPr wrap="square">
+            <a:spAutoFit/>
+          </a:bodyPr>
+          <a:lstStyle/>
+          <a:p>
+            <a:r>
+              <a:rPr sz="1500">
+                <a:solidFill>
+                  <a:srgbClr val="18181B"/>
+                </a:solidFill>
+              </a:rPr>
+              <a:t>Set up an AGENTS.md file for multi-agent project context</a:t>
+            </a:r>
+          </a:p>
+        </p:txBody>
+      </p:sp>
+      <p:sp>
+        <p:nvSpPr>
+          <p:cNvPr id="14" name="TextBox 13"/>
+          <p:cNvSpPr txBox="1"/>
+          <p:nvPr/>
+        </p:nvSpPr>
+        <p:spPr>
+          <a:xfrm>
+            <a:off x="457200" y="4800600"/>
+            <a:ext cx="411480" cy="685800"/>
+          </a:xfrm>
+          <a:prstGeom prst="rect">
+            <a:avLst/>
+          </a:prstGeom>
+          <a:noFill/>
+        </p:spPr>
+        <p:txBody>
+          <a:bodyPr wrap="none">
+            <a:spAutoFit/>
+          </a:bodyPr>
+          <a:lstStyle/>
+          <a:p>
+            <a:pPr algn="ctr"/>
+            <a:r>
+              <a:rPr sz="1800" b="1">
+                <a:solidFill>
+                  <a:srgbClr val="6366F1"/>
+                </a:solidFill>
+              </a:rPr>
+              <a:t>5</a:t>
+            </a:r>
+          </a:p>
+        </p:txBody>
+      </p:sp>
+      <p:sp>
+        <p:nvSpPr>
+          <p:cNvPr id="15" name="TextBox 14"/>
+          <p:cNvSpPr txBox="1"/>
+          <p:nvPr/>
+        </p:nvSpPr>
+        <p:spPr>
+          <a:xfrm>
+            <a:off x="1005840" y="4846320"/>
+            <a:ext cx="10698480" cy="685800"/>
+          </a:xfrm>
+          <a:prstGeom prst="rect">
+            <a:avLst/>
+          </a:prstGeom>
+          <a:noFill/>
+        </p:spPr>
+        <p:txBody>
+          <a:bodyPr wrap="square">
+            <a:spAutoFit/>
+          </a:bodyPr>
+          <a:lstStyle/>
+          <a:p>
+            <a:r>
+              <a:rPr sz="1500">
+                <a:solidFill>
+                  <a:srgbClr val="18181B"/>
+                </a:solidFill>
+              </a:rPr>
+              <a:t>Enable informed benchmark reading with a two-layer skepticism framework</a:t>
+            </a:r>
+          </a:p>
+        </p:txBody>
+      </p:sp>
+      <p:sp>
+        <p:nvSpPr>
+          <p:cNvPr id="16" name="TextBox 15"/>
+          <p:cNvSpPr txBox="1"/>
+          <p:nvPr/>
+        </p:nvSpPr>
+        <p:spPr>
+          <a:xfrm>
+            <a:off x="457200" y="6510528"/>
+            <a:ext cx="10972800" cy="274320"/>
+          </a:xfrm>
+          <a:prstGeom prst="rect">
+            <a:avLst/>
+          </a:prstGeom>
+          <a:noFill/>
+        </p:spPr>
+        <p:txBody>
+          <a:bodyPr wrap="square">
+            <a:spAutoFit/>
+          </a:bodyPr>
+          <a:lstStyle/>
+          <a:p>
+            <a:pPr algn="l"/>
+            <a:r>
+              <a:rPr sz="900" b="0">
                 <a:solidFill>
                   <a:srgbClr val="A1A1AA"/>
                 </a:solidFill>
-              </a:defRPr>
-            </a:pPr>
-            <a:r>
-              <a:t>academy.kspl.tech | Koenig AI Academy</a:t>
+              </a:rPr>
+              <a:t>academy.kspl.tech  |  Koenig AI Academy</a:t>
             </a:r>
           </a:p>
         </p:txBody>
@@ -3989,14 +7248,6 @@
 <file path=ppt/slides/slide3.xml><?xml version="1.0" encoding="utf-8"?>
 <p:sld xmlns:a="http://schemas.openxmlformats.org/drawingml/2006/main" xmlns:p="http://schemas.openxmlformats.org/presentationml/2006/main" xmlns:r="http://schemas.openxmlformats.org/officeDocument/2006/relationships">
   <p:cSld>
-    <p:bg>
-      <p:bgPr>
-        <a:solidFill>
-          <a:srgbClr val="18181B"/>
-        </a:solidFill>
-        <a:effectLst/>
-      </p:bgPr>
-    </p:bg>
     <p:spTree>
       <p:nvGrpSpPr>
         <p:cNvPr id="1" name=""/>
@@ -4006,14 +7257,143 @@
       <p:grpSpPr/>
       <p:sp>
         <p:nvSpPr>
-          <p:cNvPr id="2" name="TextBox 1"/>
+          <p:cNvPr id="2" name="Rectangle 1"/>
+          <p:cNvSpPr/>
+          <p:nvPr/>
+        </p:nvSpPr>
+        <p:spPr>
+          <a:xfrm>
+            <a:off x="0" y="0"/>
+            <a:ext cx="12188952" cy="6858000"/>
+          </a:xfrm>
+          <a:prstGeom prst="rect">
+            <a:avLst/>
+          </a:prstGeom>
+          <a:solidFill>
+            <a:srgbClr val="F4F4F5"/>
+          </a:solidFill>
+          <a:ln>
+            <a:noFill/>
+          </a:ln>
+        </p:spPr>
+        <p:style>
+          <a:lnRef idx="1">
+            <a:schemeClr val="accent1"/>
+          </a:lnRef>
+          <a:fillRef idx="3">
+            <a:schemeClr val="accent1"/>
+          </a:fillRef>
+          <a:effectRef idx="2">
+            <a:schemeClr val="accent1"/>
+          </a:effectRef>
+          <a:fontRef idx="minor">
+            <a:schemeClr val="lt1"/>
+          </a:fontRef>
+        </p:style>
+        <p:txBody>
+          <a:bodyPr rtlCol="0" anchor="ctr"/>
+          <a:lstStyle/>
+          <a:p>
+            <a:pPr algn="ctr"/>
+          </a:p>
+        </p:txBody>
+      </p:sp>
+      <p:sp>
+        <p:nvSpPr>
+          <p:cNvPr id="3" name="Rectangle 2"/>
+          <p:cNvSpPr/>
+          <p:nvPr/>
+        </p:nvSpPr>
+        <p:spPr>
+          <a:xfrm>
+            <a:off x="0" y="0"/>
+            <a:ext cx="12188952" cy="54864"/>
+          </a:xfrm>
+          <a:prstGeom prst="rect">
+            <a:avLst/>
+          </a:prstGeom>
+          <a:solidFill>
+            <a:srgbClr val="6366F1"/>
+          </a:solidFill>
+          <a:ln>
+            <a:noFill/>
+          </a:ln>
+        </p:spPr>
+        <p:style>
+          <a:lnRef idx="1">
+            <a:schemeClr val="accent1"/>
+          </a:lnRef>
+          <a:fillRef idx="3">
+            <a:schemeClr val="accent1"/>
+          </a:fillRef>
+          <a:effectRef idx="2">
+            <a:schemeClr val="accent1"/>
+          </a:effectRef>
+          <a:fontRef idx="minor">
+            <a:schemeClr val="lt1"/>
+          </a:fontRef>
+        </p:style>
+        <p:txBody>
+          <a:bodyPr rtlCol="0" anchor="ctr"/>
+          <a:lstStyle/>
+          <a:p>
+            <a:pPr algn="ctr"/>
+          </a:p>
+        </p:txBody>
+      </p:sp>
+      <p:sp>
+        <p:nvSpPr>
+          <p:cNvPr id="4" name="Rectangle 3"/>
+          <p:cNvSpPr/>
+          <p:nvPr/>
+        </p:nvSpPr>
+        <p:spPr>
+          <a:xfrm>
+            <a:off x="0" y="54864"/>
+            <a:ext cx="228600" cy="6803136"/>
+          </a:xfrm>
+          <a:prstGeom prst="rect">
+            <a:avLst/>
+          </a:prstGeom>
+          <a:solidFill>
+            <a:srgbClr val="6366F1"/>
+          </a:solidFill>
+          <a:ln>
+            <a:noFill/>
+          </a:ln>
+        </p:spPr>
+        <p:style>
+          <a:lnRef idx="1">
+            <a:schemeClr val="accent1"/>
+          </a:lnRef>
+          <a:fillRef idx="3">
+            <a:schemeClr val="accent1"/>
+          </a:fillRef>
+          <a:effectRef idx="2">
+            <a:schemeClr val="accent1"/>
+          </a:effectRef>
+          <a:fontRef idx="minor">
+            <a:schemeClr val="lt1"/>
+          </a:fontRef>
+        </p:style>
+        <p:txBody>
+          <a:bodyPr rtlCol="0" anchor="ctr"/>
+          <a:lstStyle/>
+          <a:p>
+            <a:pPr algn="ctr"/>
+          </a:p>
+        </p:txBody>
+      </p:sp>
+      <p:sp>
+        <p:nvSpPr>
+          <p:cNvPr id="5" name="TextBox 4"/>
           <p:cNvSpPr txBox="1"/>
           <p:nvPr/>
         </p:nvSpPr>
         <p:spPr>
           <a:xfrm>
-            <a:off x="731520" y="548640"/>
-            <a:ext cx="10789920" cy="731520"/>
+            <a:off x="502920" y="164592"/>
+            <a:ext cx="11430000" cy="594360"/>
           </a:xfrm>
           <a:prstGeom prst="rect">
             <a:avLst/>
@@ -4021,34 +7401,76 @@
           <a:noFill/>
         </p:spPr>
         <p:txBody>
-          <a:bodyPr wrap="none">
+          <a:bodyPr wrap="square">
             <a:spAutoFit/>
           </a:bodyPr>
           <a:lstStyle/>
           <a:p>
-            <a:pPr>
-              <a:defRPr sz="3000" b="1">
-                <a:solidFill>
-                  <a:srgbClr val="FFFFFF"/>
-                </a:solidFill>
-              </a:defRPr>
-            </a:pPr>
-            <a:r>
-              <a:t>1.1 What Cursor Composer 2 Is (and Isn't) (continued)</a:t>
-            </a:r>
-          </a:p>
-        </p:txBody>
-      </p:sp>
-      <p:sp>
-        <p:nvSpPr>
-          <p:cNvPr id="3" name="TextBox 2"/>
+            <a:pPr algn="l"/>
+            <a:r>
+              <a:rPr sz="2600" b="1">
+                <a:solidFill>
+                  <a:srgbClr val="18181B"/>
+                </a:solidFill>
+              </a:rPr>
+              <a:t>1.1  What Cursor Composer 2 Is</a:t>
+            </a:r>
+          </a:p>
+        </p:txBody>
+      </p:sp>
+      <p:sp>
+        <p:nvSpPr>
+          <p:cNvPr id="6" name="Rectangle 5"/>
+          <p:cNvSpPr/>
+          <p:nvPr/>
+        </p:nvSpPr>
+        <p:spPr>
+          <a:xfrm>
+            <a:off x="502920" y="804672"/>
+            <a:ext cx="11430000" cy="12700"/>
+          </a:xfrm>
+          <a:prstGeom prst="rect">
+            <a:avLst/>
+          </a:prstGeom>
+          <a:solidFill>
+            <a:srgbClr val="A1A1AA"/>
+          </a:solidFill>
+          <a:ln>
+            <a:noFill/>
+          </a:ln>
+        </p:spPr>
+        <p:style>
+          <a:lnRef idx="1">
+            <a:schemeClr val="accent1"/>
+          </a:lnRef>
+          <a:fillRef idx="3">
+            <a:schemeClr val="accent1"/>
+          </a:fillRef>
+          <a:effectRef idx="2">
+            <a:schemeClr val="accent1"/>
+          </a:effectRef>
+          <a:fontRef idx="minor">
+            <a:schemeClr val="lt1"/>
+          </a:fontRef>
+        </p:style>
+        <p:txBody>
+          <a:bodyPr rtlCol="0" anchor="ctr"/>
+          <a:lstStyle/>
+          <a:p>
+            <a:pPr algn="ctr"/>
+          </a:p>
+        </p:txBody>
+      </p:sp>
+      <p:sp>
+        <p:nvSpPr>
+          <p:cNvPr id="7" name="TextBox 6"/>
           <p:cNvSpPr txBox="1"/>
           <p:nvPr/>
         </p:nvSpPr>
         <p:spPr>
           <a:xfrm>
-            <a:off x="914400" y="1463040"/>
-            <a:ext cx="10241280" cy="4572000"/>
+            <a:off x="502920" y="960120"/>
+            <a:ext cx="11247120" cy="1005840"/>
           </a:xfrm>
           <a:prstGeom prst="rect">
             <a:avLst/>
@@ -4056,34 +7478,33 @@
           <a:noFill/>
         </p:spPr>
         <p:txBody>
-          <a:bodyPr wrap="none">
+          <a:bodyPr wrap="square">
             <a:spAutoFit/>
           </a:bodyPr>
           <a:lstStyle/>
           <a:p>
-            <a:pPr>
-              <a:defRPr sz="2000">
-                <a:solidFill>
-                  <a:srgbClr val="FFFFFF"/>
-                </a:solidFill>
-              </a:defRPr>
-            </a:pPr>
-            <a:r>
-              <a:t>• At $0.50/M input, Composer 2 is roughly 5–10× cheaper than Opus 4.7 per token. For teams running 50+ agent turns per day across large cod...</a:t>
-            </a:r>
-          </a:p>
-        </p:txBody>
-      </p:sp>
-      <p:sp>
-        <p:nvSpPr>
-          <p:cNvPr id="4" name="TextBox 3"/>
+            <a:pPr algn="l"/>
+            <a:r>
+              <a:rPr sz="1500">
+                <a:solidFill>
+                  <a:srgbClr val="18181B"/>
+                </a:solidFill>
+              </a:rPr>
+              <a:t>▸  Built on Kimi K2.5 base model via two-phase training: continued pretraining + large-scale reinforcement learning optimized for agentic IDE tasks (source: Cursor technical report, arXiv 2603.24477)</a:t>
+            </a:r>
+          </a:p>
+        </p:txBody>
+      </p:sp>
+      <p:sp>
+        <p:nvSpPr>
+          <p:cNvPr id="8" name="TextBox 7"/>
           <p:cNvSpPr txBox="1"/>
           <p:nvPr/>
         </p:nvSpPr>
         <p:spPr>
           <a:xfrm>
-            <a:off x="457200" y="6309360"/>
-            <a:ext cx="11247120" cy="274320"/>
+            <a:off x="502920" y="1828800"/>
+            <a:ext cx="11247120" cy="1005840"/>
           </a:xfrm>
           <a:prstGeom prst="rect">
             <a:avLst/>
@@ -4091,20 +7512,155 @@
           <a:noFill/>
         </p:spPr>
         <p:txBody>
-          <a:bodyPr wrap="none">
+          <a:bodyPr wrap="square">
             <a:spAutoFit/>
           </a:bodyPr>
           <a:lstStyle/>
           <a:p>
-            <a:pPr>
-              <a:defRPr sz="1100">
+            <a:pPr algn="l"/>
+            <a:r>
+              <a:rPr sz="1500">
+                <a:solidFill>
+                  <a:srgbClr val="18181B"/>
+                </a:solidFill>
+              </a:rPr>
+              <a:t>▸  Cursor did not prominently disclose the base model at launch — community analysis on HackerNews and r/LocalLLaMA identified the Kimi K2.5 lineage via architecture and training methodology comparison</a:t>
+            </a:r>
+          </a:p>
+        </p:txBody>
+      </p:sp>
+      <p:sp>
+        <p:nvSpPr>
+          <p:cNvPr id="9" name="TextBox 8"/>
+          <p:cNvSpPr txBox="1"/>
+          <p:nvPr/>
+        </p:nvSpPr>
+        <p:spPr>
+          <a:xfrm>
+            <a:off x="502920" y="2697480"/>
+            <a:ext cx="11247120" cy="1005840"/>
+          </a:xfrm>
+          <a:prstGeom prst="rect">
+            <a:avLst/>
+          </a:prstGeom>
+          <a:noFill/>
+        </p:spPr>
+        <p:txBody>
+          <a:bodyPr wrap="square">
+            <a:spAutoFit/>
+          </a:bodyPr>
+          <a:lstStyle/>
+          <a:p>
+            <a:pPr algn="l"/>
+            <a:r>
+              <a:rPr sz="1500">
+                <a:solidFill>
+                  <a:srgbClr val="18181B"/>
+                </a:solidFill>
+              </a:rPr>
+              <a:t>▸  Model lineage matters in practice: base-model strengths and failure modes carry forward after fine-tuning; run your own evals, don't rely on vendor benchmarks alone</a:t>
+            </a:r>
+          </a:p>
+        </p:txBody>
+      </p:sp>
+      <p:sp>
+        <p:nvSpPr>
+          <p:cNvPr id="10" name="TextBox 9"/>
+          <p:cNvSpPr txBox="1"/>
+          <p:nvPr/>
+        </p:nvSpPr>
+        <p:spPr>
+          <a:xfrm>
+            <a:off x="502920" y="3566160"/>
+            <a:ext cx="11247120" cy="1005840"/>
+          </a:xfrm>
+          <a:prstGeom prst="rect">
+            <a:avLst/>
+          </a:prstGeom>
+          <a:noFill/>
+        </p:spPr>
+        <p:txBody>
+          <a:bodyPr wrap="square">
+            <a:spAutoFit/>
+          </a:bodyPr>
+          <a:lstStyle/>
+          <a:p>
+            <a:pPr algn="l"/>
+            <a:r>
+              <a:rPr sz="1500">
+                <a:solidFill>
+                  <a:srgbClr val="18181B"/>
+                </a:solidFill>
+              </a:rPr>
+              <a:t>▸  Standard pricing: $0.50 / M input tokens, $2.50 / M output tokens — approximately 86 % cheaper than previous Composer generation (VentureBeat, 2026-05-14)</a:t>
+            </a:r>
+          </a:p>
+        </p:txBody>
+      </p:sp>
+      <p:sp>
+        <p:nvSpPr>
+          <p:cNvPr id="11" name="TextBox 10"/>
+          <p:cNvSpPr txBox="1"/>
+          <p:nvPr/>
+        </p:nvSpPr>
+        <p:spPr>
+          <a:xfrm>
+            <a:off x="502920" y="4434840"/>
+            <a:ext cx="11247120" cy="1005840"/>
+          </a:xfrm>
+          <a:prstGeom prst="rect">
+            <a:avLst/>
+          </a:prstGeom>
+          <a:noFill/>
+        </p:spPr>
+        <p:txBody>
+          <a:bodyPr wrap="square">
+            <a:spAutoFit/>
+          </a:bodyPr>
+          <a:lstStyle/>
+          <a:p>
+            <a:pPr algn="l"/>
+            <a:r>
+              <a:rPr sz="1500">
+                <a:solidFill>
+                  <a:srgbClr val="18181B"/>
+                </a:solidFill>
+              </a:rPr>
+              <a:t>▸  Max plan: Composer 2 usage included in subscription, removing per-token cost friction for teams running 50+ agent turns per day</a:t>
+            </a:r>
+          </a:p>
+        </p:txBody>
+      </p:sp>
+      <p:sp>
+        <p:nvSpPr>
+          <p:cNvPr id="12" name="TextBox 11"/>
+          <p:cNvSpPr txBox="1"/>
+          <p:nvPr/>
+        </p:nvSpPr>
+        <p:spPr>
+          <a:xfrm>
+            <a:off x="457200" y="6510528"/>
+            <a:ext cx="10972800" cy="274320"/>
+          </a:xfrm>
+          <a:prstGeom prst="rect">
+            <a:avLst/>
+          </a:prstGeom>
+          <a:noFill/>
+        </p:spPr>
+        <p:txBody>
+          <a:bodyPr wrap="square">
+            <a:spAutoFit/>
+          </a:bodyPr>
+          <a:lstStyle/>
+          <a:p>
+            <a:pPr algn="l"/>
+            <a:r>
+              <a:rPr sz="900" b="0">
                 <a:solidFill>
                   <a:srgbClr val="A1A1AA"/>
                 </a:solidFill>
-              </a:defRPr>
-            </a:pPr>
-            <a:r>
-              <a:t>academy.kspl.tech | Koenig AI Academy</a:t>
+              </a:rPr>
+              <a:t>academy.kspl.tech  |  Koenig AI Academy</a:t>
             </a:r>
           </a:p>
         </p:txBody>
@@ -4120,14 +7676,6 @@
 <file path=ppt/slides/slide4.xml><?xml version="1.0" encoding="utf-8"?>
 <p:sld xmlns:a="http://schemas.openxmlformats.org/drawingml/2006/main" xmlns:p="http://schemas.openxmlformats.org/presentationml/2006/main" xmlns:r="http://schemas.openxmlformats.org/officeDocument/2006/relationships">
   <p:cSld>
-    <p:bg>
-      <p:bgPr>
-        <a:solidFill>
-          <a:srgbClr val="18181B"/>
-        </a:solidFill>
-        <a:effectLst/>
-      </p:bgPr>
-    </p:bg>
     <p:spTree>
       <p:nvGrpSpPr>
         <p:cNvPr id="1" name=""/>
@@ -4137,14 +7685,143 @@
       <p:grpSpPr/>
       <p:sp>
         <p:nvSpPr>
-          <p:cNvPr id="2" name="TextBox 1"/>
+          <p:cNvPr id="2" name="Rectangle 1"/>
+          <p:cNvSpPr/>
+          <p:nvPr/>
+        </p:nvSpPr>
+        <p:spPr>
+          <a:xfrm>
+            <a:off x="0" y="0"/>
+            <a:ext cx="12188952" cy="6858000"/>
+          </a:xfrm>
+          <a:prstGeom prst="rect">
+            <a:avLst/>
+          </a:prstGeom>
+          <a:solidFill>
+            <a:srgbClr val="F4F4F5"/>
+          </a:solidFill>
+          <a:ln>
+            <a:noFill/>
+          </a:ln>
+        </p:spPr>
+        <p:style>
+          <a:lnRef idx="1">
+            <a:schemeClr val="accent1"/>
+          </a:lnRef>
+          <a:fillRef idx="3">
+            <a:schemeClr val="accent1"/>
+          </a:fillRef>
+          <a:effectRef idx="2">
+            <a:schemeClr val="accent1"/>
+          </a:effectRef>
+          <a:fontRef idx="minor">
+            <a:schemeClr val="lt1"/>
+          </a:fontRef>
+        </p:style>
+        <p:txBody>
+          <a:bodyPr rtlCol="0" anchor="ctr"/>
+          <a:lstStyle/>
+          <a:p>
+            <a:pPr algn="ctr"/>
+          </a:p>
+        </p:txBody>
+      </p:sp>
+      <p:sp>
+        <p:nvSpPr>
+          <p:cNvPr id="3" name="Rectangle 2"/>
+          <p:cNvSpPr/>
+          <p:nvPr/>
+        </p:nvSpPr>
+        <p:spPr>
+          <a:xfrm>
+            <a:off x="0" y="0"/>
+            <a:ext cx="12188952" cy="54864"/>
+          </a:xfrm>
+          <a:prstGeom prst="rect">
+            <a:avLst/>
+          </a:prstGeom>
+          <a:solidFill>
+            <a:srgbClr val="6366F1"/>
+          </a:solidFill>
+          <a:ln>
+            <a:noFill/>
+          </a:ln>
+        </p:spPr>
+        <p:style>
+          <a:lnRef idx="1">
+            <a:schemeClr val="accent1"/>
+          </a:lnRef>
+          <a:fillRef idx="3">
+            <a:schemeClr val="accent1"/>
+          </a:fillRef>
+          <a:effectRef idx="2">
+            <a:schemeClr val="accent1"/>
+          </a:effectRef>
+          <a:fontRef idx="minor">
+            <a:schemeClr val="lt1"/>
+          </a:fontRef>
+        </p:style>
+        <p:txBody>
+          <a:bodyPr rtlCol="0" anchor="ctr"/>
+          <a:lstStyle/>
+          <a:p>
+            <a:pPr algn="ctr"/>
+          </a:p>
+        </p:txBody>
+      </p:sp>
+      <p:sp>
+        <p:nvSpPr>
+          <p:cNvPr id="4" name="Rectangle 3"/>
+          <p:cNvSpPr/>
+          <p:nvPr/>
+        </p:nvSpPr>
+        <p:spPr>
+          <a:xfrm>
+            <a:off x="0" y="54864"/>
+            <a:ext cx="228600" cy="6803136"/>
+          </a:xfrm>
+          <a:prstGeom prst="rect">
+            <a:avLst/>
+          </a:prstGeom>
+          <a:solidFill>
+            <a:srgbClr val="6366F1"/>
+          </a:solidFill>
+          <a:ln>
+            <a:noFill/>
+          </a:ln>
+        </p:spPr>
+        <p:style>
+          <a:lnRef idx="1">
+            <a:schemeClr val="accent1"/>
+          </a:lnRef>
+          <a:fillRef idx="3">
+            <a:schemeClr val="accent1"/>
+          </a:fillRef>
+          <a:effectRef idx="2">
+            <a:schemeClr val="accent1"/>
+          </a:effectRef>
+          <a:fontRef idx="minor">
+            <a:schemeClr val="lt1"/>
+          </a:fontRef>
+        </p:style>
+        <p:txBody>
+          <a:bodyPr rtlCol="0" anchor="ctr"/>
+          <a:lstStyle/>
+          <a:p>
+            <a:pPr algn="ctr"/>
+          </a:p>
+        </p:txBody>
+      </p:sp>
+      <p:sp>
+        <p:nvSpPr>
+          <p:cNvPr id="5" name="TextBox 4"/>
           <p:cNvSpPr txBox="1"/>
           <p:nvPr/>
         </p:nvSpPr>
         <p:spPr>
           <a:xfrm>
-            <a:off x="731520" y="548640"/>
-            <a:ext cx="10789920" cy="731520"/>
+            <a:off x="502920" y="164592"/>
+            <a:ext cx="11430000" cy="594360"/>
           </a:xfrm>
           <a:prstGeom prst="rect">
             <a:avLst/>
@@ -4152,34 +7829,76 @@
           <a:noFill/>
         </p:spPr>
         <p:txBody>
-          <a:bodyPr wrap="none">
+          <a:bodyPr wrap="square">
             <a:spAutoFit/>
           </a:bodyPr>
           <a:lstStyle/>
           <a:p>
-            <a:pPr>
-              <a:defRPr sz="3000" b="1">
-                <a:solidFill>
-                  <a:srgbClr val="FFFFFF"/>
-                </a:solidFill>
-              </a:defRPr>
-            </a:pPr>
-            <a:r>
-              <a:t>1.2 Benchmark Literacy: Reading Numbers Without Being Misled</a:t>
-            </a:r>
-          </a:p>
-        </p:txBody>
-      </p:sp>
-      <p:sp>
-        <p:nvSpPr>
-          <p:cNvPr id="3" name="TextBox 2"/>
+            <a:pPr algn="l"/>
+            <a:r>
+              <a:rPr sz="2600" b="1">
+                <a:solidFill>
+                  <a:srgbClr val="18181B"/>
+                </a:solidFill>
+              </a:rPr>
+              <a:t>1.2  Benchmark Literacy: Reading Numbers Honestly</a:t>
+            </a:r>
+          </a:p>
+        </p:txBody>
+      </p:sp>
+      <p:sp>
+        <p:nvSpPr>
+          <p:cNvPr id="6" name="Rectangle 5"/>
+          <p:cNvSpPr/>
+          <p:nvPr/>
+        </p:nvSpPr>
+        <p:spPr>
+          <a:xfrm>
+            <a:off x="502920" y="804672"/>
+            <a:ext cx="11430000" cy="12700"/>
+          </a:xfrm>
+          <a:prstGeom prst="rect">
+            <a:avLst/>
+          </a:prstGeom>
+          <a:solidFill>
+            <a:srgbClr val="A1A1AA"/>
+          </a:solidFill>
+          <a:ln>
+            <a:noFill/>
+          </a:ln>
+        </p:spPr>
+        <p:style>
+          <a:lnRef idx="1">
+            <a:schemeClr val="accent1"/>
+          </a:lnRef>
+          <a:fillRef idx="3">
+            <a:schemeClr val="accent1"/>
+          </a:fillRef>
+          <a:effectRef idx="2">
+            <a:schemeClr val="accent1"/>
+          </a:effectRef>
+          <a:fontRef idx="minor">
+            <a:schemeClr val="lt1"/>
+          </a:fontRef>
+        </p:style>
+        <p:txBody>
+          <a:bodyPr rtlCol="0" anchor="ctr"/>
+          <a:lstStyle/>
+          <a:p>
+            <a:pPr algn="ctr"/>
+          </a:p>
+        </p:txBody>
+      </p:sp>
+      <p:sp>
+        <p:nvSpPr>
+          <p:cNvPr id="7" name="TextBox 6"/>
           <p:cNvSpPr txBox="1"/>
           <p:nvPr/>
         </p:nvSpPr>
         <p:spPr>
           <a:xfrm>
-            <a:off x="914400" y="1463040"/>
-            <a:ext cx="10241280" cy="4572000"/>
+            <a:off x="502920" y="960120"/>
+            <a:ext cx="11247120" cy="1005840"/>
           </a:xfrm>
           <a:prstGeom prst="rect">
             <a:avLst/>
@@ -4187,82 +7906,33 @@
           <a:noFill/>
         </p:spPr>
         <p:txBody>
-          <a:bodyPr wrap="none">
+          <a:bodyPr wrap="square">
             <a:spAutoFit/>
           </a:bodyPr>
           <a:lstStyle/>
           <a:p>
-            <a:pPr>
-              <a:defRPr sz="2000">
-                <a:solidFill>
-                  <a:srgbClr val="FFFFFF"/>
-                </a:solidFill>
-              </a:defRPr>
-            </a:pPr>
-            <a:r>
-              <a:t>• Cursor's technical report claims Composer 2 achieves **61.3 on CursorBench**. VentureBeat reported it "beats Claude Opus 4.6 but still tr...</a:t>
-            </a:r>
-          </a:p>
-          <a:p>
-            <a:pPr>
-              <a:defRPr sz="2000">
-                <a:solidFill>
-                  <a:srgbClr val="FFFFFF"/>
-                </a:solidFill>
-              </a:defRPr>
-            </a:pPr>
-            <a:r>
-              <a:t>• Almost nothing, taken at face value. Here is a two-layer reading framework the community has converged on:</a:t>
-            </a:r>
-          </a:p>
-          <a:p>
-            <a:pPr>
-              <a:defRPr sz="2000">
-                <a:solidFill>
-                  <a:srgbClr val="FFFFFF"/>
-                </a:solidFill>
-              </a:defRPr>
-            </a:pPr>
-            <a:r>
-              <a:t>• Layer 1: Directional signal</a:t>
-            </a:r>
-          </a:p>
-          <a:p>
-            <a:pPr>
-              <a:defRPr sz="2000">
-                <a:solidFill>
-                  <a:srgbClr val="FFFFFF"/>
-                </a:solidFill>
-              </a:defRPr>
-            </a:pPr>
-            <a:r>
-              <a:t>• Benchmarks do tell you something. A model scoring 61.3 versus 45 on the same eval likely handles the evaluated task type better in the te...</a:t>
-            </a:r>
-          </a:p>
-          <a:p>
-            <a:pPr>
-              <a:defRPr sz="2000">
-                <a:solidFill>
-                  <a:srgbClr val="FFFFFF"/>
-                </a:solidFill>
-              </a:defRPr>
-            </a:pPr>
-            <a:r>
-              <a:t>• Layer 2: Local task evals as decision authority</a:t>
-            </a:r>
-          </a:p>
-        </p:txBody>
-      </p:sp>
-      <p:sp>
-        <p:nvSpPr>
-          <p:cNvPr id="4" name="TextBox 3"/>
+            <a:pPr algn="l"/>
+            <a:r>
+              <a:rPr sz="1500">
+                <a:solidFill>
+                  <a:srgbClr val="18181B"/>
+                </a:solidFill>
+              </a:rPr>
+              <a:t>▸  Cursor reports Composer 2 at 61.3 on CursorBench, positioned above Claude Opus 4.6; VentureBeat: 'beats Opus 4.6 but trails GPT-5.4' — useful directional signal only</a:t>
+            </a:r>
+          </a:p>
+        </p:txBody>
+      </p:sp>
+      <p:sp>
+        <p:nvSpPr>
+          <p:cNvPr id="8" name="TextBox 7"/>
           <p:cNvSpPr txBox="1"/>
           <p:nvPr/>
         </p:nvSpPr>
         <p:spPr>
           <a:xfrm>
-            <a:off x="457200" y="6309360"/>
-            <a:ext cx="11247120" cy="274320"/>
+            <a:off x="502920" y="1828800"/>
+            <a:ext cx="11247120" cy="1005840"/>
           </a:xfrm>
           <a:prstGeom prst="rect">
             <a:avLst/>
@@ -4270,20 +7940,155 @@
           <a:noFill/>
         </p:spPr>
         <p:txBody>
-          <a:bodyPr wrap="none">
+          <a:bodyPr wrap="square">
             <a:spAutoFit/>
           </a:bodyPr>
           <a:lstStyle/>
           <a:p>
-            <a:pPr>
-              <a:defRPr sz="1100">
+            <a:pPr algn="l"/>
+            <a:r>
+              <a:rPr sz="1500">
+                <a:solidFill>
+                  <a:srgbClr val="18181B"/>
+                </a:solidFill>
+              </a:rPr>
+              <a:t>▸  Layer 1 — Directional signal: a model scoring 61.3 vs 45 on the same eval likely handles those task types better in tested conditions; CursorBench tests IDE-specific agentic tasks (multi-file edits, test generation, tool use) — more relevant than generic coding competitions</a:t>
+            </a:r>
+          </a:p>
+        </p:txBody>
+      </p:sp>
+      <p:sp>
+        <p:nvSpPr>
+          <p:cNvPr id="9" name="TextBox 8"/>
+          <p:cNvSpPr txBox="1"/>
+          <p:nvPr/>
+        </p:nvSpPr>
+        <p:spPr>
+          <a:xfrm>
+            <a:off x="502920" y="2697480"/>
+            <a:ext cx="11247120" cy="1005840"/>
+          </a:xfrm>
+          <a:prstGeom prst="rect">
+            <a:avLst/>
+          </a:prstGeom>
+          <a:noFill/>
+        </p:spPr>
+        <p:txBody>
+          <a:bodyPr wrap="square">
+            <a:spAutoFit/>
+          </a:bodyPr>
+          <a:lstStyle/>
+          <a:p>
+            <a:pPr algn="l"/>
+            <a:r>
+              <a:rPr sz="1500">
+                <a:solidFill>
+                  <a:srgbClr val="18181B"/>
+                </a:solidFill>
+              </a:rPr>
+              <a:t>▸  Layer 2 — Local task evals as decision authority: your codebase has specific language versions, tribal knowledge, test harnesses, and reviewer standards that no public benchmark captures; run Composer 2 on 10–20 representative tasks before committing</a:t>
+            </a:r>
+          </a:p>
+        </p:txBody>
+      </p:sp>
+      <p:sp>
+        <p:nvSpPr>
+          <p:cNvPr id="10" name="TextBox 9"/>
+          <p:cNvSpPr txBox="1"/>
+          <p:nvPr/>
+        </p:nvSpPr>
+        <p:spPr>
+          <a:xfrm>
+            <a:off x="502920" y="3566160"/>
+            <a:ext cx="11247120" cy="1005840"/>
+          </a:xfrm>
+          <a:prstGeom prst="rect">
+            <a:avLst/>
+          </a:prstGeom>
+          <a:noFill/>
+        </p:spPr>
+        <p:txBody>
+          <a:bodyPr wrap="square">
+            <a:spAutoFit/>
+          </a:bodyPr>
+          <a:lstStyle/>
+          <a:p>
+            <a:pPr algn="l"/>
+            <a:r>
+              <a:rPr sz="1500">
+                <a:solidFill>
+                  <a:srgbClr val="18181B"/>
+                </a:solidFill>
+              </a:rPr>
+              <a:t>▸  Benchmaxxed risk: if a benchmark score rose sharply without proportionally large training compute, the model may be overfit to the eval distribution — treat like a suspiciously high A/B test and run your own experiment</a:t>
+            </a:r>
+          </a:p>
+        </p:txBody>
+      </p:sp>
+      <p:sp>
+        <p:nvSpPr>
+          <p:cNvPr id="11" name="TextBox 10"/>
+          <p:cNvSpPr txBox="1"/>
+          <p:nvPr/>
+        </p:nvSpPr>
+        <p:spPr>
+          <a:xfrm>
+            <a:off x="502920" y="4434840"/>
+            <a:ext cx="11247120" cy="1005840"/>
+          </a:xfrm>
+          <a:prstGeom prst="rect">
+            <a:avLst/>
+          </a:prstGeom>
+          <a:noFill/>
+        </p:spPr>
+        <p:txBody>
+          <a:bodyPr wrap="square">
+            <a:spAutoFit/>
+          </a:bodyPr>
+          <a:lstStyle/>
+          <a:p>
+            <a:pPr algn="l"/>
+            <a:r>
+              <a:rPr sz="1500">
+                <a:solidFill>
+                  <a:srgbClr val="18181B"/>
+                </a:solidFill>
+              </a:rPr>
+              <a:t>▸  Measure what matters in your context: correctness rate, follow-up prompts needed, test-pass rate on first attempt, and token spend per task completion</a:t>
+            </a:r>
+          </a:p>
+        </p:txBody>
+      </p:sp>
+      <p:sp>
+        <p:nvSpPr>
+          <p:cNvPr id="12" name="TextBox 11"/>
+          <p:cNvSpPr txBox="1"/>
+          <p:nvPr/>
+        </p:nvSpPr>
+        <p:spPr>
+          <a:xfrm>
+            <a:off x="457200" y="6510528"/>
+            <a:ext cx="10972800" cy="274320"/>
+          </a:xfrm>
+          <a:prstGeom prst="rect">
+            <a:avLst/>
+          </a:prstGeom>
+          <a:noFill/>
+        </p:spPr>
+        <p:txBody>
+          <a:bodyPr wrap="square">
+            <a:spAutoFit/>
+          </a:bodyPr>
+          <a:lstStyle/>
+          <a:p>
+            <a:pPr algn="l"/>
+            <a:r>
+              <a:rPr sz="900" b="0">
                 <a:solidFill>
                   <a:srgbClr val="A1A1AA"/>
                 </a:solidFill>
-              </a:defRPr>
-            </a:pPr>
-            <a:r>
-              <a:t>academy.kspl.tech | Koenig AI Academy</a:t>
+              </a:rPr>
+              <a:t>academy.kspl.tech  |  Koenig AI Academy</a:t>
             </a:r>
           </a:p>
         </p:txBody>
@@ -4299,14 +8104,6 @@
 <file path=ppt/slides/slide5.xml><?xml version="1.0" encoding="utf-8"?>
 <p:sld xmlns:a="http://schemas.openxmlformats.org/drawingml/2006/main" xmlns:p="http://schemas.openxmlformats.org/presentationml/2006/main" xmlns:r="http://schemas.openxmlformats.org/officeDocument/2006/relationships">
   <p:cSld>
-    <p:bg>
-      <p:bgPr>
-        <a:solidFill>
-          <a:srgbClr val="18181B"/>
-        </a:solidFill>
-        <a:effectLst/>
-      </p:bgPr>
-    </p:bg>
     <p:spTree>
       <p:nvGrpSpPr>
         <p:cNvPr id="1" name=""/>
@@ -4316,14 +8113,143 @@
       <p:grpSpPr/>
       <p:sp>
         <p:nvSpPr>
-          <p:cNvPr id="2" name="TextBox 1"/>
+          <p:cNvPr id="2" name="Rectangle 1"/>
+          <p:cNvSpPr/>
+          <p:nvPr/>
+        </p:nvSpPr>
+        <p:spPr>
+          <a:xfrm>
+            <a:off x="0" y="0"/>
+            <a:ext cx="12188952" cy="6858000"/>
+          </a:xfrm>
+          <a:prstGeom prst="rect">
+            <a:avLst/>
+          </a:prstGeom>
+          <a:solidFill>
+            <a:srgbClr val="F4F4F5"/>
+          </a:solidFill>
+          <a:ln>
+            <a:noFill/>
+          </a:ln>
+        </p:spPr>
+        <p:style>
+          <a:lnRef idx="1">
+            <a:schemeClr val="accent1"/>
+          </a:lnRef>
+          <a:fillRef idx="3">
+            <a:schemeClr val="accent1"/>
+          </a:fillRef>
+          <a:effectRef idx="2">
+            <a:schemeClr val="accent1"/>
+          </a:effectRef>
+          <a:fontRef idx="minor">
+            <a:schemeClr val="lt1"/>
+          </a:fontRef>
+        </p:style>
+        <p:txBody>
+          <a:bodyPr rtlCol="0" anchor="ctr"/>
+          <a:lstStyle/>
+          <a:p>
+            <a:pPr algn="ctr"/>
+          </a:p>
+        </p:txBody>
+      </p:sp>
+      <p:sp>
+        <p:nvSpPr>
+          <p:cNvPr id="3" name="Rectangle 2"/>
+          <p:cNvSpPr/>
+          <p:nvPr/>
+        </p:nvSpPr>
+        <p:spPr>
+          <a:xfrm>
+            <a:off x="0" y="0"/>
+            <a:ext cx="12188952" cy="54864"/>
+          </a:xfrm>
+          <a:prstGeom prst="rect">
+            <a:avLst/>
+          </a:prstGeom>
+          <a:solidFill>
+            <a:srgbClr val="6366F1"/>
+          </a:solidFill>
+          <a:ln>
+            <a:noFill/>
+          </a:ln>
+        </p:spPr>
+        <p:style>
+          <a:lnRef idx="1">
+            <a:schemeClr val="accent1"/>
+          </a:lnRef>
+          <a:fillRef idx="3">
+            <a:schemeClr val="accent1"/>
+          </a:fillRef>
+          <a:effectRef idx="2">
+            <a:schemeClr val="accent1"/>
+          </a:effectRef>
+          <a:fontRef idx="minor">
+            <a:schemeClr val="lt1"/>
+          </a:fontRef>
+        </p:style>
+        <p:txBody>
+          <a:bodyPr rtlCol="0" anchor="ctr"/>
+          <a:lstStyle/>
+          <a:p>
+            <a:pPr algn="ctr"/>
+          </a:p>
+        </p:txBody>
+      </p:sp>
+      <p:sp>
+        <p:nvSpPr>
+          <p:cNvPr id="4" name="Rectangle 3"/>
+          <p:cNvSpPr/>
+          <p:nvPr/>
+        </p:nvSpPr>
+        <p:spPr>
+          <a:xfrm>
+            <a:off x="0" y="54864"/>
+            <a:ext cx="228600" cy="6803136"/>
+          </a:xfrm>
+          <a:prstGeom prst="rect">
+            <a:avLst/>
+          </a:prstGeom>
+          <a:solidFill>
+            <a:srgbClr val="6366F1"/>
+          </a:solidFill>
+          <a:ln>
+            <a:noFill/>
+          </a:ln>
+        </p:spPr>
+        <p:style>
+          <a:lnRef idx="1">
+            <a:schemeClr val="accent1"/>
+          </a:lnRef>
+          <a:fillRef idx="3">
+            <a:schemeClr val="accent1"/>
+          </a:fillRef>
+          <a:effectRef idx="2">
+            <a:schemeClr val="accent1"/>
+          </a:effectRef>
+          <a:fontRef idx="minor">
+            <a:schemeClr val="lt1"/>
+          </a:fontRef>
+        </p:style>
+        <p:txBody>
+          <a:bodyPr rtlCol="0" anchor="ctr"/>
+          <a:lstStyle/>
+          <a:p>
+            <a:pPr algn="ctr"/>
+          </a:p>
+        </p:txBody>
+      </p:sp>
+      <p:sp>
+        <p:nvSpPr>
+          <p:cNvPr id="5" name="TextBox 4"/>
           <p:cNvSpPr txBox="1"/>
           <p:nvPr/>
         </p:nvSpPr>
         <p:spPr>
           <a:xfrm>
-            <a:off x="731520" y="548640"/>
-            <a:ext cx="10789920" cy="731520"/>
+            <a:off x="502920" y="164592"/>
+            <a:ext cx="11430000" cy="594360"/>
           </a:xfrm>
           <a:prstGeom prst="rect">
             <a:avLst/>
@@ -4331,34 +8257,76 @@
           <a:noFill/>
         </p:spPr>
         <p:txBody>
-          <a:bodyPr wrap="none">
+          <a:bodyPr wrap="square">
             <a:spAutoFit/>
           </a:bodyPr>
           <a:lstStyle/>
           <a:p>
-            <a:pPr>
-              <a:defRPr sz="3000" b="1">
-                <a:solidFill>
-                  <a:srgbClr val="FFFFFF"/>
-                </a:solidFill>
-              </a:defRPr>
-            </a:pPr>
-            <a:r>
-              <a:t>1.2 Benchmark Literacy: Reading Numbers Without Being Misled (continued)</a:t>
-            </a:r>
-          </a:p>
-        </p:txBody>
-      </p:sp>
-      <p:sp>
-        <p:nvSpPr>
-          <p:cNvPr id="3" name="TextBox 2"/>
+            <a:pPr algn="l"/>
+            <a:r>
+              <a:rPr sz="2600" b="1">
+                <a:solidFill>
+                  <a:srgbClr val="18181B"/>
+                </a:solidFill>
+              </a:rPr>
+              <a:t>1.3  Routing Rubric — Use Composer 2 For:</a:t>
+            </a:r>
+          </a:p>
+        </p:txBody>
+      </p:sp>
+      <p:sp>
+        <p:nvSpPr>
+          <p:cNvPr id="6" name="Rectangle 5"/>
+          <p:cNvSpPr/>
+          <p:nvPr/>
+        </p:nvSpPr>
+        <p:spPr>
+          <a:xfrm>
+            <a:off x="502920" y="804672"/>
+            <a:ext cx="11430000" cy="12700"/>
+          </a:xfrm>
+          <a:prstGeom prst="rect">
+            <a:avLst/>
+          </a:prstGeom>
+          <a:solidFill>
+            <a:srgbClr val="A1A1AA"/>
+          </a:solidFill>
+          <a:ln>
+            <a:noFill/>
+          </a:ln>
+        </p:spPr>
+        <p:style>
+          <a:lnRef idx="1">
+            <a:schemeClr val="accent1"/>
+          </a:lnRef>
+          <a:fillRef idx="3">
+            <a:schemeClr val="accent1"/>
+          </a:fillRef>
+          <a:effectRef idx="2">
+            <a:schemeClr val="accent1"/>
+          </a:effectRef>
+          <a:fontRef idx="minor">
+            <a:schemeClr val="lt1"/>
+          </a:fontRef>
+        </p:style>
+        <p:txBody>
+          <a:bodyPr rtlCol="0" anchor="ctr"/>
+          <a:lstStyle/>
+          <a:p>
+            <a:pPr algn="ctr"/>
+          </a:p>
+        </p:txBody>
+      </p:sp>
+      <p:sp>
+        <p:nvSpPr>
+          <p:cNvPr id="7" name="TextBox 6"/>
           <p:cNvSpPr txBox="1"/>
           <p:nvPr/>
         </p:nvSpPr>
         <p:spPr>
           <a:xfrm>
-            <a:off x="914400" y="1463040"/>
-            <a:ext cx="10241280" cy="4572000"/>
+            <a:off x="502920" y="960120"/>
+            <a:ext cx="11247120" cy="1005840"/>
           </a:xfrm>
           <a:prstGeom prst="rect">
             <a:avLst/>
@@ -4366,82 +8334,33 @@
           <a:noFill/>
         </p:spPr>
         <p:txBody>
-          <a:bodyPr wrap="none">
+          <a:bodyPr wrap="square">
             <a:spAutoFit/>
           </a:bodyPr>
           <a:lstStyle/>
           <a:p>
-            <a:pPr>
-              <a:defRPr sz="2000">
-                <a:solidFill>
-                  <a:srgbClr val="FFFFFF"/>
-                </a:solidFill>
-              </a:defRPr>
-            </a:pPr>
-            <a:r>
-              <a:t>• Your codebase is not CursorBench. It has:</a:t>
-            </a:r>
-          </a:p>
-          <a:p>
-            <a:pPr>
-              <a:defRPr sz="2000">
-                <a:solidFill>
-                  <a:srgbClr val="FFFFFF"/>
-                </a:solidFill>
-              </a:defRPr>
-            </a:pPr>
-            <a:r>
-              <a:t>• Specific language versions and framework idioms</a:t>
-            </a:r>
-          </a:p>
-          <a:p>
-            <a:pPr>
-              <a:defRPr sz="2000">
-                <a:solidFill>
-                  <a:srgbClr val="FFFFFF"/>
-                </a:solidFill>
-              </a:defRPr>
-            </a:pPr>
-            <a:r>
-              <a:t>• Tribal knowledge encoded in existing code that no benchmark captures</a:t>
-            </a:r>
-          </a:p>
-          <a:p>
-            <a:pPr>
-              <a:defRPr sz="2000">
-                <a:solidFill>
-                  <a:srgbClr val="FFFFFF"/>
-                </a:solidFill>
-              </a:defRPr>
-            </a:pPr>
-            <a:r>
-              <a:t>• Test harnesses with particular failure modes</a:t>
-            </a:r>
-          </a:p>
-          <a:p>
-            <a:pPr>
-              <a:defRPr sz="2000">
-                <a:solidFill>
-                  <a:srgbClr val="FFFFFF"/>
-                </a:solidFill>
-              </a:defRPr>
-            </a:pPr>
-            <a:r>
-              <a:t>• Reviewer standards that are not in any eval rubric</a:t>
-            </a:r>
-          </a:p>
-        </p:txBody>
-      </p:sp>
-      <p:sp>
-        <p:nvSpPr>
-          <p:cNvPr id="4" name="TextBox 3"/>
+            <a:pPr algn="l"/>
+            <a:r>
+              <a:rPr sz="1500">
+                <a:solidFill>
+                  <a:srgbClr val="18181B"/>
+                </a:solidFill>
+              </a:rPr>
+              <a:t>▸  Short-to-medium iteration loops: feature additions, bug fixes, refactor passes in code you own and understand well</a:t>
+            </a:r>
+          </a:p>
+        </p:txBody>
+      </p:sp>
+      <p:sp>
+        <p:nvSpPr>
+          <p:cNvPr id="8" name="TextBox 7"/>
           <p:cNvSpPr txBox="1"/>
           <p:nvPr/>
         </p:nvSpPr>
         <p:spPr>
           <a:xfrm>
-            <a:off x="457200" y="6309360"/>
-            <a:ext cx="11247120" cy="274320"/>
+            <a:off x="502920" y="1828800"/>
+            <a:ext cx="11247120" cy="1005840"/>
           </a:xfrm>
           <a:prstGeom prst="rect">
             <a:avLst/>
@@ -4449,20 +8368,155 @@
           <a:noFill/>
         </p:spPr>
         <p:txBody>
-          <a:bodyPr wrap="none">
+          <a:bodyPr wrap="square">
             <a:spAutoFit/>
           </a:bodyPr>
           <a:lstStyle/>
           <a:p>
-            <a:pPr>
-              <a:defRPr sz="1100">
+            <a:pPr algn="l"/>
+            <a:r>
+              <a:rPr sz="1500">
+                <a:solidFill>
+                  <a:srgbClr val="18181B"/>
+                </a:solidFill>
+              </a:rPr>
+              <a:t>▸  High-frequency experiments: parallel attempts ('try three approaches, I'll pick the best'), throwaway prototypes where iteration speed matters more than depth</a:t>
+            </a:r>
+          </a:p>
+        </p:txBody>
+      </p:sp>
+      <p:sp>
+        <p:nvSpPr>
+          <p:cNvPr id="9" name="TextBox 8"/>
+          <p:cNvSpPr txBox="1"/>
+          <p:nvPr/>
+        </p:nvSpPr>
+        <p:spPr>
+          <a:xfrm>
+            <a:off x="502920" y="2697480"/>
+            <a:ext cx="11247120" cy="1005840"/>
+          </a:xfrm>
+          <a:prstGeom prst="rect">
+            <a:avLst/>
+          </a:prstGeom>
+          <a:noFill/>
+        </p:spPr>
+        <p:txBody>
+          <a:bodyPr wrap="square">
+            <a:spAutoFit/>
+          </a:bodyPr>
+          <a:lstStyle/>
+          <a:p>
+            <a:pPr algn="l"/>
+            <a:r>
+              <a:rPr sz="1500">
+                <a:solidFill>
+                  <a:srgbClr val="18181B"/>
+                </a:solidFill>
+              </a:rPr>
+              <a:t>▸  Routine generation tasks: CRUD endpoints, test cases, migration scripts for known schemas — tasks where you can predict what 'correct' looks like</a:t>
+            </a:r>
+          </a:p>
+        </p:txBody>
+      </p:sp>
+      <p:sp>
+        <p:nvSpPr>
+          <p:cNvPr id="10" name="TextBox 9"/>
+          <p:cNvSpPr txBox="1"/>
+          <p:nvPr/>
+        </p:nvSpPr>
+        <p:spPr>
+          <a:xfrm>
+            <a:off x="502920" y="3566160"/>
+            <a:ext cx="11247120" cy="1005840"/>
+          </a:xfrm>
+          <a:prstGeom prst="rect">
+            <a:avLst/>
+          </a:prstGeom>
+          <a:noFill/>
+        </p:spPr>
+        <p:txBody>
+          <a:bodyPr wrap="square">
+            <a:spAutoFit/>
+          </a:bodyPr>
+          <a:lstStyle/>
+          <a:p>
+            <a:pPr algn="l"/>
+            <a:r>
+              <a:rPr sz="1500">
+                <a:solidFill>
+                  <a:srgbClr val="18181B"/>
+                </a:solidFill>
+              </a:rPr>
+              <a:t>▸  IDE-integrated edits: diff-reviewed changes where you inspect every hunk before accepting; Composer 2's cost economics support high-frequency review loops</a:t>
+            </a:r>
+          </a:p>
+        </p:txBody>
+      </p:sp>
+      <p:sp>
+        <p:nvSpPr>
+          <p:cNvPr id="11" name="TextBox 10"/>
+          <p:cNvSpPr txBox="1"/>
+          <p:nvPr/>
+        </p:nvSpPr>
+        <p:spPr>
+          <a:xfrm>
+            <a:off x="502920" y="4434840"/>
+            <a:ext cx="11247120" cy="1005840"/>
+          </a:xfrm>
+          <a:prstGeom prst="rect">
+            <a:avLst/>
+          </a:prstGeom>
+          <a:noFill/>
+        </p:spPr>
+        <p:txBody>
+          <a:bodyPr wrap="square">
+            <a:spAutoFit/>
+          </a:bodyPr>
+          <a:lstStyle/>
+          <a:p>
+            <a:pPr algn="l"/>
+            <a:r>
+              <a:rPr sz="1500">
+                <a:solidFill>
+                  <a:srgbClr val="18181B"/>
+                </a:solidFill>
+              </a:rPr>
+              <a:t>▸  Cost-governed parallel agent sessions: token economics make Composer 2 the default for any task class where 50+ turns per day is feasible</a:t>
+            </a:r>
+          </a:p>
+        </p:txBody>
+      </p:sp>
+      <p:sp>
+        <p:nvSpPr>
+          <p:cNvPr id="12" name="TextBox 11"/>
+          <p:cNvSpPr txBox="1"/>
+          <p:nvPr/>
+        </p:nvSpPr>
+        <p:spPr>
+          <a:xfrm>
+            <a:off x="457200" y="6510528"/>
+            <a:ext cx="10972800" cy="274320"/>
+          </a:xfrm>
+          <a:prstGeom prst="rect">
+            <a:avLst/>
+          </a:prstGeom>
+          <a:noFill/>
+        </p:spPr>
+        <p:txBody>
+          <a:bodyPr wrap="square">
+            <a:spAutoFit/>
+          </a:bodyPr>
+          <a:lstStyle/>
+          <a:p>
+            <a:pPr algn="l"/>
+            <a:r>
+              <a:rPr sz="900" b="0">
                 <a:solidFill>
                   <a:srgbClr val="A1A1AA"/>
                 </a:solidFill>
-              </a:defRPr>
-            </a:pPr>
-            <a:r>
-              <a:t>academy.kspl.tech | Koenig AI Academy</a:t>
+              </a:rPr>
+              <a:t>academy.kspl.tech  |  Koenig AI Academy</a:t>
             </a:r>
           </a:p>
         </p:txBody>
@@ -4478,14 +8532,6 @@
 <file path=ppt/slides/slide6.xml><?xml version="1.0" encoding="utf-8"?>
 <p:sld xmlns:a="http://schemas.openxmlformats.org/drawingml/2006/main" xmlns:p="http://schemas.openxmlformats.org/presentationml/2006/main" xmlns:r="http://schemas.openxmlformats.org/officeDocument/2006/relationships">
   <p:cSld>
-    <p:bg>
-      <p:bgPr>
-        <a:solidFill>
-          <a:srgbClr val="18181B"/>
-        </a:solidFill>
-        <a:effectLst/>
-      </p:bgPr>
-    </p:bg>
     <p:spTree>
       <p:nvGrpSpPr>
         <p:cNvPr id="1" name=""/>
@@ -4495,14 +8541,143 @@
       <p:grpSpPr/>
       <p:sp>
         <p:nvSpPr>
-          <p:cNvPr id="2" name="TextBox 1"/>
+          <p:cNvPr id="2" name="Rectangle 1"/>
+          <p:cNvSpPr/>
+          <p:nvPr/>
+        </p:nvSpPr>
+        <p:spPr>
+          <a:xfrm>
+            <a:off x="0" y="0"/>
+            <a:ext cx="12188952" cy="6858000"/>
+          </a:xfrm>
+          <a:prstGeom prst="rect">
+            <a:avLst/>
+          </a:prstGeom>
+          <a:solidFill>
+            <a:srgbClr val="F4F4F5"/>
+          </a:solidFill>
+          <a:ln>
+            <a:noFill/>
+          </a:ln>
+        </p:spPr>
+        <p:style>
+          <a:lnRef idx="1">
+            <a:schemeClr val="accent1"/>
+          </a:lnRef>
+          <a:fillRef idx="3">
+            <a:schemeClr val="accent1"/>
+          </a:fillRef>
+          <a:effectRef idx="2">
+            <a:schemeClr val="accent1"/>
+          </a:effectRef>
+          <a:fontRef idx="minor">
+            <a:schemeClr val="lt1"/>
+          </a:fontRef>
+        </p:style>
+        <p:txBody>
+          <a:bodyPr rtlCol="0" anchor="ctr"/>
+          <a:lstStyle/>
+          <a:p>
+            <a:pPr algn="ctr"/>
+          </a:p>
+        </p:txBody>
+      </p:sp>
+      <p:sp>
+        <p:nvSpPr>
+          <p:cNvPr id="3" name="Rectangle 2"/>
+          <p:cNvSpPr/>
+          <p:nvPr/>
+        </p:nvSpPr>
+        <p:spPr>
+          <a:xfrm>
+            <a:off x="0" y="0"/>
+            <a:ext cx="12188952" cy="54864"/>
+          </a:xfrm>
+          <a:prstGeom prst="rect">
+            <a:avLst/>
+          </a:prstGeom>
+          <a:solidFill>
+            <a:srgbClr val="6366F1"/>
+          </a:solidFill>
+          <a:ln>
+            <a:noFill/>
+          </a:ln>
+        </p:spPr>
+        <p:style>
+          <a:lnRef idx="1">
+            <a:schemeClr val="accent1"/>
+          </a:lnRef>
+          <a:fillRef idx="3">
+            <a:schemeClr val="accent1"/>
+          </a:fillRef>
+          <a:effectRef idx="2">
+            <a:schemeClr val="accent1"/>
+          </a:effectRef>
+          <a:fontRef idx="minor">
+            <a:schemeClr val="lt1"/>
+          </a:fontRef>
+        </p:style>
+        <p:txBody>
+          <a:bodyPr rtlCol="0" anchor="ctr"/>
+          <a:lstStyle/>
+          <a:p>
+            <a:pPr algn="ctr"/>
+          </a:p>
+        </p:txBody>
+      </p:sp>
+      <p:sp>
+        <p:nvSpPr>
+          <p:cNvPr id="4" name="Rectangle 3"/>
+          <p:cNvSpPr/>
+          <p:nvPr/>
+        </p:nvSpPr>
+        <p:spPr>
+          <a:xfrm>
+            <a:off x="0" y="54864"/>
+            <a:ext cx="228600" cy="6803136"/>
+          </a:xfrm>
+          <a:prstGeom prst="rect">
+            <a:avLst/>
+          </a:prstGeom>
+          <a:solidFill>
+            <a:srgbClr val="6366F1"/>
+          </a:solidFill>
+          <a:ln>
+            <a:noFill/>
+          </a:ln>
+        </p:spPr>
+        <p:style>
+          <a:lnRef idx="1">
+            <a:schemeClr val="accent1"/>
+          </a:lnRef>
+          <a:fillRef idx="3">
+            <a:schemeClr val="accent1"/>
+          </a:fillRef>
+          <a:effectRef idx="2">
+            <a:schemeClr val="accent1"/>
+          </a:effectRef>
+          <a:fontRef idx="minor">
+            <a:schemeClr val="lt1"/>
+          </a:fontRef>
+        </p:style>
+        <p:txBody>
+          <a:bodyPr rtlCol="0" anchor="ctr"/>
+          <a:lstStyle/>
+          <a:p>
+            <a:pPr algn="ctr"/>
+          </a:p>
+        </p:txBody>
+      </p:sp>
+      <p:sp>
+        <p:nvSpPr>
+          <p:cNvPr id="5" name="TextBox 4"/>
           <p:cNvSpPr txBox="1"/>
           <p:nvPr/>
         </p:nvSpPr>
         <p:spPr>
           <a:xfrm>
-            <a:off x="731520" y="548640"/>
-            <a:ext cx="10789920" cy="731520"/>
+            <a:off x="502920" y="164592"/>
+            <a:ext cx="11430000" cy="594360"/>
           </a:xfrm>
           <a:prstGeom prst="rect">
             <a:avLst/>
@@ -4510,34 +8685,76 @@
           <a:noFill/>
         </p:spPr>
         <p:txBody>
-          <a:bodyPr wrap="none">
+          <a:bodyPr wrap="square">
             <a:spAutoFit/>
           </a:bodyPr>
           <a:lstStyle/>
           <a:p>
-            <a:pPr>
-              <a:defRPr sz="3000" b="1">
-                <a:solidFill>
-                  <a:srgbClr val="FFFFFF"/>
-                </a:solidFill>
-              </a:defRPr>
-            </a:pPr>
-            <a:r>
-              <a:t>1.3 The Routing Rubric: When to Use Composer 2 vs. a Frontier Model</a:t>
-            </a:r>
-          </a:p>
-        </p:txBody>
-      </p:sp>
-      <p:sp>
-        <p:nvSpPr>
-          <p:cNvPr id="3" name="TextBox 2"/>
+            <a:pPr algn="l"/>
+            <a:r>
+              <a:rPr sz="2600" b="1">
+                <a:solidFill>
+                  <a:srgbClr val="18181B"/>
+                </a:solidFill>
+              </a:rPr>
+              <a:t>1.3  Routing Rubric — Escalate to Frontier Model When:</a:t>
+            </a:r>
+          </a:p>
+        </p:txBody>
+      </p:sp>
+      <p:sp>
+        <p:nvSpPr>
+          <p:cNvPr id="6" name="Rectangle 5"/>
+          <p:cNvSpPr/>
+          <p:nvPr/>
+        </p:nvSpPr>
+        <p:spPr>
+          <a:xfrm>
+            <a:off x="502920" y="804672"/>
+            <a:ext cx="11430000" cy="12700"/>
+          </a:xfrm>
+          <a:prstGeom prst="rect">
+            <a:avLst/>
+          </a:prstGeom>
+          <a:solidFill>
+            <a:srgbClr val="A1A1AA"/>
+          </a:solidFill>
+          <a:ln>
+            <a:noFill/>
+          </a:ln>
+        </p:spPr>
+        <p:style>
+          <a:lnRef idx="1">
+            <a:schemeClr val="accent1"/>
+          </a:lnRef>
+          <a:fillRef idx="3">
+            <a:schemeClr val="accent1"/>
+          </a:fillRef>
+          <a:effectRef idx="2">
+            <a:schemeClr val="accent1"/>
+          </a:effectRef>
+          <a:fontRef idx="minor">
+            <a:schemeClr val="lt1"/>
+          </a:fontRef>
+        </p:style>
+        <p:txBody>
+          <a:bodyPr rtlCol="0" anchor="ctr"/>
+          <a:lstStyle/>
+          <a:p>
+            <a:pPr algn="ctr"/>
+          </a:p>
+        </p:txBody>
+      </p:sp>
+      <p:sp>
+        <p:nvSpPr>
+          <p:cNvPr id="7" name="TextBox 6"/>
           <p:cNvSpPr txBox="1"/>
           <p:nvPr/>
         </p:nvSpPr>
         <p:spPr>
           <a:xfrm>
-            <a:off x="914400" y="1463040"/>
-            <a:ext cx="10241280" cy="4572000"/>
+            <a:off x="502920" y="960120"/>
+            <a:ext cx="11247120" cy="1005840"/>
           </a:xfrm>
           <a:prstGeom prst="rect">
             <a:avLst/>
@@ -4545,82 +8762,33 @@
           <a:noFill/>
         </p:spPr>
         <p:txBody>
-          <a:bodyPr wrap="none">
+          <a:bodyPr wrap="square">
             <a:spAutoFit/>
           </a:bodyPr>
           <a:lstStyle/>
           <a:p>
-            <a:pPr>
-              <a:defRPr sz="2000">
-                <a:solidFill>
-                  <a:srgbClr val="FFFFFF"/>
-                </a:solidFill>
-              </a:defRPr>
-            </a:pPr>
-            <a:r>
-              <a:t>• The strongest practical lesson from community usage threads is that **advanced teams do not pick one model and stick with it.** They rout...</a:t>
-            </a:r>
-          </a:p>
-          <a:p>
-            <a:pPr>
-              <a:defRPr sz="2000">
-                <a:solidFill>
-                  <a:srgbClr val="FFFFFF"/>
-                </a:solidFill>
-              </a:defRPr>
-            </a:pPr>
-            <a:r>
-              <a:t>• Here is the rubric that emerges from synthesizing real usage reports:</a:t>
-            </a:r>
-          </a:p>
-          <a:p>
-            <a:pPr>
-              <a:defRPr sz="2000">
-                <a:solidFill>
-                  <a:srgbClr val="FFFFFF"/>
-                </a:solidFill>
-              </a:defRPr>
-            </a:pPr>
-            <a:r>
-              <a:t>• Use Composer 2 for:</a:t>
-            </a:r>
-          </a:p>
-          <a:p>
-            <a:pPr>
-              <a:defRPr sz="2000">
-                <a:solidFill>
-                  <a:srgbClr val="FFFFFF"/>
-                </a:solidFill>
-              </a:defRPr>
-            </a:pPr>
-            <a:r>
-              <a:t>• **Short-to-medium iteration loops** — feature additions, bug fixes, refactor passes in code you own and understand</a:t>
-            </a:r>
-          </a:p>
-          <a:p>
-            <a:pPr>
-              <a:defRPr sz="2000">
-                <a:solidFill>
-                  <a:srgbClr val="FFFFFF"/>
-                </a:solidFill>
-              </a:defRPr>
-            </a:pPr>
-            <a:r>
-              <a:t>• **High-frequency experiments** — parallel attempts ("try three approaches, I'll pick the best"), throwaway prototypes</a:t>
-            </a:r>
-          </a:p>
-        </p:txBody>
-      </p:sp>
-      <p:sp>
-        <p:nvSpPr>
-          <p:cNvPr id="4" name="TextBox 3"/>
+            <a:pPr algn="l"/>
+            <a:r>
+              <a:rPr sz="1500">
+                <a:solidFill>
+                  <a:srgbClr val="18181B"/>
+                </a:solidFill>
+              </a:rPr>
+              <a:t>▸  Unfamiliar architecture: debugging third-party library internals you have never seen — when you cannot predict what the right answer looks like</a:t>
+            </a:r>
+          </a:p>
+        </p:txBody>
+      </p:sp>
+      <p:sp>
+        <p:nvSpPr>
+          <p:cNvPr id="8" name="TextBox 7"/>
           <p:cNvSpPr txBox="1"/>
           <p:nvPr/>
         </p:nvSpPr>
         <p:spPr>
           <a:xfrm>
-            <a:off x="457200" y="6309360"/>
-            <a:ext cx="11247120" cy="274320"/>
+            <a:off x="502920" y="1828800"/>
+            <a:ext cx="11247120" cy="1005840"/>
           </a:xfrm>
           <a:prstGeom prst="rect">
             <a:avLst/>
@@ -4628,20 +8796,155 @@
           <a:noFill/>
         </p:spPr>
         <p:txBody>
-          <a:bodyPr wrap="none">
+          <a:bodyPr wrap="square">
             <a:spAutoFit/>
           </a:bodyPr>
           <a:lstStyle/>
           <a:p>
-            <a:pPr>
-              <a:defRPr sz="1100">
+            <a:pPr algn="l"/>
+            <a:r>
+              <a:rPr sz="1500">
+                <a:solidFill>
+                  <a:srgbClr val="18181B"/>
+                </a:solidFill>
+              </a:rPr>
+              <a:t>▸  Brittle refactors: changing a core abstraction that 40+ files depend on, where the failure mode is subtle and a wrong answer may not be obviously wrong</a:t>
+            </a:r>
+          </a:p>
+        </p:txBody>
+      </p:sp>
+      <p:sp>
+        <p:nvSpPr>
+          <p:cNvPr id="9" name="TextBox 8"/>
+          <p:cNvSpPr txBox="1"/>
+          <p:nvPr/>
+        </p:nvSpPr>
+        <p:spPr>
+          <a:xfrm>
+            <a:off x="502920" y="2697480"/>
+            <a:ext cx="11247120" cy="1005840"/>
+          </a:xfrm>
+          <a:prstGeom prst="rect">
+            <a:avLst/>
+          </a:prstGeom>
+          <a:noFill/>
+        </p:spPr>
+        <p:txBody>
+          <a:bodyPr wrap="square">
+            <a:spAutoFit/>
+          </a:bodyPr>
+          <a:lstStyle/>
+          <a:p>
+            <a:pPr algn="l"/>
+            <a:r>
+              <a:rPr sz="1500">
+                <a:solidFill>
+                  <a:srgbClr val="18181B"/>
+                </a:solidFill>
+              </a:rPr>
+              <a:t>▸  Security-sensitive reasoning: auth flows, crypto implementations, permission model design — areas where silent failure risk is unacceptable</a:t>
+            </a:r>
+          </a:p>
+        </p:txBody>
+      </p:sp>
+      <p:sp>
+        <p:nvSpPr>
+          <p:cNvPr id="10" name="TextBox 9"/>
+          <p:cNvSpPr txBox="1"/>
+          <p:nvPr/>
+        </p:nvSpPr>
+        <p:spPr>
+          <a:xfrm>
+            <a:off x="502920" y="3566160"/>
+            <a:ext cx="11247120" cy="1005840"/>
+          </a:xfrm>
+          <a:prstGeom prst="rect">
+            <a:avLst/>
+          </a:prstGeom>
+          <a:noFill/>
+        </p:spPr>
+        <p:txBody>
+          <a:bodyPr wrap="square">
+            <a:spAutoFit/>
+          </a:bodyPr>
+          <a:lstStyle/>
+          <a:p>
+            <a:pPr algn="l"/>
+            <a:r>
+              <a:rPr sz="1500">
+                <a:solidFill>
+                  <a:srgbClr val="18181B"/>
+                </a:solidFill>
+              </a:rPr>
+              <a:t>▸  Complex cross-module debugging: tracing a bug that requires understanding state transitions across 5+ subsystems simultaneously</a:t>
+            </a:r>
+          </a:p>
+        </p:txBody>
+      </p:sp>
+      <p:sp>
+        <p:nvSpPr>
+          <p:cNvPr id="11" name="TextBox 10"/>
+          <p:cNvSpPr txBox="1"/>
+          <p:nvPr/>
+        </p:nvSpPr>
+        <p:spPr>
+          <a:xfrm>
+            <a:off x="502920" y="4434840"/>
+            <a:ext cx="11247120" cy="1005840"/>
+          </a:xfrm>
+          <a:prstGeom prst="rect">
+            <a:avLst/>
+          </a:prstGeom>
+          <a:noFill/>
+        </p:spPr>
+        <p:txBody>
+          <a:bodyPr wrap="square">
+            <a:spAutoFit/>
+          </a:bodyPr>
+          <a:lstStyle/>
+          <a:p>
+            <a:pPr algn="l"/>
+            <a:r>
+              <a:rPr sz="1500">
+                <a:solidFill>
+                  <a:srgbClr val="18181B"/>
+                </a:solidFill>
+              </a:rPr>
+              <a:t>▸  Key escalation signal: 'When I cannot predict what correct looks like, and a wrong answer might not look wrong' — build this rubric into your .cursorrules as an explicit escalation instruction</a:t>
+            </a:r>
+          </a:p>
+        </p:txBody>
+      </p:sp>
+      <p:sp>
+        <p:nvSpPr>
+          <p:cNvPr id="12" name="TextBox 11"/>
+          <p:cNvSpPr txBox="1"/>
+          <p:nvPr/>
+        </p:nvSpPr>
+        <p:spPr>
+          <a:xfrm>
+            <a:off x="457200" y="6510528"/>
+            <a:ext cx="10972800" cy="274320"/>
+          </a:xfrm>
+          <a:prstGeom prst="rect">
+            <a:avLst/>
+          </a:prstGeom>
+          <a:noFill/>
+        </p:spPr>
+        <p:txBody>
+          <a:bodyPr wrap="square">
+            <a:spAutoFit/>
+          </a:bodyPr>
+          <a:lstStyle/>
+          <a:p>
+            <a:pPr algn="l"/>
+            <a:r>
+              <a:rPr sz="900" b="0">
                 <a:solidFill>
                   <a:srgbClr val="A1A1AA"/>
                 </a:solidFill>
-              </a:defRPr>
-            </a:pPr>
-            <a:r>
-              <a:t>academy.kspl.tech | Koenig AI Academy</a:t>
+              </a:rPr>
+              <a:t>academy.kspl.tech  |  Koenig AI Academy</a:t>
             </a:r>
           </a:p>
         </p:txBody>
@@ -4657,14 +8960,6 @@
 <file path=ppt/slides/slide7.xml><?xml version="1.0" encoding="utf-8"?>
 <p:sld xmlns:a="http://schemas.openxmlformats.org/drawingml/2006/main" xmlns:p="http://schemas.openxmlformats.org/presentationml/2006/main" xmlns:r="http://schemas.openxmlformats.org/officeDocument/2006/relationships">
   <p:cSld>
-    <p:bg>
-      <p:bgPr>
-        <a:solidFill>
-          <a:srgbClr val="18181B"/>
-        </a:solidFill>
-        <a:effectLst/>
-      </p:bgPr>
-    </p:bg>
     <p:spTree>
       <p:nvGrpSpPr>
         <p:cNvPr id="1" name=""/>
@@ -4674,14 +8969,143 @@
       <p:grpSpPr/>
       <p:sp>
         <p:nvSpPr>
-          <p:cNvPr id="2" name="TextBox 1"/>
+          <p:cNvPr id="2" name="Rectangle 1"/>
+          <p:cNvSpPr/>
+          <p:nvPr/>
+        </p:nvSpPr>
+        <p:spPr>
+          <a:xfrm>
+            <a:off x="0" y="0"/>
+            <a:ext cx="12188952" cy="6858000"/>
+          </a:xfrm>
+          <a:prstGeom prst="rect">
+            <a:avLst/>
+          </a:prstGeom>
+          <a:solidFill>
+            <a:srgbClr val="F4F4F5"/>
+          </a:solidFill>
+          <a:ln>
+            <a:noFill/>
+          </a:ln>
+        </p:spPr>
+        <p:style>
+          <a:lnRef idx="1">
+            <a:schemeClr val="accent1"/>
+          </a:lnRef>
+          <a:fillRef idx="3">
+            <a:schemeClr val="accent1"/>
+          </a:fillRef>
+          <a:effectRef idx="2">
+            <a:schemeClr val="accent1"/>
+          </a:effectRef>
+          <a:fontRef idx="minor">
+            <a:schemeClr val="lt1"/>
+          </a:fontRef>
+        </p:style>
+        <p:txBody>
+          <a:bodyPr rtlCol="0" anchor="ctr"/>
+          <a:lstStyle/>
+          <a:p>
+            <a:pPr algn="ctr"/>
+          </a:p>
+        </p:txBody>
+      </p:sp>
+      <p:sp>
+        <p:nvSpPr>
+          <p:cNvPr id="3" name="Rectangle 2"/>
+          <p:cNvSpPr/>
+          <p:nvPr/>
+        </p:nvSpPr>
+        <p:spPr>
+          <a:xfrm>
+            <a:off x="0" y="0"/>
+            <a:ext cx="12188952" cy="54864"/>
+          </a:xfrm>
+          <a:prstGeom prst="rect">
+            <a:avLst/>
+          </a:prstGeom>
+          <a:solidFill>
+            <a:srgbClr val="6366F1"/>
+          </a:solidFill>
+          <a:ln>
+            <a:noFill/>
+          </a:ln>
+        </p:spPr>
+        <p:style>
+          <a:lnRef idx="1">
+            <a:schemeClr val="accent1"/>
+          </a:lnRef>
+          <a:fillRef idx="3">
+            <a:schemeClr val="accent1"/>
+          </a:fillRef>
+          <a:effectRef idx="2">
+            <a:schemeClr val="accent1"/>
+          </a:effectRef>
+          <a:fontRef idx="minor">
+            <a:schemeClr val="lt1"/>
+          </a:fontRef>
+        </p:style>
+        <p:txBody>
+          <a:bodyPr rtlCol="0" anchor="ctr"/>
+          <a:lstStyle/>
+          <a:p>
+            <a:pPr algn="ctr"/>
+          </a:p>
+        </p:txBody>
+      </p:sp>
+      <p:sp>
+        <p:nvSpPr>
+          <p:cNvPr id="4" name="Rectangle 3"/>
+          <p:cNvSpPr/>
+          <p:nvPr/>
+        </p:nvSpPr>
+        <p:spPr>
+          <a:xfrm>
+            <a:off x="0" y="54864"/>
+            <a:ext cx="228600" cy="6803136"/>
+          </a:xfrm>
+          <a:prstGeom prst="rect">
+            <a:avLst/>
+          </a:prstGeom>
+          <a:solidFill>
+            <a:srgbClr val="6366F1"/>
+          </a:solidFill>
+          <a:ln>
+            <a:noFill/>
+          </a:ln>
+        </p:spPr>
+        <p:style>
+          <a:lnRef idx="1">
+            <a:schemeClr val="accent1"/>
+          </a:lnRef>
+          <a:fillRef idx="3">
+            <a:schemeClr val="accent1"/>
+          </a:fillRef>
+          <a:effectRef idx="2">
+            <a:schemeClr val="accent1"/>
+          </a:effectRef>
+          <a:fontRef idx="minor">
+            <a:schemeClr val="lt1"/>
+          </a:fontRef>
+        </p:style>
+        <p:txBody>
+          <a:bodyPr rtlCol="0" anchor="ctr"/>
+          <a:lstStyle/>
+          <a:p>
+            <a:pPr algn="ctr"/>
+          </a:p>
+        </p:txBody>
+      </p:sp>
+      <p:sp>
+        <p:nvSpPr>
+          <p:cNvPr id="5" name="TextBox 4"/>
           <p:cNvSpPr txBox="1"/>
           <p:nvPr/>
         </p:nvSpPr>
         <p:spPr>
           <a:xfrm>
-            <a:off x="731520" y="548640"/>
-            <a:ext cx="10789920" cy="731520"/>
+            <a:off x="502920" y="164592"/>
+            <a:ext cx="11430000" cy="594360"/>
           </a:xfrm>
           <a:prstGeom prst="rect">
             <a:avLst/>
@@ -4689,34 +9113,76 @@
           <a:noFill/>
         </p:spPr>
         <p:txBody>
-          <a:bodyPr wrap="none">
+          <a:bodyPr wrap="square">
             <a:spAutoFit/>
           </a:bodyPr>
           <a:lstStyle/>
           <a:p>
-            <a:pPr>
-              <a:defRPr sz="3000" b="1">
-                <a:solidFill>
-                  <a:srgbClr val="FFFFFF"/>
-                </a:solidFill>
-              </a:defRPr>
-            </a:pPr>
-            <a:r>
-              <a:t>1.3 The Routing Rubric: When to Use Composer 2 vs. a Frontier Model (continued)</a:t>
-            </a:r>
-          </a:p>
-        </p:txBody>
-      </p:sp>
-      <p:sp>
-        <p:nvSpPr>
-          <p:cNvPr id="3" name="TextBox 2"/>
+            <a:pPr algn="l"/>
+            <a:r>
+              <a:rPr sz="2600" b="1">
+                <a:solidFill>
+                  <a:srgbClr val="18181B"/>
+                </a:solidFill>
+              </a:rPr>
+              <a:t>1.4  Auto Routing vs. Manual Model Pinning</a:t>
+            </a:r>
+          </a:p>
+        </p:txBody>
+      </p:sp>
+      <p:sp>
+        <p:nvSpPr>
+          <p:cNvPr id="6" name="Rectangle 5"/>
+          <p:cNvSpPr/>
+          <p:nvPr/>
+        </p:nvSpPr>
+        <p:spPr>
+          <a:xfrm>
+            <a:off x="502920" y="804672"/>
+            <a:ext cx="11430000" cy="12700"/>
+          </a:xfrm>
+          <a:prstGeom prst="rect">
+            <a:avLst/>
+          </a:prstGeom>
+          <a:solidFill>
+            <a:srgbClr val="A1A1AA"/>
+          </a:solidFill>
+          <a:ln>
+            <a:noFill/>
+          </a:ln>
+        </p:spPr>
+        <p:style>
+          <a:lnRef idx="1">
+            <a:schemeClr val="accent1"/>
+          </a:lnRef>
+          <a:fillRef idx="3">
+            <a:schemeClr val="accent1"/>
+          </a:fillRef>
+          <a:effectRef idx="2">
+            <a:schemeClr val="accent1"/>
+          </a:effectRef>
+          <a:fontRef idx="minor">
+            <a:schemeClr val="lt1"/>
+          </a:fontRef>
+        </p:style>
+        <p:txBody>
+          <a:bodyPr rtlCol="0" anchor="ctr"/>
+          <a:lstStyle/>
+          <a:p>
+            <a:pPr algn="ctr"/>
+          </a:p>
+        </p:txBody>
+      </p:sp>
+      <p:sp>
+        <p:nvSpPr>
+          <p:cNvPr id="7" name="TextBox 6"/>
           <p:cNvSpPr txBox="1"/>
           <p:nvPr/>
         </p:nvSpPr>
         <p:spPr>
           <a:xfrm>
-            <a:off x="914400" y="1463040"/>
-            <a:ext cx="10241280" cy="4572000"/>
+            <a:off x="502920" y="960120"/>
+            <a:ext cx="11247120" cy="1005840"/>
           </a:xfrm>
           <a:prstGeom prst="rect">
             <a:avLst/>
@@ -4724,82 +9190,33 @@
           <a:noFill/>
         </p:spPr>
         <p:txBody>
-          <a:bodyPr wrap="none">
+          <a:bodyPr wrap="square">
             <a:spAutoFit/>
           </a:bodyPr>
           <a:lstStyle/>
           <a:p>
-            <a:pPr>
-              <a:defRPr sz="2000">
-                <a:solidFill>
-                  <a:srgbClr val="FFFFFF"/>
-                </a:solidFill>
-              </a:defRPr>
-            </a:pPr>
-            <a:r>
-              <a:t>• **Routine generation tasks** — CRUD endpoints, test cases, migration scripts for known schemas</a:t>
-            </a:r>
-          </a:p>
-          <a:p>
-            <a:pPr>
-              <a:defRPr sz="2000">
-                <a:solidFill>
-                  <a:srgbClr val="FFFFFF"/>
-                </a:solidFill>
-              </a:defRPr>
-            </a:pPr>
-            <a:r>
-              <a:t>• **IDE-integrated edits** — diff-reviewed changes where you are inspecting every hunk before accepting</a:t>
-            </a:r>
-          </a:p>
-          <a:p>
-            <a:pPr>
-              <a:defRPr sz="2000">
-                <a:solidFill>
-                  <a:srgbClr val="FFFFFF"/>
-                </a:solidFill>
-              </a:defRPr>
-            </a:pPr>
-            <a:r>
-              <a:t>• Escalate to a frontier reasoning model (Opus 4.7, GPT-5.4) for:</a:t>
-            </a:r>
-          </a:p>
-          <a:p>
-            <a:pPr>
-              <a:defRPr sz="2000">
-                <a:solidFill>
-                  <a:srgbClr val="FFFFFF"/>
-                </a:solidFill>
-              </a:defRPr>
-            </a:pPr>
-            <a:r>
-              <a:t>• **Unfamiliar architecture** — debugging a third-party library internals you've never seen</a:t>
-            </a:r>
-          </a:p>
-          <a:p>
-            <a:pPr>
-              <a:defRPr sz="2000">
-                <a:solidFill>
-                  <a:srgbClr val="FFFFFF"/>
-                </a:solidFill>
-              </a:defRPr>
-            </a:pPr>
-            <a:r>
-              <a:t>• **Brittle refactors** — changing a core abstraction that 40 files depend on and where failure mode is subtle</a:t>
-            </a:r>
-          </a:p>
-        </p:txBody>
-      </p:sp>
-      <p:sp>
-        <p:nvSpPr>
-          <p:cNvPr id="4" name="TextBox 3"/>
+            <a:pPr algn="l"/>
+            <a:r>
+              <a:rPr sz="1500">
+                <a:solidFill>
+                  <a:srgbClr val="18181B"/>
+                </a:solidFill>
+              </a:rPr>
+              <a:t>▸  Auto model selection delegates to Cursor's internal logic based on task type and context size — reasonable default for everyday edits and short sessions</a:t>
+            </a:r>
+          </a:p>
+        </p:txBody>
+      </p:sp>
+      <p:sp>
+        <p:nvSpPr>
+          <p:cNvPr id="8" name="TextBox 7"/>
           <p:cNvSpPr txBox="1"/>
           <p:nvPr/>
         </p:nvSpPr>
         <p:spPr>
           <a:xfrm>
-            <a:off x="457200" y="6309360"/>
-            <a:ext cx="11247120" cy="274320"/>
+            <a:off x="502920" y="1828800"/>
+            <a:ext cx="11247120" cy="1005840"/>
           </a:xfrm>
           <a:prstGeom prst="rect">
             <a:avLst/>
@@ -4807,20 +9224,155 @@
           <a:noFill/>
         </p:spPr>
         <p:txBody>
-          <a:bodyPr wrap="none">
+          <a:bodyPr wrap="square">
             <a:spAutoFit/>
           </a:bodyPr>
           <a:lstStyle/>
           <a:p>
-            <a:pPr>
-              <a:defRPr sz="1100">
+            <a:pPr algn="l"/>
+            <a:r>
+              <a:rPr sz="1500">
+                <a:solidFill>
+                  <a:srgbClr val="18181B"/>
+                </a:solidFill>
+              </a:rPr>
+              <a:t>▸  Pin manually for: any session running more than 10–15 turns (cost governance), parallel agent loops needing consistent behavior for comparison, and onboarding demos requiring reproducible output</a:t>
+            </a:r>
+          </a:p>
+        </p:txBody>
+      </p:sp>
+      <p:sp>
+        <p:nvSpPr>
+          <p:cNvPr id="9" name="TextBox 8"/>
+          <p:cNvSpPr txBox="1"/>
+          <p:nvPr/>
+        </p:nvSpPr>
+        <p:spPr>
+          <a:xfrm>
+            <a:off x="502920" y="2697480"/>
+            <a:ext cx="11247120" cy="1005840"/>
+          </a:xfrm>
+          <a:prstGeom prst="rect">
+            <a:avLst/>
+          </a:prstGeom>
+          <a:noFill/>
+        </p:spPr>
+        <p:txBody>
+          <a:bodyPr wrap="square">
+            <a:spAutoFit/>
+          </a:bodyPr>
+          <a:lstStyle/>
+          <a:p>
+            <a:pPr algn="l"/>
+            <a:r>
+              <a:rPr sz="1500">
+                <a:solidFill>
+                  <a:srgbClr val="18181B"/>
+                </a:solidFill>
+              </a:rPr>
+              <a:t>▸  Pin manually for regulated environments: model selection must be auditable; Auto routing optimizes for Cursor's metrics, not yours</a:t>
+            </a:r>
+          </a:p>
+        </p:txBody>
+      </p:sp>
+      <p:sp>
+        <p:nvSpPr>
+          <p:cNvPr id="10" name="TextBox 9"/>
+          <p:cNvSpPr txBox="1"/>
+          <p:nvPr/>
+        </p:nvSpPr>
+        <p:spPr>
+          <a:xfrm>
+            <a:off x="502920" y="3566160"/>
+            <a:ext cx="11247120" cy="1005840"/>
+          </a:xfrm>
+          <a:prstGeom prst="rect">
+            <a:avLst/>
+          </a:prstGeom>
+          <a:noFill/>
+        </p:spPr>
+        <p:txBody>
+          <a:bodyPr wrap="square">
+            <a:spAutoFit/>
+          </a:bodyPr>
+          <a:lstStyle/>
+          <a:p>
+            <a:pPr algn="l"/>
+            <a:r>
+              <a:rPr sz="1500">
+                <a:solidFill>
+                  <a:srgbClr val="18181B"/>
+                </a:solidFill>
+              </a:rPr>
+              <a:t>▸  To pin in Cursor 0.44: open Composer panel → model dropdown (top-right of input) → select cursor-composer-2 → verify persistence in Settings → AI → Default Model</a:t>
+            </a:r>
+          </a:p>
+        </p:txBody>
+      </p:sp>
+      <p:sp>
+        <p:nvSpPr>
+          <p:cNvPr id="11" name="TextBox 10"/>
+          <p:cNvSpPr txBox="1"/>
+          <p:nvPr/>
+        </p:nvSpPr>
+        <p:spPr>
+          <a:xfrm>
+            <a:off x="502920" y="4434840"/>
+            <a:ext cx="11247120" cy="1005840"/>
+          </a:xfrm>
+          <a:prstGeom prst="rect">
+            <a:avLst/>
+          </a:prstGeom>
+          <a:noFill/>
+        </p:spPr>
+        <p:txBody>
+          <a:bodyPr wrap="square">
+            <a:spAutoFit/>
+          </a:bodyPr>
+          <a:lstStyle/>
+          <a:p>
+            <a:pPr algn="l"/>
+            <a:r>
+              <a:rPr sz="1500">
+                <a:solidFill>
+                  <a:srgbClr val="18181B"/>
+                </a:solidFill>
+              </a:rPr>
+              <a:t>▸  Auto routing anti-pattern: using Auto for production-critical sessions or security-sensitive work where model identity must be known and stable</a:t>
+            </a:r>
+          </a:p>
+        </p:txBody>
+      </p:sp>
+      <p:sp>
+        <p:nvSpPr>
+          <p:cNvPr id="12" name="TextBox 11"/>
+          <p:cNvSpPr txBox="1"/>
+          <p:nvPr/>
+        </p:nvSpPr>
+        <p:spPr>
+          <a:xfrm>
+            <a:off x="457200" y="6510528"/>
+            <a:ext cx="10972800" cy="274320"/>
+          </a:xfrm>
+          <a:prstGeom prst="rect">
+            <a:avLst/>
+          </a:prstGeom>
+          <a:noFill/>
+        </p:spPr>
+        <p:txBody>
+          <a:bodyPr wrap="square">
+            <a:spAutoFit/>
+          </a:bodyPr>
+          <a:lstStyle/>
+          <a:p>
+            <a:pPr algn="l"/>
+            <a:r>
+              <a:rPr sz="900" b="0">
                 <a:solidFill>
                   <a:srgbClr val="A1A1AA"/>
                 </a:solidFill>
-              </a:defRPr>
-            </a:pPr>
-            <a:r>
-              <a:t>academy.kspl.tech | Koenig AI Academy</a:t>
+              </a:rPr>
+              <a:t>academy.kspl.tech  |  Koenig AI Academy</a:t>
             </a:r>
           </a:p>
         </p:txBody>
@@ -4836,14 +9388,6 @@
 <file path=ppt/slides/slide8.xml><?xml version="1.0" encoding="utf-8"?>
 <p:sld xmlns:a="http://schemas.openxmlformats.org/drawingml/2006/main" xmlns:p="http://schemas.openxmlformats.org/presentationml/2006/main" xmlns:r="http://schemas.openxmlformats.org/officeDocument/2006/relationships">
   <p:cSld>
-    <p:bg>
-      <p:bgPr>
-        <a:solidFill>
-          <a:srgbClr val="18181B"/>
-        </a:solidFill>
-        <a:effectLst/>
-      </p:bgPr>
-    </p:bg>
     <p:spTree>
       <p:nvGrpSpPr>
         <p:cNvPr id="1" name=""/>
@@ -4853,14 +9397,143 @@
       <p:grpSpPr/>
       <p:sp>
         <p:nvSpPr>
-          <p:cNvPr id="2" name="TextBox 1"/>
+          <p:cNvPr id="2" name="Rectangle 1"/>
+          <p:cNvSpPr/>
+          <p:nvPr/>
+        </p:nvSpPr>
+        <p:spPr>
+          <a:xfrm>
+            <a:off x="0" y="0"/>
+            <a:ext cx="12188952" cy="6858000"/>
+          </a:xfrm>
+          <a:prstGeom prst="rect">
+            <a:avLst/>
+          </a:prstGeom>
+          <a:solidFill>
+            <a:srgbClr val="F4F4F5"/>
+          </a:solidFill>
+          <a:ln>
+            <a:noFill/>
+          </a:ln>
+        </p:spPr>
+        <p:style>
+          <a:lnRef idx="1">
+            <a:schemeClr val="accent1"/>
+          </a:lnRef>
+          <a:fillRef idx="3">
+            <a:schemeClr val="accent1"/>
+          </a:fillRef>
+          <a:effectRef idx="2">
+            <a:schemeClr val="accent1"/>
+          </a:effectRef>
+          <a:fontRef idx="minor">
+            <a:schemeClr val="lt1"/>
+          </a:fontRef>
+        </p:style>
+        <p:txBody>
+          <a:bodyPr rtlCol="0" anchor="ctr"/>
+          <a:lstStyle/>
+          <a:p>
+            <a:pPr algn="ctr"/>
+          </a:p>
+        </p:txBody>
+      </p:sp>
+      <p:sp>
+        <p:nvSpPr>
+          <p:cNvPr id="3" name="Rectangle 2"/>
+          <p:cNvSpPr/>
+          <p:nvPr/>
+        </p:nvSpPr>
+        <p:spPr>
+          <a:xfrm>
+            <a:off x="0" y="0"/>
+            <a:ext cx="12188952" cy="54864"/>
+          </a:xfrm>
+          <a:prstGeom prst="rect">
+            <a:avLst/>
+          </a:prstGeom>
+          <a:solidFill>
+            <a:srgbClr val="6366F1"/>
+          </a:solidFill>
+          <a:ln>
+            <a:noFill/>
+          </a:ln>
+        </p:spPr>
+        <p:style>
+          <a:lnRef idx="1">
+            <a:schemeClr val="accent1"/>
+          </a:lnRef>
+          <a:fillRef idx="3">
+            <a:schemeClr val="accent1"/>
+          </a:fillRef>
+          <a:effectRef idx="2">
+            <a:schemeClr val="accent1"/>
+          </a:effectRef>
+          <a:fontRef idx="minor">
+            <a:schemeClr val="lt1"/>
+          </a:fontRef>
+        </p:style>
+        <p:txBody>
+          <a:bodyPr rtlCol="0" anchor="ctr"/>
+          <a:lstStyle/>
+          <a:p>
+            <a:pPr algn="ctr"/>
+          </a:p>
+        </p:txBody>
+      </p:sp>
+      <p:sp>
+        <p:nvSpPr>
+          <p:cNvPr id="4" name="Rectangle 3"/>
+          <p:cNvSpPr/>
+          <p:nvPr/>
+        </p:nvSpPr>
+        <p:spPr>
+          <a:xfrm>
+            <a:off x="0" y="54864"/>
+            <a:ext cx="228600" cy="6803136"/>
+          </a:xfrm>
+          <a:prstGeom prst="rect">
+            <a:avLst/>
+          </a:prstGeom>
+          <a:solidFill>
+            <a:srgbClr val="6366F1"/>
+          </a:solidFill>
+          <a:ln>
+            <a:noFill/>
+          </a:ln>
+        </p:spPr>
+        <p:style>
+          <a:lnRef idx="1">
+            <a:schemeClr val="accent1"/>
+          </a:lnRef>
+          <a:fillRef idx="3">
+            <a:schemeClr val="accent1"/>
+          </a:fillRef>
+          <a:effectRef idx="2">
+            <a:schemeClr val="accent1"/>
+          </a:effectRef>
+          <a:fontRef idx="minor">
+            <a:schemeClr val="lt1"/>
+          </a:fontRef>
+        </p:style>
+        <p:txBody>
+          <a:bodyPr rtlCol="0" anchor="ctr"/>
+          <a:lstStyle/>
+          <a:p>
+            <a:pPr algn="ctr"/>
+          </a:p>
+        </p:txBody>
+      </p:sp>
+      <p:sp>
+        <p:nvSpPr>
+          <p:cNvPr id="5" name="TextBox 4"/>
           <p:cNvSpPr txBox="1"/>
           <p:nvPr/>
         </p:nvSpPr>
         <p:spPr>
           <a:xfrm>
-            <a:off x="731520" y="548640"/>
-            <a:ext cx="10789920" cy="731520"/>
+            <a:off x="502920" y="164592"/>
+            <a:ext cx="11430000" cy="594360"/>
           </a:xfrm>
           <a:prstGeom prst="rect">
             <a:avLst/>
@@ -4868,34 +9541,76 @@
           <a:noFill/>
         </p:spPr>
         <p:txBody>
-          <a:bodyPr wrap="none">
+          <a:bodyPr wrap="square">
             <a:spAutoFit/>
           </a:bodyPr>
           <a:lstStyle/>
           <a:p>
-            <a:pPr>
-              <a:defRPr sz="3000" b="1">
-                <a:solidFill>
-                  <a:srgbClr val="FFFFFF"/>
-                </a:solidFill>
-              </a:defRPr>
-            </a:pPr>
-            <a:r>
-              <a:t>1.4 Auto Routing vs. Manual Model Pinning</a:t>
-            </a:r>
-          </a:p>
-        </p:txBody>
-      </p:sp>
-      <p:sp>
-        <p:nvSpPr>
-          <p:cNvPr id="3" name="TextBox 2"/>
+            <a:pPr algn="l"/>
+            <a:r>
+              <a:rPr sz="2600" b="1">
+                <a:solidFill>
+                  <a:srgbClr val="18181B"/>
+                </a:solidFill>
+              </a:rPr>
+              <a:t>1.5  Setting Up the IDE Environment</a:t>
+            </a:r>
+          </a:p>
+        </p:txBody>
+      </p:sp>
+      <p:sp>
+        <p:nvSpPr>
+          <p:cNvPr id="6" name="Rectangle 5"/>
+          <p:cNvSpPr/>
+          <p:nvPr/>
+        </p:nvSpPr>
+        <p:spPr>
+          <a:xfrm>
+            <a:off x="502920" y="804672"/>
+            <a:ext cx="11430000" cy="12700"/>
+          </a:xfrm>
+          <a:prstGeom prst="rect">
+            <a:avLst/>
+          </a:prstGeom>
+          <a:solidFill>
+            <a:srgbClr val="A1A1AA"/>
+          </a:solidFill>
+          <a:ln>
+            <a:noFill/>
+          </a:ln>
+        </p:spPr>
+        <p:style>
+          <a:lnRef idx="1">
+            <a:schemeClr val="accent1"/>
+          </a:lnRef>
+          <a:fillRef idx="3">
+            <a:schemeClr val="accent1"/>
+          </a:fillRef>
+          <a:effectRef idx="2">
+            <a:schemeClr val="accent1"/>
+          </a:effectRef>
+          <a:fontRef idx="minor">
+            <a:schemeClr val="lt1"/>
+          </a:fontRef>
+        </p:style>
+        <p:txBody>
+          <a:bodyPr rtlCol="0" anchor="ctr"/>
+          <a:lstStyle/>
+          <a:p>
+            <a:pPr algn="ctr"/>
+          </a:p>
+        </p:txBody>
+      </p:sp>
+      <p:sp>
+        <p:nvSpPr>
+          <p:cNvPr id="7" name="TextBox 6"/>
           <p:cNvSpPr txBox="1"/>
           <p:nvPr/>
         </p:nvSpPr>
         <p:spPr>
           <a:xfrm>
-            <a:off x="914400" y="1463040"/>
-            <a:ext cx="10241280" cy="4572000"/>
+            <a:off x="502920" y="960120"/>
+            <a:ext cx="11247120" cy="1005840"/>
           </a:xfrm>
           <a:prstGeom prst="rect">
             <a:avLst/>
@@ -4903,82 +9618,33 @@
           <a:noFill/>
         </p:spPr>
         <p:txBody>
-          <a:bodyPr wrap="none">
+          <a:bodyPr wrap="square">
             <a:spAutoFit/>
           </a:bodyPr>
           <a:lstStyle/>
           <a:p>
-            <a:pPr>
-              <a:defRPr sz="2000">
-                <a:solidFill>
-                  <a:srgbClr val="FFFFFF"/>
-                </a:solidFill>
-              </a:defRPr>
-            </a:pPr>
-            <a:r>
-              <a:t>• Cursor's Auto model selection routes between available models based on task context. For new users, it is convenient. For production AI e...</a:t>
-            </a:r>
-          </a:p>
-          <a:p>
-            <a:pPr>
-              <a:defRPr sz="2000">
-                <a:solidFill>
-                  <a:srgbClr val="FFFFFF"/>
-                </a:solidFill>
-              </a:defRPr>
-            </a:pPr>
-            <a:r>
-              <a:t>• **When to trust Auto:**</a:t>
-            </a:r>
-          </a:p>
-          <a:p>
-            <a:pPr>
-              <a:defRPr sz="2000">
-                <a:solidFill>
-                  <a:srgbClr val="FFFFFF"/>
-                </a:solidFill>
-              </a:defRPr>
-            </a:pPr>
-            <a:r>
-              <a:t>• Exploratory sessions where you haven't scoped the task</a:t>
-            </a:r>
-          </a:p>
-          <a:p>
-            <a:pPr>
-              <a:defRPr sz="2000">
-                <a:solidFill>
-                  <a:srgbClr val="FFFFFF"/>
-                </a:solidFill>
-              </a:defRPr>
-            </a:pPr>
-            <a:r>
-              <a:t>• Short one-off questions where cost doesn't matter</a:t>
-            </a:r>
-          </a:p>
-          <a:p>
-            <a:pPr>
-              <a:defRPr sz="2000">
-                <a:solidFill>
-                  <a:srgbClr val="FFFFFF"/>
-                </a:solidFill>
-              </a:defRPr>
-            </a:pPr>
-            <a:r>
-              <a:t>• When you don't yet have a routing rubric and want to observe which model Cursor selects</a:t>
-            </a:r>
-          </a:p>
-        </p:txBody>
-      </p:sp>
-      <p:sp>
-        <p:nvSpPr>
-          <p:cNvPr id="4" name="TextBox 3"/>
+            <a:pPr algn="l"/>
+            <a:r>
+              <a:rPr sz="1500">
+                <a:solidFill>
+                  <a:srgbClr val="18181B"/>
+                </a:solidFill>
+              </a:rPr>
+              <a:t>▸  Open the repository root (not a subdirectory): Composer uses the workspace root to discover .cursorrules and scope context-window crawls — opening a subdirectory silently breaks rule loading</a:t>
+            </a:r>
+          </a:p>
+        </p:txBody>
+      </p:sp>
+      <p:sp>
+        <p:nvSpPr>
+          <p:cNvPr id="8" name="TextBox 7"/>
           <p:cNvSpPr txBox="1"/>
           <p:nvPr/>
         </p:nvSpPr>
         <p:spPr>
           <a:xfrm>
-            <a:off x="457200" y="6309360"/>
-            <a:ext cx="11247120" cy="274320"/>
+            <a:off x="502920" y="1828800"/>
+            <a:ext cx="11247120" cy="1005840"/>
           </a:xfrm>
           <a:prstGeom prst="rect">
             <a:avLst/>
@@ -4986,20 +9652,155 @@
           <a:noFill/>
         </p:spPr>
         <p:txBody>
-          <a:bodyPr wrap="none">
+          <a:bodyPr wrap="square">
             <a:spAutoFit/>
           </a:bodyPr>
           <a:lstStyle/>
           <a:p>
-            <a:pPr>
-              <a:defRPr sz="1100">
+            <a:pPr algn="l"/>
+            <a:r>
+              <a:rPr sz="1500">
+                <a:solidFill>
+                  <a:srgbClr val="18181B"/>
+                </a:solidFill>
+              </a:rPr>
+              <a:t>▸  Enable inline diff mode (Settings → Editor → Diff: Inline Mode as of Cursor 0.44): makes AI-generated changes visibly separate from your code, reducing accidental acceptance of unwanted edits</a:t>
+            </a:r>
+          </a:p>
+        </p:txBody>
+      </p:sp>
+      <p:sp>
+        <p:nvSpPr>
+          <p:cNvPr id="9" name="TextBox 8"/>
+          <p:cNvSpPr txBox="1"/>
+          <p:nvPr/>
+        </p:nvSpPr>
+        <p:spPr>
+          <a:xfrm>
+            <a:off x="502920" y="2697480"/>
+            <a:ext cx="11247120" cy="1005840"/>
+          </a:xfrm>
+          <a:prstGeom prst="rect">
+            <a:avLst/>
+          </a:prstGeom>
+          <a:noFill/>
+        </p:spPr>
+        <p:txBody>
+          <a:bodyPr wrap="square">
+            <a:spAutoFit/>
+          </a:bodyPr>
+          <a:lstStyle/>
+          <a:p>
+            <a:pPr algn="l"/>
+            <a:r>
+              <a:rPr sz="1500">
+                <a:solidFill>
+                  <a:srgbClr val="18181B"/>
+                </a:solidFill>
+              </a:rPr>
+              <a:t>▸  Use @file references explicitly rather than relying on open tabs being in context: Cursor includes open buffers in context — 20 open tabs is 20 files of noise</a:t>
+            </a:r>
+          </a:p>
+        </p:txBody>
+      </p:sp>
+      <p:sp>
+        <p:nvSpPr>
+          <p:cNvPr id="10" name="TextBox 9"/>
+          <p:cNvSpPr txBox="1"/>
+          <p:nvPr/>
+        </p:nvSpPr>
+        <p:spPr>
+          <a:xfrm>
+            <a:off x="502920" y="3566160"/>
+            <a:ext cx="11247120" cy="1005840"/>
+          </a:xfrm>
+          <a:prstGeom prst="rect">
+            <a:avLst/>
+          </a:prstGeom>
+          <a:noFill/>
+        </p:spPr>
+        <p:txBody>
+          <a:bodyPr wrap="square">
+            <a:spAutoFit/>
+          </a:bodyPr>
+          <a:lstStyle/>
+          <a:p>
+            <a:pPr algn="l"/>
+            <a:r>
+              <a:rPr sz="1500">
+                <a:solidFill>
+                  <a:srgbClr val="18181B"/>
+                </a:solidFill>
+              </a:rPr>
+              <a:t>▸  Close files you are not actively editing: open buffers consume context window capacity; a disciplined tab hygiene habit is worth more than prompt engineering</a:t>
+            </a:r>
+          </a:p>
+        </p:txBody>
+      </p:sp>
+      <p:sp>
+        <p:nvSpPr>
+          <p:cNvPr id="11" name="TextBox 10"/>
+          <p:cNvSpPr txBox="1"/>
+          <p:nvPr/>
+        </p:nvSpPr>
+        <p:spPr>
+          <a:xfrm>
+            <a:off x="502920" y="4434840"/>
+            <a:ext cx="11247120" cy="1005840"/>
+          </a:xfrm>
+          <a:prstGeom prst="rect">
+            <a:avLst/>
+          </a:prstGeom>
+          <a:noFill/>
+        </p:spPr>
+        <p:txBody>
+          <a:bodyPr wrap="square">
+            <a:spAutoFit/>
+          </a:bodyPr>
+          <a:lstStyle/>
+          <a:p>
+            <a:pPr algn="l"/>
+            <a:r>
+              <a:rPr sz="1500">
+                <a:solidFill>
+                  <a:srgbClr val="18181B"/>
+                </a:solidFill>
+              </a:rPr>
+              <a:t>▸  Start a new Composer session per discrete task: sessions accumulate context pollution; one new session per task is cheaper and more reliable than one mega-session per day</a:t>
+            </a:r>
+          </a:p>
+        </p:txBody>
+      </p:sp>
+      <p:sp>
+        <p:nvSpPr>
+          <p:cNvPr id="12" name="TextBox 11"/>
+          <p:cNvSpPr txBox="1"/>
+          <p:nvPr/>
+        </p:nvSpPr>
+        <p:spPr>
+          <a:xfrm>
+            <a:off x="457200" y="6510528"/>
+            <a:ext cx="10972800" cy="274320"/>
+          </a:xfrm>
+          <a:prstGeom prst="rect">
+            <a:avLst/>
+          </a:prstGeom>
+          <a:noFill/>
+        </p:spPr>
+        <p:txBody>
+          <a:bodyPr wrap="square">
+            <a:spAutoFit/>
+          </a:bodyPr>
+          <a:lstStyle/>
+          <a:p>
+            <a:pPr algn="l"/>
+            <a:r>
+              <a:rPr sz="900" b="0">
                 <a:solidFill>
                   <a:srgbClr val="A1A1AA"/>
                 </a:solidFill>
-              </a:defRPr>
-            </a:pPr>
-            <a:r>
-              <a:t>academy.kspl.tech | Koenig AI Academy</a:t>
+              </a:rPr>
+              <a:t>academy.kspl.tech  |  Koenig AI Academy</a:t>
             </a:r>
           </a:p>
         </p:txBody>
@@ -5015,14 +9816,6 @@
 <file path=ppt/slides/slide9.xml><?xml version="1.0" encoding="utf-8"?>
 <p:sld xmlns:a="http://schemas.openxmlformats.org/drawingml/2006/main" xmlns:p="http://schemas.openxmlformats.org/presentationml/2006/main" xmlns:r="http://schemas.openxmlformats.org/officeDocument/2006/relationships">
   <p:cSld>
-    <p:bg>
-      <p:bgPr>
-        <a:solidFill>
-          <a:srgbClr val="18181B"/>
-        </a:solidFill>
-        <a:effectLst/>
-      </p:bgPr>
-    </p:bg>
     <p:spTree>
       <p:nvGrpSpPr>
         <p:cNvPr id="1" name=""/>
@@ -5032,14 +9825,143 @@
       <p:grpSpPr/>
       <p:sp>
         <p:nvSpPr>
-          <p:cNvPr id="2" name="TextBox 1"/>
+          <p:cNvPr id="2" name="Rectangle 1"/>
+          <p:cNvSpPr/>
+          <p:nvPr/>
+        </p:nvSpPr>
+        <p:spPr>
+          <a:xfrm>
+            <a:off x="0" y="0"/>
+            <a:ext cx="12188952" cy="6858000"/>
+          </a:xfrm>
+          <a:prstGeom prst="rect">
+            <a:avLst/>
+          </a:prstGeom>
+          <a:solidFill>
+            <a:srgbClr val="F4F4F5"/>
+          </a:solidFill>
+          <a:ln>
+            <a:noFill/>
+          </a:ln>
+        </p:spPr>
+        <p:style>
+          <a:lnRef idx="1">
+            <a:schemeClr val="accent1"/>
+          </a:lnRef>
+          <a:fillRef idx="3">
+            <a:schemeClr val="accent1"/>
+          </a:fillRef>
+          <a:effectRef idx="2">
+            <a:schemeClr val="accent1"/>
+          </a:effectRef>
+          <a:fontRef idx="minor">
+            <a:schemeClr val="lt1"/>
+          </a:fontRef>
+        </p:style>
+        <p:txBody>
+          <a:bodyPr rtlCol="0" anchor="ctr"/>
+          <a:lstStyle/>
+          <a:p>
+            <a:pPr algn="ctr"/>
+          </a:p>
+        </p:txBody>
+      </p:sp>
+      <p:sp>
+        <p:nvSpPr>
+          <p:cNvPr id="3" name="Rectangle 2"/>
+          <p:cNvSpPr/>
+          <p:nvPr/>
+        </p:nvSpPr>
+        <p:spPr>
+          <a:xfrm>
+            <a:off x="0" y="0"/>
+            <a:ext cx="12188952" cy="54864"/>
+          </a:xfrm>
+          <a:prstGeom prst="rect">
+            <a:avLst/>
+          </a:prstGeom>
+          <a:solidFill>
+            <a:srgbClr val="6366F1"/>
+          </a:solidFill>
+          <a:ln>
+            <a:noFill/>
+          </a:ln>
+        </p:spPr>
+        <p:style>
+          <a:lnRef idx="1">
+            <a:schemeClr val="accent1"/>
+          </a:lnRef>
+          <a:fillRef idx="3">
+            <a:schemeClr val="accent1"/>
+          </a:fillRef>
+          <a:effectRef idx="2">
+            <a:schemeClr val="accent1"/>
+          </a:effectRef>
+          <a:fontRef idx="minor">
+            <a:schemeClr val="lt1"/>
+          </a:fontRef>
+        </p:style>
+        <p:txBody>
+          <a:bodyPr rtlCol="0" anchor="ctr"/>
+          <a:lstStyle/>
+          <a:p>
+            <a:pPr algn="ctr"/>
+          </a:p>
+        </p:txBody>
+      </p:sp>
+      <p:sp>
+        <p:nvSpPr>
+          <p:cNvPr id="4" name="Rectangle 3"/>
+          <p:cNvSpPr/>
+          <p:nvPr/>
+        </p:nvSpPr>
+        <p:spPr>
+          <a:xfrm>
+            <a:off x="0" y="54864"/>
+            <a:ext cx="228600" cy="6803136"/>
+          </a:xfrm>
+          <a:prstGeom prst="rect">
+            <a:avLst/>
+          </a:prstGeom>
+          <a:solidFill>
+            <a:srgbClr val="6366F1"/>
+          </a:solidFill>
+          <a:ln>
+            <a:noFill/>
+          </a:ln>
+        </p:spPr>
+        <p:style>
+          <a:lnRef idx="1">
+            <a:schemeClr val="accent1"/>
+          </a:lnRef>
+          <a:fillRef idx="3">
+            <a:schemeClr val="accent1"/>
+          </a:fillRef>
+          <a:effectRef idx="2">
+            <a:schemeClr val="accent1"/>
+          </a:effectRef>
+          <a:fontRef idx="minor">
+            <a:schemeClr val="lt1"/>
+          </a:fontRef>
+        </p:style>
+        <p:txBody>
+          <a:bodyPr rtlCol="0" anchor="ctr"/>
+          <a:lstStyle/>
+          <a:p>
+            <a:pPr algn="ctr"/>
+          </a:p>
+        </p:txBody>
+      </p:sp>
+      <p:sp>
+        <p:nvSpPr>
+          <p:cNvPr id="5" name="TextBox 4"/>
           <p:cNvSpPr txBox="1"/>
           <p:nvPr/>
         </p:nvSpPr>
         <p:spPr>
           <a:xfrm>
-            <a:off x="731520" y="548640"/>
-            <a:ext cx="10789920" cy="731520"/>
+            <a:off x="502920" y="164592"/>
+            <a:ext cx="11430000" cy="594360"/>
           </a:xfrm>
           <a:prstGeom prst="rect">
             <a:avLst/>
@@ -5047,34 +9969,76 @@
           <a:noFill/>
         </p:spPr>
         <p:txBody>
-          <a:bodyPr wrap="none">
+          <a:bodyPr wrap="square">
             <a:spAutoFit/>
           </a:bodyPr>
           <a:lstStyle/>
           <a:p>
-            <a:pPr>
-              <a:defRPr sz="3000" b="1">
-                <a:solidFill>
-                  <a:srgbClr val="FFFFFF"/>
-                </a:solidFill>
-              </a:defRPr>
-            </a:pPr>
-            <a:r>
-              <a:t>1.4 Auto Routing vs. Manual Model Pinning (continued)</a:t>
-            </a:r>
-          </a:p>
-        </p:txBody>
-      </p:sp>
-      <p:sp>
-        <p:nvSpPr>
-          <p:cNvPr id="3" name="TextBox 2"/>
+            <a:pPr algn="l"/>
+            <a:r>
+              <a:rPr sz="2600" b="1">
+                <a:solidFill>
+                  <a:srgbClr val="18181B"/>
+                </a:solidFill>
+              </a:rPr>
+              <a:t>1.6  Configuring .cursorrules</a:t>
+            </a:r>
+          </a:p>
+        </p:txBody>
+      </p:sp>
+      <p:sp>
+        <p:nvSpPr>
+          <p:cNvPr id="6" name="Rectangle 5"/>
+          <p:cNvSpPr/>
+          <p:nvPr/>
+        </p:nvSpPr>
+        <p:spPr>
+          <a:xfrm>
+            <a:off x="502920" y="804672"/>
+            <a:ext cx="11430000" cy="12700"/>
+          </a:xfrm>
+          <a:prstGeom prst="rect">
+            <a:avLst/>
+          </a:prstGeom>
+          <a:solidFill>
+            <a:srgbClr val="A1A1AA"/>
+          </a:solidFill>
+          <a:ln>
+            <a:noFill/>
+          </a:ln>
+        </p:spPr>
+        <p:style>
+          <a:lnRef idx="1">
+            <a:schemeClr val="accent1"/>
+          </a:lnRef>
+          <a:fillRef idx="3">
+            <a:schemeClr val="accent1"/>
+          </a:fillRef>
+          <a:effectRef idx="2">
+            <a:schemeClr val="accent1"/>
+          </a:effectRef>
+          <a:fontRef idx="minor">
+            <a:schemeClr val="lt1"/>
+          </a:fontRef>
+        </p:style>
+        <p:txBody>
+          <a:bodyPr rtlCol="0" anchor="ctr"/>
+          <a:lstStyle/>
+          <a:p>
+            <a:pPr algn="ctr"/>
+          </a:p>
+        </p:txBody>
+      </p:sp>
+      <p:sp>
+        <p:nvSpPr>
+          <p:cNvPr id="7" name="TextBox 6"/>
           <p:cNvSpPr txBox="1"/>
           <p:nvPr/>
         </p:nvSpPr>
         <p:spPr>
           <a:xfrm>
-            <a:off x="914400" y="1463040"/>
-            <a:ext cx="10241280" cy="4572000"/>
+            <a:off x="502920" y="960120"/>
+            <a:ext cx="11247120" cy="1005840"/>
           </a:xfrm>
           <a:prstGeom prst="rect">
             <a:avLst/>
@@ -5082,82 +10046,33 @@
           <a:noFill/>
         </p:spPr>
         <p:txBody>
-          <a:bodyPr wrap="none">
+          <a:bodyPr wrap="square">
             <a:spAutoFit/>
           </a:bodyPr>
           <a:lstStyle/>
           <a:p>
-            <a:pPr>
-              <a:defRPr sz="2000">
-                <a:solidFill>
-                  <a:srgbClr val="FFFFFF"/>
-                </a:solidFill>
-              </a:defRPr>
-            </a:pPr>
-            <a:r>
-              <a:t>• **When to pin manually:**</a:t>
-            </a:r>
-          </a:p>
-          <a:p>
-            <a:pPr>
-              <a:defRPr sz="2000">
-                <a:solidFill>
-                  <a:srgbClr val="FFFFFF"/>
-                </a:solidFill>
-              </a:defRPr>
-            </a:pPr>
-            <a:r>
-              <a:t>• Any session running more than 10–15 turns (cost governance)</a:t>
-            </a:r>
-          </a:p>
-          <a:p>
-            <a:pPr>
-              <a:defRPr sz="2000">
-                <a:solidFill>
-                  <a:srgbClr val="FFFFFF"/>
-                </a:solidFill>
-              </a:defRPr>
-            </a:pPr>
-            <a:r>
-              <a:t>• Parallel agent loops where you need consistent behavior for comparison</a:t>
-            </a:r>
-          </a:p>
-          <a:p>
-            <a:pPr>
-              <a:defRPr sz="2000">
-                <a:solidFill>
-                  <a:srgbClr val="FFFFFF"/>
-                </a:solidFill>
-              </a:defRPr>
-            </a:pPr>
-            <a:r>
-              <a:t>• Regulated environments where model selection must be auditable</a:t>
-            </a:r>
-          </a:p>
-          <a:p>
-            <a:pPr>
-              <a:defRPr sz="2000">
-                <a:solidFill>
-                  <a:srgbClr val="FFFFFF"/>
-                </a:solidFill>
-              </a:defRPr>
-            </a:pPr>
-            <a:r>
-              <a:t>• When onboarding a new team member and you want reproducible demos</a:t>
-            </a:r>
-          </a:p>
-        </p:txBody>
-      </p:sp>
-      <p:sp>
-        <p:nvSpPr>
-          <p:cNvPr id="4" name="TextBox 3"/>
+            <a:pPr algn="l"/>
+            <a:r>
+              <a:rPr sz="1500">
+                <a:solidFill>
+                  <a:srgbClr val="18181B"/>
+                </a:solidFill>
+              </a:rPr>
+              <a:t>▸  .cursorrules is a project-level system prompt for Cursor: placed in the repository root, loaded at the start of every Composer session — the AI behavioral contract your whole team shares</a:t>
+            </a:r>
+          </a:p>
+        </p:txBody>
+      </p:sp>
+      <p:sp>
+        <p:nvSpPr>
+          <p:cNvPr id="8" name="TextBox 7"/>
           <p:cNvSpPr txBox="1"/>
           <p:nvPr/>
         </p:nvSpPr>
         <p:spPr>
           <a:xfrm>
-            <a:off x="457200" y="6309360"/>
-            <a:ext cx="11247120" cy="274320"/>
+            <a:off x="502920" y="1828800"/>
+            <a:ext cx="11247120" cy="1005840"/>
           </a:xfrm>
           <a:prstGeom prst="rect">
             <a:avLst/>
@@ -5165,20 +10080,155 @@
           <a:noFill/>
         </p:spPr>
         <p:txBody>
-          <a:bodyPr wrap="none">
+          <a:bodyPr wrap="square">
             <a:spAutoFit/>
           </a:bodyPr>
           <a:lstStyle/>
           <a:p>
-            <a:pPr>
-              <a:defRPr sz="1100">
+            <a:pPr algn="l"/>
+            <a:r>
+              <a:rPr sz="1500">
+                <a:solidFill>
+                  <a:srgbClr val="18181B"/>
+                </a:solidFill>
+              </a:rPr>
+              <a:t>▸  Weak rules fail because they are non-operationalizable: 'Write clean, readable code' gives the model nothing to verify against; 'Max function length: 40 lines, extract if longer' is verifiable</a:t>
+            </a:r>
+          </a:p>
+        </p:txBody>
+      </p:sp>
+      <p:sp>
+        <p:nvSpPr>
+          <p:cNvPr id="9" name="TextBox 8"/>
+          <p:cNvSpPr txBox="1"/>
+          <p:nvPr/>
+        </p:nvSpPr>
+        <p:spPr>
+          <a:xfrm>
+            <a:off x="502920" y="2697480"/>
+            <a:ext cx="11247120" cy="1005840"/>
+          </a:xfrm>
+          <a:prstGeom prst="rect">
+            <a:avLst/>
+          </a:prstGeom>
+          <a:noFill/>
+        </p:spPr>
+        <p:txBody>
+          <a:bodyPr wrap="square">
+            <a:spAutoFit/>
+          </a:bodyPr>
+          <a:lstStyle/>
+          <a:p>
+            <a:pPr algn="l"/>
+            <a:r>
+              <a:rPr sz="1500">
+                <a:solidFill>
+                  <a:srgbClr val="18181B"/>
+                </a:solidFill>
+              </a:rPr>
+              <a:t>▸  Required categories in a production-ready file: stack pins (language, runtime, framework, DB, test runner, package manager), code standards, forbidden patterns, and explicit AI behavior instructions</a:t>
+            </a:r>
+          </a:p>
+        </p:txBody>
+      </p:sp>
+      <p:sp>
+        <p:nvSpPr>
+          <p:cNvPr id="10" name="TextBox 9"/>
+          <p:cNvSpPr txBox="1"/>
+          <p:nvPr/>
+        </p:nvSpPr>
+        <p:spPr>
+          <a:xfrm>
+            <a:off x="502920" y="3566160"/>
+            <a:ext cx="11247120" cy="1005840"/>
+          </a:xfrm>
+          <a:prstGeom prst="rect">
+            <a:avLst/>
+          </a:prstGeom>
+          <a:noFill/>
+        </p:spPr>
+        <p:txBody>
+          <a:bodyPr wrap="square">
+            <a:spAutoFit/>
+          </a:bodyPr>
+          <a:lstStyle/>
+          <a:p>
+            <a:pPr algn="l"/>
+            <a:r>
+              <a:rPr sz="1500">
+                <a:solidFill>
+                  <a:srgbClr val="18181B"/>
+                </a:solidFill>
+              </a:rPr>
+              <a:t>▸  Forbidden patterns section is as important as standards: 'No raw SQL — use Drizzle query builder only', 'No console.log in production code — use lib/logger.ts', 'No direct DOM manipulation outside React components'</a:t>
+            </a:r>
+          </a:p>
+        </p:txBody>
+      </p:sp>
+      <p:sp>
+        <p:nvSpPr>
+          <p:cNvPr id="11" name="TextBox 10"/>
+          <p:cNvSpPr txBox="1"/>
+          <p:nvPr/>
+        </p:nvSpPr>
+        <p:spPr>
+          <a:xfrm>
+            <a:off x="502920" y="4434840"/>
+            <a:ext cx="11247120" cy="1005840"/>
+          </a:xfrm>
+          <a:prstGeom prst="rect">
+            <a:avLst/>
+          </a:prstGeom>
+          <a:noFill/>
+        </p:spPr>
+        <p:txBody>
+          <a:bodyPr wrap="square">
+            <a:spAutoFit/>
+          </a:bodyPr>
+          <a:lstStyle/>
+          <a:p>
+            <a:pPr algn="l"/>
+            <a:r>
+              <a:rPr sz="1500">
+                <a:solidFill>
+                  <a:srgbClr val="18181B"/>
+                </a:solidFill>
+              </a:rPr>
+              <a:t>▸  Verify your file is tracked: check git ls-files .cursorrules — some community starters add it to .gitignore, silently removing your team's shared AI contract</a:t>
+            </a:r>
+          </a:p>
+        </p:txBody>
+      </p:sp>
+      <p:sp>
+        <p:nvSpPr>
+          <p:cNvPr id="12" name="TextBox 11"/>
+          <p:cNvSpPr txBox="1"/>
+          <p:nvPr/>
+        </p:nvSpPr>
+        <p:spPr>
+          <a:xfrm>
+            <a:off x="457200" y="6510528"/>
+            <a:ext cx="10972800" cy="274320"/>
+          </a:xfrm>
+          <a:prstGeom prst="rect">
+            <a:avLst/>
+          </a:prstGeom>
+          <a:noFill/>
+        </p:spPr>
+        <p:txBody>
+          <a:bodyPr wrap="square">
+            <a:spAutoFit/>
+          </a:bodyPr>
+          <a:lstStyle/>
+          <a:p>
+            <a:pPr algn="l"/>
+            <a:r>
+              <a:rPr sz="900" b="0">
                 <a:solidFill>
                   <a:srgbClr val="A1A1AA"/>
                 </a:solidFill>
-              </a:defRPr>
-            </a:pPr>
-            <a:r>
-              <a:t>academy.kspl.tech | Koenig AI Academy</a:t>
+              </a:rPr>
+              <a:t>academy.kspl.tech  |  Koenig AI Academy</a:t>
             </a:r>
           </a:p>
         </p:txBody>
@@ -5509,4 +10559,324 @@
   </a:objectDefaults>
   <a:extraClrSchemeLst/>
 </a:theme>
+</file>
+
+<file path=ppt/theme/theme2.xml><?xml version="1.0" encoding="utf-8"?>
+<a:theme xmlns:a="http://schemas.openxmlformats.org/drawingml/2006/main" name="Office Theme">
+  <a:themeElements>
+    <a:clrScheme name="Office">
+      <a:dk1>
+        <a:sysClr val="windowText" lastClr="000000"/>
+      </a:dk1>
+      <a:lt1>
+        <a:sysClr val="window" lastClr="FFFFFF"/>
+      </a:lt1>
+      <a:dk2>
+        <a:srgbClr val="1F497D"/>
+      </a:dk2>
+      <a:lt2>
+        <a:srgbClr val="EEECE1"/>
+      </a:lt2>
+      <a:accent1>
+        <a:srgbClr val="4F81BD"/>
+      </a:accent1>
+      <a:accent2>
+        <a:srgbClr val="C0504D"/>
+      </a:accent2>
+      <a:accent3>
+        <a:srgbClr val="9BBB59"/>
+      </a:accent3>
+      <a:accent4>
+        <a:srgbClr val="8064A2"/>
+      </a:accent4>
+      <a:accent5>
+        <a:srgbClr val="4BACC6"/>
+      </a:accent5>
+      <a:accent6>
+        <a:srgbClr val="F79646"/>
+      </a:accent6>
+      <a:hlink>
+        <a:srgbClr val="0000FF"/>
+      </a:hlink>
+      <a:folHlink>
+        <a:srgbClr val="800080"/>
+      </a:folHlink>
+    </a:clrScheme>
+    <a:fontScheme name="Office">
+      <a:majorFont>
+        <a:latin typeface="Calibri"/>
+        <a:ea typeface=""/>
+        <a:cs typeface=""/>
+        <a:font script="Jpan" typeface="ＭＳ Ｐゴシック"/>
+        <a:font script="Hang" typeface="맑은 고딕"/>
+        <a:font script="Hans" typeface="宋体"/>
+        <a:font script="Hant" typeface="新細明體"/>
+        <a:font script="Arab" typeface="Times New Roman"/>
+        <a:font script="Hebr" typeface="Times New Roman"/>
+        <a:font script="Thai" typeface="Angsana New"/>
+        <a:font script="Ethi" typeface="Nyala"/>
+        <a:font script="Beng" typeface="Vrinda"/>
+        <a:font script="Gujr" typeface="Shruti"/>
+        <a:font script="Khmr" typeface="MoolBoran"/>
+        <a:font script="Knda" typeface="Tunga"/>
+        <a:font script="Guru" typeface="Raavi"/>
+        <a:font script="Cans" typeface="Euphemia"/>
+        <a:font script="Cher" typeface="Plantagenet Cherokee"/>
+        <a:font script="Yiii" typeface="Microsoft Yi Baiti"/>
+        <a:font script="Tibt" typeface="Microsoft Himalaya"/>
+        <a:font script="Thaa" typeface="MV Boli"/>
+        <a:font script="Deva" typeface="Mangal"/>
+        <a:font script="Telu" typeface="Gautami"/>
+        <a:font script="Taml" typeface="Latha"/>
+        <a:font script="Syrc" typeface="Estrangelo Edessa"/>
+        <a:font script="Orya" typeface="Kalinga"/>
+        <a:font script="Mlym" typeface="Kartika"/>
+        <a:font script="Laoo" typeface="DokChampa"/>
+        <a:font script="Sinh" typeface="Iskoola Pota"/>
+        <a:font script="Mong" typeface="Mongolian Baiti"/>
+        <a:font script="Viet" typeface="Times New Roman"/>
+        <a:font script="Uigh" typeface="Microsoft Uighur"/>
+        <a:font script="Geor" typeface="Sylfaen"/>
+      </a:majorFont>
+      <a:minorFont>
+        <a:latin typeface="Calibri"/>
+        <a:ea typeface=""/>
+        <a:cs typeface=""/>
+        <a:font script="Jpan" typeface="ＭＳ Ｐゴシック"/>
+        <a:font script="Hang" typeface="맑은 고딕"/>
+        <a:font script="Hans" typeface="宋体"/>
+        <a:font script="Hant" typeface="新細明體"/>
+        <a:font script="Arab" typeface="Arial"/>
+        <a:font script="Hebr" typeface="Arial"/>
+        <a:font script="Thai" typeface="Cordia New"/>
+        <a:font script="Ethi" typeface="Nyala"/>
+        <a:font script="Beng" typeface="Vrinda"/>
+        <a:font script="Gujr" typeface="Shruti"/>
+        <a:font script="Khmr" typeface="DaunPenh"/>
+        <a:font script="Knda" typeface="Tunga"/>
+        <a:font script="Guru" typeface="Raavi"/>
+        <a:font script="Cans" typeface="Euphemia"/>
+        <a:font script="Cher" typeface="Plantagenet Cherokee"/>
+        <a:font script="Yiii" typeface="Microsoft Yi Baiti"/>
+        <a:font script="Tibt" typeface="Microsoft Himalaya"/>
+        <a:font script="Thaa" typeface="MV Boli"/>
+        <a:font script="Deva" typeface="Mangal"/>
+        <a:font script="Telu" typeface="Gautami"/>
+        <a:font script="Taml" typeface="Latha"/>
+        <a:font script="Syrc" typeface="Estrangelo Edessa"/>
+        <a:font script="Orya" typeface="Kalinga"/>
+        <a:font script="Mlym" typeface="Kartika"/>
+        <a:font script="Laoo" typeface="DokChampa"/>
+        <a:font script="Sinh" typeface="Iskoola Pota"/>
+        <a:font script="Mong" typeface="Mongolian Baiti"/>
+        <a:font script="Viet" typeface="Arial"/>
+        <a:font script="Uigh" typeface="Microsoft Uighur"/>
+        <a:font script="Geor" typeface="Sylfaen"/>
+      </a:minorFont>
+    </a:fontScheme>
+    <a:fmtScheme name="Office">
+      <a:fillStyleLst>
+        <a:solidFill>
+          <a:schemeClr val="phClr"/>
+        </a:solidFill>
+        <a:gradFill rotWithShape="1">
+          <a:gsLst>
+            <a:gs pos="0">
+              <a:schemeClr val="phClr">
+                <a:tint val="50000"/>
+                <a:satMod val="300000"/>
+              </a:schemeClr>
+            </a:gs>
+            <a:gs pos="35000">
+              <a:schemeClr val="phClr">
+                <a:tint val="37000"/>
+                <a:satMod val="300000"/>
+              </a:schemeClr>
+            </a:gs>
+            <a:gs pos="100000">
+              <a:schemeClr val="phClr">
+                <a:tint val="15000"/>
+                <a:satMod val="350000"/>
+              </a:schemeClr>
+            </a:gs>
+          </a:gsLst>
+          <a:lin ang="16200000" scaled="1"/>
+        </a:gradFill>
+        <a:gradFill rotWithShape="1">
+          <a:gsLst>
+            <a:gs pos="0">
+              <a:schemeClr val="phClr">
+                <a:tint val="100000"/>
+                <a:shade val="100000"/>
+                <a:satMod val="130000"/>
+              </a:schemeClr>
+            </a:gs>
+            <a:gs pos="100000">
+              <a:schemeClr val="phClr">
+                <a:tint val="50000"/>
+                <a:shade val="100000"/>
+                <a:satMod val="350000"/>
+              </a:schemeClr>
+            </a:gs>
+          </a:gsLst>
+          <a:lin ang="16200000" scaled="0"/>
+        </a:gradFill>
+      </a:fillStyleLst>
+      <a:lnStyleLst>
+        <a:ln w="9525" cap="flat" cmpd="sng" algn="ctr">
+          <a:solidFill>
+            <a:schemeClr val="phClr">
+              <a:shade val="95000"/>
+              <a:satMod val="105000"/>
+            </a:schemeClr>
+          </a:solidFill>
+          <a:prstDash val="solid"/>
+        </a:ln>
+        <a:ln w="25400" cap="flat" cmpd="sng" algn="ctr">
+          <a:solidFill>
+            <a:schemeClr val="phClr"/>
+          </a:solidFill>
+          <a:prstDash val="solid"/>
+        </a:ln>
+        <a:ln w="38100" cap="flat" cmpd="sng" algn="ctr">
+          <a:solidFill>
+            <a:schemeClr val="phClr"/>
+          </a:solidFill>
+          <a:prstDash val="solid"/>
+        </a:ln>
+      </a:lnStyleLst>
+      <a:effectStyleLst>
+        <a:effectStyle>
+          <a:effectLst>
+            <a:outerShdw blurRad="40000" dist="20000" dir="5400000" rotWithShape="0">
+              <a:srgbClr val="000000">
+                <a:alpha val="38000"/>
+              </a:srgbClr>
+            </a:outerShdw>
+          </a:effectLst>
+        </a:effectStyle>
+        <a:effectStyle>
+          <a:effectLst>
+            <a:outerShdw blurRad="40000" dist="23000" dir="5400000" rotWithShape="0">
+              <a:srgbClr val="000000">
+                <a:alpha val="35000"/>
+              </a:srgbClr>
+            </a:outerShdw>
+          </a:effectLst>
+        </a:effectStyle>
+        <a:effectStyle>
+          <a:effectLst>
+            <a:outerShdw blurRad="40000" dist="23000" dir="5400000" rotWithShape="0">
+              <a:srgbClr val="000000">
+                <a:alpha val="35000"/>
+              </a:srgbClr>
+            </a:outerShdw>
+          </a:effectLst>
+          <a:scene3d>
+            <a:camera prst="orthographicFront">
+              <a:rot lat="0" lon="0" rev="0"/>
+            </a:camera>
+            <a:lightRig rig="threePt" dir="t">
+              <a:rot lat="0" lon="0" rev="1200000"/>
+            </a:lightRig>
+          </a:scene3d>
+          <a:sp3d>
+            <a:bevelT w="63500" h="25400"/>
+          </a:sp3d>
+        </a:effectStyle>
+      </a:effectStyleLst>
+      <a:bgFillStyleLst>
+        <a:solidFill>
+          <a:schemeClr val="phClr"/>
+        </a:solidFill>
+        <a:gradFill rotWithShape="1">
+          <a:gsLst>
+            <a:gs pos="0">
+              <a:schemeClr val="phClr">
+                <a:tint val="40000"/>
+                <a:satMod val="350000"/>
+              </a:schemeClr>
+            </a:gs>
+            <a:gs pos="40000">
+              <a:schemeClr val="phClr">
+                <a:tint val="45000"/>
+                <a:shade val="99000"/>
+                <a:satMod val="350000"/>
+              </a:schemeClr>
+            </a:gs>
+            <a:gs pos="100000">
+              <a:schemeClr val="phClr">
+                <a:shade val="20000"/>
+                <a:satMod val="255000"/>
+              </a:schemeClr>
+            </a:gs>
+          </a:gsLst>
+          <a:path path="circle">
+            <a:fillToRect l="50000" t="-80000" r="50000" b="180000"/>
+          </a:path>
+        </a:gradFill>
+        <a:gradFill rotWithShape="1">
+          <a:gsLst>
+            <a:gs pos="0">
+              <a:schemeClr val="phClr">
+                <a:tint val="80000"/>
+                <a:satMod val="300000"/>
+              </a:schemeClr>
+            </a:gs>
+            <a:gs pos="100000">
+              <a:schemeClr val="phClr">
+                <a:shade val="30000"/>
+                <a:satMod val="200000"/>
+              </a:schemeClr>
+            </a:gs>
+          </a:gsLst>
+          <a:path path="circle">
+            <a:fillToRect l="50000" t="50000" r="50000" b="50000"/>
+          </a:path>
+        </a:gradFill>
+      </a:bgFillStyleLst>
+    </a:fmtScheme>
+  </a:themeElements>
+  <a:objectDefaults>
+    <a:spDef>
+      <a:spPr/>
+      <a:bodyPr/>
+      <a:lstStyle/>
+      <a:style>
+        <a:lnRef idx="1">
+          <a:schemeClr val="accent1"/>
+        </a:lnRef>
+        <a:fillRef idx="3">
+          <a:schemeClr val="accent1"/>
+        </a:fillRef>
+        <a:effectRef idx="2">
+          <a:schemeClr val="accent1"/>
+        </a:effectRef>
+        <a:fontRef idx="minor">
+          <a:schemeClr val="lt1"/>
+        </a:fontRef>
+      </a:style>
+    </a:spDef>
+    <a:lnDef>
+      <a:spPr/>
+      <a:bodyPr/>
+      <a:lstStyle/>
+      <a:style>
+        <a:lnRef idx="2">
+          <a:schemeClr val="accent1"/>
+        </a:lnRef>
+        <a:fillRef idx="0">
+          <a:schemeClr val="accent1"/>
+        </a:fillRef>
+        <a:effectRef idx="1">
+          <a:schemeClr val="accent1"/>
+        </a:effectRef>
+        <a:fontRef idx="minor">
+          <a:schemeClr val="tx1"/>
+        </a:fontRef>
+      </a:style>
+    </a:lnDef>
+  </a:objectDefaults>
+  <a:extraClrSchemeLst/>
+</a:theme>
 </file>